--- a/China/CT/Presentation1.pptx
+++ b/China/CT/Presentation1.pptx
@@ -7,6 +7,8 @@
   <p:sldIdLst>
     <p:sldId id="256" r:id="rId2"/>
     <p:sldId id="257" r:id="rId3"/>
+    <p:sldId id="258" r:id="rId4"/>
+    <p:sldId id="259" r:id="rId5"/>
   </p:sldIdLst>
   <p:sldSz cx="12192000" cy="6858000"/>
   <p:notesSz cx="6858000" cy="9144000"/>
@@ -105,6 +107,11 @@
       </a:defRPr>
     </a:lvl9pPr>
   </p:defaultTextStyle>
+  <p:extLst>
+    <p:ext uri="{EFAFB233-063F-42B5-8137-9DF3F51BA10A}">
+      <p15:sldGuideLst xmlns:p15="http://schemas.microsoft.com/office/powerpoint/2012/main"/>
+    </p:ext>
+  </p:extLst>
 </p:presentation>
 </file>
 
@@ -255,7 +262,7 @@
           <a:p>
             <a:fld id="{8914AFC7-9D55-48F2-BBD2-2A90358CCC0E}" type="datetimeFigureOut">
               <a:rPr lang="en-US" smtClean="0"/>
-              <a:t>5/1/2026</a:t>
+              <a:t>5/2/2026</a:t>
             </a:fld>
             <a:endParaRPr lang="en-US"/>
           </a:p>
@@ -453,7 +460,7 @@
           <a:p>
             <a:fld id="{8914AFC7-9D55-48F2-BBD2-2A90358CCC0E}" type="datetimeFigureOut">
               <a:rPr lang="en-US" smtClean="0"/>
-              <a:t>5/1/2026</a:t>
+              <a:t>5/2/2026</a:t>
             </a:fld>
             <a:endParaRPr lang="en-US"/>
           </a:p>
@@ -661,7 +668,7 @@
           <a:p>
             <a:fld id="{8914AFC7-9D55-48F2-BBD2-2A90358CCC0E}" type="datetimeFigureOut">
               <a:rPr lang="en-US" smtClean="0"/>
-              <a:t>5/1/2026</a:t>
+              <a:t>5/2/2026</a:t>
             </a:fld>
             <a:endParaRPr lang="en-US"/>
           </a:p>
@@ -859,7 +866,7 @@
           <a:p>
             <a:fld id="{8914AFC7-9D55-48F2-BBD2-2A90358CCC0E}" type="datetimeFigureOut">
               <a:rPr lang="en-US" smtClean="0"/>
-              <a:t>5/1/2026</a:t>
+              <a:t>5/2/2026</a:t>
             </a:fld>
             <a:endParaRPr lang="en-US"/>
           </a:p>
@@ -1134,7 +1141,7 @@
           <a:p>
             <a:fld id="{8914AFC7-9D55-48F2-BBD2-2A90358CCC0E}" type="datetimeFigureOut">
               <a:rPr lang="en-US" smtClean="0"/>
-              <a:t>5/1/2026</a:t>
+              <a:t>5/2/2026</a:t>
             </a:fld>
             <a:endParaRPr lang="en-US"/>
           </a:p>
@@ -1399,7 +1406,7 @@
           <a:p>
             <a:fld id="{8914AFC7-9D55-48F2-BBD2-2A90358CCC0E}" type="datetimeFigureOut">
               <a:rPr lang="en-US" smtClean="0"/>
-              <a:t>5/1/2026</a:t>
+              <a:t>5/2/2026</a:t>
             </a:fld>
             <a:endParaRPr lang="en-US"/>
           </a:p>
@@ -1811,7 +1818,7 @@
           <a:p>
             <a:fld id="{8914AFC7-9D55-48F2-BBD2-2A90358CCC0E}" type="datetimeFigureOut">
               <a:rPr lang="en-US" smtClean="0"/>
-              <a:t>5/1/2026</a:t>
+              <a:t>5/2/2026</a:t>
             </a:fld>
             <a:endParaRPr lang="en-US"/>
           </a:p>
@@ -1952,7 +1959,7 @@
           <a:p>
             <a:fld id="{8914AFC7-9D55-48F2-BBD2-2A90358CCC0E}" type="datetimeFigureOut">
               <a:rPr lang="en-US" smtClean="0"/>
-              <a:t>5/1/2026</a:t>
+              <a:t>5/2/2026</a:t>
             </a:fld>
             <a:endParaRPr lang="en-US"/>
           </a:p>
@@ -2065,7 +2072,7 @@
           <a:p>
             <a:fld id="{8914AFC7-9D55-48F2-BBD2-2A90358CCC0E}" type="datetimeFigureOut">
               <a:rPr lang="en-US" smtClean="0"/>
-              <a:t>5/1/2026</a:t>
+              <a:t>5/2/2026</a:t>
             </a:fld>
             <a:endParaRPr lang="en-US"/>
           </a:p>
@@ -2376,7 +2383,7 @@
           <a:p>
             <a:fld id="{8914AFC7-9D55-48F2-BBD2-2A90358CCC0E}" type="datetimeFigureOut">
               <a:rPr lang="en-US" smtClean="0"/>
-              <a:t>5/1/2026</a:t>
+              <a:t>5/2/2026</a:t>
             </a:fld>
             <a:endParaRPr lang="en-US"/>
           </a:p>
@@ -2664,7 +2671,7 @@
           <a:p>
             <a:fld id="{8914AFC7-9D55-48F2-BBD2-2A90358CCC0E}" type="datetimeFigureOut">
               <a:rPr lang="en-US" smtClean="0"/>
-              <a:t>5/1/2026</a:t>
+              <a:t>5/2/2026</a:t>
             </a:fld>
             <a:endParaRPr lang="en-US"/>
           </a:p>
@@ -2905,7 +2912,7 @@
           <a:p>
             <a:fld id="{8914AFC7-9D55-48F2-BBD2-2A90358CCC0E}" type="datetimeFigureOut">
               <a:rPr lang="en-US" smtClean="0"/>
-              <a:t>5/1/2026</a:t>
+              <a:t>5/2/2026</a:t>
             </a:fld>
             <a:endParaRPr lang="en-US"/>
           </a:p>
@@ -5024,6 +5031,605 @@
 </p:sld>
 </file>
 
+<file path=ppt/slides/slide3.xml><?xml version="1.0" encoding="utf-8"?>
+<p:sld xmlns:a="http://schemas.openxmlformats.org/drawingml/2006/main" xmlns:r="http://schemas.openxmlformats.org/officeDocument/2006/relationships" xmlns:p="http://schemas.openxmlformats.org/presentationml/2006/main">
+  <p:cSld>
+    <p:spTree>
+      <p:nvGrpSpPr>
+        <p:cNvPr id="1" name=""/>
+        <p:cNvGrpSpPr/>
+        <p:nvPr/>
+      </p:nvGrpSpPr>
+      <p:grpSpPr>
+        <a:xfrm>
+          <a:off x="0" y="0"/>
+          <a:ext cx="0" cy="0"/>
+          <a:chOff x="0" y="0"/>
+          <a:chExt cx="0" cy="0"/>
+        </a:xfrm>
+      </p:grpSpPr>
+      <p:grpSp>
+        <p:nvGrpSpPr>
+          <p:cNvPr id="25" name="组合 24">
+            <a:extLst>
+              <a:ext uri="{FF2B5EF4-FFF2-40B4-BE49-F238E27FC236}">
+                <a16:creationId xmlns:a16="http://schemas.microsoft.com/office/drawing/2014/main" id="{CECDF358-048A-90DE-A23B-A15B3D36D924}"/>
+              </a:ext>
+            </a:extLst>
+          </p:cNvPr>
+          <p:cNvGrpSpPr/>
+          <p:nvPr/>
+        </p:nvGrpSpPr>
+        <p:grpSpPr>
+          <a:xfrm>
+            <a:off x="853699" y="806533"/>
+            <a:ext cx="8173923" cy="5151707"/>
+            <a:chOff x="853699" y="806533"/>
+            <a:chExt cx="8173923" cy="5151707"/>
+          </a:xfrm>
+        </p:grpSpPr>
+        <p:pic>
+          <p:nvPicPr>
+            <p:cNvPr id="3" name="图片 2">
+              <a:extLst>
+                <a:ext uri="{FF2B5EF4-FFF2-40B4-BE49-F238E27FC236}">
+                  <a16:creationId xmlns:a16="http://schemas.microsoft.com/office/drawing/2014/main" id="{E24D5716-B314-93E7-283E-863151F3CF49}"/>
+                </a:ext>
+              </a:extLst>
+            </p:cNvPr>
+            <p:cNvPicPr>
+              <a:picLocks noChangeAspect="1"/>
+            </p:cNvPicPr>
+            <p:nvPr/>
+          </p:nvPicPr>
+          <p:blipFill>
+            <a:blip r:embed="rId2"/>
+            <a:srcRect r="17734"/>
+            <a:stretch>
+              <a:fillRect/>
+            </a:stretch>
+          </p:blipFill>
+          <p:spPr>
+            <a:xfrm>
+              <a:off x="853699" y="899759"/>
+              <a:ext cx="8173923" cy="5058481"/>
+            </a:xfrm>
+            <a:prstGeom prst="rect">
+              <a:avLst/>
+            </a:prstGeom>
+          </p:spPr>
+        </p:pic>
+        <p:grpSp>
+          <p:nvGrpSpPr>
+            <p:cNvPr id="24" name="组合 23">
+              <a:extLst>
+                <a:ext uri="{FF2B5EF4-FFF2-40B4-BE49-F238E27FC236}">
+                  <a16:creationId xmlns:a16="http://schemas.microsoft.com/office/drawing/2014/main" id="{FCF94D84-69C9-ADDD-7387-481C927D48AC}"/>
+                </a:ext>
+              </a:extLst>
+            </p:cNvPr>
+            <p:cNvGrpSpPr/>
+            <p:nvPr/>
+          </p:nvGrpSpPr>
+          <p:grpSpPr>
+            <a:xfrm>
+              <a:off x="908988" y="806533"/>
+              <a:ext cx="7894190" cy="3444843"/>
+              <a:chOff x="908988" y="806533"/>
+              <a:chExt cx="7894190" cy="3444843"/>
+            </a:xfrm>
+          </p:grpSpPr>
+          <p:sp>
+            <p:nvSpPr>
+              <p:cNvPr id="4" name="文本框 3">
+                <a:extLst>
+                  <a:ext uri="{FF2B5EF4-FFF2-40B4-BE49-F238E27FC236}">
+                    <a16:creationId xmlns:a16="http://schemas.microsoft.com/office/drawing/2014/main" id="{8311176E-878A-E8D8-552C-A9589B3BADEA}"/>
+                  </a:ext>
+                </a:extLst>
+              </p:cNvPr>
+              <p:cNvSpPr txBox="1"/>
+              <p:nvPr/>
+            </p:nvSpPr>
+            <p:spPr>
+              <a:xfrm>
+                <a:off x="1737361" y="806533"/>
+                <a:ext cx="1122218" cy="369332"/>
+              </a:xfrm>
+              <a:prstGeom prst="rect">
+                <a:avLst/>
+              </a:prstGeom>
+              <a:noFill/>
+            </p:spPr>
+            <p:txBody>
+              <a:bodyPr wrap="square" rtlCol="0">
+                <a:spAutoFit/>
+              </a:bodyPr>
+              <a:lstStyle/>
+              <a:p>
+                <a:r>
+                  <a:rPr lang="en-US" altLang="zh-CN" dirty="0"/>
+                  <a:t>zoom1</a:t>
+                </a:r>
+                <a:endParaRPr lang="zh-CN" altLang="en-US" dirty="0"/>
+              </a:p>
+            </p:txBody>
+          </p:sp>
+          <p:sp>
+            <p:nvSpPr>
+              <p:cNvPr id="5" name="文本框 4">
+                <a:extLst>
+                  <a:ext uri="{FF2B5EF4-FFF2-40B4-BE49-F238E27FC236}">
+                    <a16:creationId xmlns:a16="http://schemas.microsoft.com/office/drawing/2014/main" id="{28CAB396-205D-A350-DA0D-B0118F03DA77}"/>
+                  </a:ext>
+                </a:extLst>
+              </p:cNvPr>
+              <p:cNvSpPr txBox="1"/>
+              <p:nvPr/>
+            </p:nvSpPr>
+            <p:spPr>
+              <a:xfrm>
+                <a:off x="3743241" y="806533"/>
+                <a:ext cx="1122218" cy="369332"/>
+              </a:xfrm>
+              <a:prstGeom prst="rect">
+                <a:avLst/>
+              </a:prstGeom>
+              <a:noFill/>
+            </p:spPr>
+            <p:txBody>
+              <a:bodyPr wrap="square" rtlCol="0">
+                <a:spAutoFit/>
+              </a:bodyPr>
+              <a:lstStyle/>
+              <a:p>
+                <a:r>
+                  <a:rPr lang="en-US" altLang="zh-CN" dirty="0"/>
+                  <a:t>zoom2</a:t>
+                </a:r>
+                <a:endParaRPr lang="zh-CN" altLang="en-US" dirty="0"/>
+              </a:p>
+            </p:txBody>
+          </p:sp>
+          <p:sp>
+            <p:nvSpPr>
+              <p:cNvPr id="6" name="文本框 5">
+                <a:extLst>
+                  <a:ext uri="{FF2B5EF4-FFF2-40B4-BE49-F238E27FC236}">
+                    <a16:creationId xmlns:a16="http://schemas.microsoft.com/office/drawing/2014/main" id="{6F34461C-B1D1-D818-ACEC-A2044A1E73BB}"/>
+                  </a:ext>
+                </a:extLst>
+              </p:cNvPr>
+              <p:cNvSpPr txBox="1"/>
+              <p:nvPr/>
+            </p:nvSpPr>
+            <p:spPr>
+              <a:xfrm>
+                <a:off x="6029242" y="806533"/>
+                <a:ext cx="1122218" cy="369332"/>
+              </a:xfrm>
+              <a:prstGeom prst="rect">
+                <a:avLst/>
+              </a:prstGeom>
+              <a:noFill/>
+            </p:spPr>
+            <p:txBody>
+              <a:bodyPr wrap="square" rtlCol="0">
+                <a:spAutoFit/>
+              </a:bodyPr>
+              <a:lstStyle/>
+              <a:p>
+                <a:r>
+                  <a:rPr lang="en-US" altLang="zh-CN" dirty="0"/>
+                  <a:t>focus</a:t>
+                </a:r>
+                <a:endParaRPr lang="zh-CN" altLang="en-US" dirty="0"/>
+              </a:p>
+            </p:txBody>
+          </p:sp>
+          <p:cxnSp>
+            <p:nvCxnSpPr>
+              <p:cNvPr id="8" name="直接箭头连接符 7">
+                <a:extLst>
+                  <a:ext uri="{FF2B5EF4-FFF2-40B4-BE49-F238E27FC236}">
+                    <a16:creationId xmlns:a16="http://schemas.microsoft.com/office/drawing/2014/main" id="{CBCF6EC9-9322-E643-BDA9-1C6EF6C1376E}"/>
+                  </a:ext>
+                </a:extLst>
+              </p:cNvPr>
+              <p:cNvCxnSpPr>
+                <a:cxnSpLocks/>
+              </p:cNvCxnSpPr>
+              <p:nvPr/>
+            </p:nvCxnSpPr>
+            <p:spPr>
+              <a:xfrm>
+                <a:off x="2493818" y="3291840"/>
+                <a:ext cx="1695796" cy="0"/>
+              </a:xfrm>
+              <a:prstGeom prst="straightConnector1">
+                <a:avLst/>
+              </a:prstGeom>
+              <a:ln>
+                <a:solidFill>
+                  <a:schemeClr val="tx1"/>
+                </a:solidFill>
+                <a:headEnd type="triangle"/>
+                <a:tailEnd type="triangle"/>
+              </a:ln>
+            </p:spPr>
+            <p:style>
+              <a:lnRef idx="2">
+                <a:schemeClr val="accent1"/>
+              </a:lnRef>
+              <a:fillRef idx="0">
+                <a:schemeClr val="accent1"/>
+              </a:fillRef>
+              <a:effectRef idx="1">
+                <a:schemeClr val="accent1"/>
+              </a:effectRef>
+              <a:fontRef idx="minor">
+                <a:schemeClr val="tx1"/>
+              </a:fontRef>
+            </p:style>
+          </p:cxnSp>
+          <p:cxnSp>
+            <p:nvCxnSpPr>
+              <p:cNvPr id="13" name="直接箭头连接符 12">
+                <a:extLst>
+                  <a:ext uri="{FF2B5EF4-FFF2-40B4-BE49-F238E27FC236}">
+                    <a16:creationId xmlns:a16="http://schemas.microsoft.com/office/drawing/2014/main" id="{F056C449-DCA6-8956-B1C5-B2F68C0AC8CF}"/>
+                  </a:ext>
+                </a:extLst>
+              </p:cNvPr>
+              <p:cNvCxnSpPr>
+                <a:cxnSpLocks/>
+              </p:cNvCxnSpPr>
+              <p:nvPr/>
+            </p:nvCxnSpPr>
+            <p:spPr>
+              <a:xfrm>
+                <a:off x="4713316" y="3283528"/>
+                <a:ext cx="1047404" cy="0"/>
+              </a:xfrm>
+              <a:prstGeom prst="straightConnector1">
+                <a:avLst/>
+              </a:prstGeom>
+              <a:ln>
+                <a:solidFill>
+                  <a:schemeClr val="tx1"/>
+                </a:solidFill>
+                <a:headEnd type="triangle"/>
+                <a:tailEnd type="triangle"/>
+              </a:ln>
+            </p:spPr>
+            <p:style>
+              <a:lnRef idx="2">
+                <a:schemeClr val="accent1"/>
+              </a:lnRef>
+              <a:fillRef idx="0">
+                <a:schemeClr val="accent1"/>
+              </a:fillRef>
+              <a:effectRef idx="1">
+                <a:schemeClr val="accent1"/>
+              </a:effectRef>
+              <a:fontRef idx="minor">
+                <a:schemeClr val="tx1"/>
+              </a:fontRef>
+            </p:style>
+          </p:cxnSp>
+          <p:sp>
+            <p:nvSpPr>
+              <p:cNvPr id="15" name="文本框 14">
+                <a:extLst>
+                  <a:ext uri="{FF2B5EF4-FFF2-40B4-BE49-F238E27FC236}">
+                    <a16:creationId xmlns:a16="http://schemas.microsoft.com/office/drawing/2014/main" id="{154A3129-484C-CF36-8BC5-247C68AD6B65}"/>
+                  </a:ext>
+                </a:extLst>
+              </p:cNvPr>
+              <p:cNvSpPr txBox="1"/>
+              <p:nvPr/>
+            </p:nvSpPr>
+            <p:spPr>
+              <a:xfrm>
+                <a:off x="2859579" y="2804345"/>
+                <a:ext cx="1512917" cy="369332"/>
+              </a:xfrm>
+              <a:prstGeom prst="rect">
+                <a:avLst/>
+              </a:prstGeom>
+              <a:noFill/>
+            </p:spPr>
+            <p:txBody>
+              <a:bodyPr wrap="square" rtlCol="0">
+                <a:spAutoFit/>
+              </a:bodyPr>
+              <a:lstStyle/>
+              <a:p>
+                <a:r>
+                  <a:rPr lang="en-US" altLang="zh-CN" dirty="0"/>
+                  <a:t>space</a:t>
+                </a:r>
+                <a:endParaRPr lang="zh-CN" altLang="en-US" dirty="0"/>
+              </a:p>
+            </p:txBody>
+          </p:sp>
+          <p:sp>
+            <p:nvSpPr>
+              <p:cNvPr id="16" name="文本框 15">
+                <a:extLst>
+                  <a:ext uri="{FF2B5EF4-FFF2-40B4-BE49-F238E27FC236}">
+                    <a16:creationId xmlns:a16="http://schemas.microsoft.com/office/drawing/2014/main" id="{1A91A54B-790A-C55E-48BA-A50E7142A5C9}"/>
+                  </a:ext>
+                </a:extLst>
+              </p:cNvPr>
+              <p:cNvSpPr txBox="1"/>
+              <p:nvPr/>
+            </p:nvSpPr>
+            <p:spPr>
+              <a:xfrm>
+                <a:off x="4713316" y="2832239"/>
+                <a:ext cx="1512917" cy="369332"/>
+              </a:xfrm>
+              <a:prstGeom prst="rect">
+                <a:avLst/>
+              </a:prstGeom>
+              <a:noFill/>
+            </p:spPr>
+            <p:txBody>
+              <a:bodyPr wrap="square" rtlCol="0">
+                <a:spAutoFit/>
+              </a:bodyPr>
+              <a:lstStyle/>
+              <a:p>
+                <a:r>
+                  <a:rPr lang="en-US" altLang="zh-CN" dirty="0"/>
+                  <a:t>distance</a:t>
+                </a:r>
+                <a:endParaRPr lang="zh-CN" altLang="en-US" dirty="0"/>
+              </a:p>
+            </p:txBody>
+          </p:sp>
+          <p:cxnSp>
+            <p:nvCxnSpPr>
+              <p:cNvPr id="18" name="直接箭头连接符 17">
+                <a:extLst>
+                  <a:ext uri="{FF2B5EF4-FFF2-40B4-BE49-F238E27FC236}">
+                    <a16:creationId xmlns:a16="http://schemas.microsoft.com/office/drawing/2014/main" id="{A2CC0343-ACE3-05EF-CF36-BE2CF3164EEB}"/>
+                  </a:ext>
+                </a:extLst>
+              </p:cNvPr>
+              <p:cNvCxnSpPr/>
+              <p:nvPr/>
+            </p:nvCxnSpPr>
+            <p:spPr>
+              <a:xfrm>
+                <a:off x="1454727" y="3075709"/>
+                <a:ext cx="0" cy="490451"/>
+              </a:xfrm>
+              <a:prstGeom prst="straightConnector1">
+                <a:avLst/>
+              </a:prstGeom>
+              <a:ln>
+                <a:solidFill>
+                  <a:schemeClr val="tx1"/>
+                </a:solidFill>
+                <a:headEnd type="triangle"/>
+                <a:tailEnd type="triangle"/>
+              </a:ln>
+            </p:spPr>
+            <p:style>
+              <a:lnRef idx="2">
+                <a:schemeClr val="accent1"/>
+              </a:lnRef>
+              <a:fillRef idx="0">
+                <a:schemeClr val="accent1"/>
+              </a:fillRef>
+              <a:effectRef idx="1">
+                <a:schemeClr val="accent1"/>
+              </a:effectRef>
+              <a:fontRef idx="minor">
+                <a:schemeClr val="tx1"/>
+              </a:fontRef>
+            </p:style>
+          </p:cxnSp>
+          <p:sp>
+            <p:nvSpPr>
+              <p:cNvPr id="19" name="文本框 18">
+                <a:extLst>
+                  <a:ext uri="{FF2B5EF4-FFF2-40B4-BE49-F238E27FC236}">
+                    <a16:creationId xmlns:a16="http://schemas.microsoft.com/office/drawing/2014/main" id="{8779E524-47E1-4C57-05B8-C48460F409E8}"/>
+                  </a:ext>
+                </a:extLst>
+              </p:cNvPr>
+              <p:cNvSpPr txBox="1"/>
+              <p:nvPr/>
+            </p:nvSpPr>
+            <p:spPr>
+              <a:xfrm>
+                <a:off x="908988" y="3117274"/>
+                <a:ext cx="490451" cy="369332"/>
+              </a:xfrm>
+              <a:prstGeom prst="rect">
+                <a:avLst/>
+              </a:prstGeom>
+              <a:noFill/>
+            </p:spPr>
+            <p:txBody>
+              <a:bodyPr wrap="square" rtlCol="0">
+                <a:spAutoFit/>
+              </a:bodyPr>
+              <a:lstStyle/>
+              <a:p>
+                <a:r>
+                  <a:rPr lang="en-US" altLang="zh-CN" dirty="0"/>
+                  <a:t>h1</a:t>
+                </a:r>
+                <a:endParaRPr lang="zh-CN" altLang="en-US" dirty="0"/>
+              </a:p>
+            </p:txBody>
+          </p:sp>
+          <p:sp>
+            <p:nvSpPr>
+              <p:cNvPr id="20" name="文本框 19">
+                <a:extLst>
+                  <a:ext uri="{FF2B5EF4-FFF2-40B4-BE49-F238E27FC236}">
+                    <a16:creationId xmlns:a16="http://schemas.microsoft.com/office/drawing/2014/main" id="{45BACAE7-F4F6-58C7-2201-93EFF15C44A9}"/>
+                  </a:ext>
+                </a:extLst>
+              </p:cNvPr>
+              <p:cNvSpPr txBox="1"/>
+              <p:nvPr/>
+            </p:nvSpPr>
+            <p:spPr>
+              <a:xfrm>
+                <a:off x="7268094" y="3075709"/>
+                <a:ext cx="623455" cy="369332"/>
+              </a:xfrm>
+              <a:prstGeom prst="rect">
+                <a:avLst/>
+              </a:prstGeom>
+              <a:noFill/>
+            </p:spPr>
+            <p:txBody>
+              <a:bodyPr wrap="square" rtlCol="0">
+                <a:spAutoFit/>
+              </a:bodyPr>
+              <a:lstStyle/>
+              <a:p>
+                <a:r>
+                  <a:rPr lang="en-US" altLang="zh-CN" dirty="0"/>
+                  <a:t>h2</a:t>
+                </a:r>
+                <a:endParaRPr lang="zh-CN" altLang="en-US" dirty="0"/>
+              </a:p>
+            </p:txBody>
+          </p:sp>
+          <p:cxnSp>
+            <p:nvCxnSpPr>
+              <p:cNvPr id="21" name="直接箭头连接符 20">
+                <a:extLst>
+                  <a:ext uri="{FF2B5EF4-FFF2-40B4-BE49-F238E27FC236}">
+                    <a16:creationId xmlns:a16="http://schemas.microsoft.com/office/drawing/2014/main" id="{8017C710-013A-FB28-B4FB-4DF4F4764D4E}"/>
+                  </a:ext>
+                </a:extLst>
+              </p:cNvPr>
+              <p:cNvCxnSpPr>
+                <a:cxnSpLocks/>
+              </p:cNvCxnSpPr>
+              <p:nvPr/>
+            </p:nvCxnSpPr>
+            <p:spPr>
+              <a:xfrm>
+                <a:off x="7268094" y="2960317"/>
+                <a:ext cx="0" cy="730534"/>
+              </a:xfrm>
+              <a:prstGeom prst="straightConnector1">
+                <a:avLst/>
+              </a:prstGeom>
+              <a:ln>
+                <a:solidFill>
+                  <a:schemeClr val="tx1"/>
+                </a:solidFill>
+                <a:headEnd type="triangle"/>
+                <a:tailEnd type="triangle"/>
+              </a:ln>
+            </p:spPr>
+            <p:style>
+              <a:lnRef idx="2">
+                <a:schemeClr val="accent1"/>
+              </a:lnRef>
+              <a:fillRef idx="0">
+                <a:schemeClr val="accent1"/>
+              </a:fillRef>
+              <a:effectRef idx="1">
+                <a:schemeClr val="accent1"/>
+              </a:effectRef>
+              <a:fontRef idx="minor">
+                <a:schemeClr val="tx1"/>
+              </a:fontRef>
+            </p:style>
+          </p:cxnSp>
+          <p:sp>
+            <p:nvSpPr>
+              <p:cNvPr id="23" name="文本框 22">
+                <a:extLst>
+                  <a:ext uri="{FF2B5EF4-FFF2-40B4-BE49-F238E27FC236}">
+                    <a16:creationId xmlns:a16="http://schemas.microsoft.com/office/drawing/2014/main" id="{93D42117-8363-BCAA-A800-8F6810C7BDA2}"/>
+                  </a:ext>
+                </a:extLst>
+              </p:cNvPr>
+              <p:cNvSpPr txBox="1"/>
+              <p:nvPr/>
+            </p:nvSpPr>
+            <p:spPr>
+              <a:xfrm>
+                <a:off x="7176398" y="3882044"/>
+                <a:ext cx="1626780" cy="369332"/>
+              </a:xfrm>
+              <a:prstGeom prst="rect">
+                <a:avLst/>
+              </a:prstGeom>
+              <a:noFill/>
+            </p:spPr>
+            <p:txBody>
+              <a:bodyPr wrap="square" rtlCol="0">
+                <a:spAutoFit/>
+              </a:bodyPr>
+              <a:lstStyle/>
+              <a:p>
+                <a:r>
+                  <a:rPr lang="en-US" altLang="zh-CN" dirty="0"/>
+                  <a:t>Amp=h2/h1</a:t>
+                </a:r>
+                <a:endParaRPr lang="zh-CN" altLang="en-US" dirty="0"/>
+              </a:p>
+            </p:txBody>
+          </p:sp>
+        </p:grpSp>
+      </p:grpSp>
+    </p:spTree>
+    <p:extLst>
+      <p:ext uri="{BB962C8B-B14F-4D97-AF65-F5344CB8AC3E}">
+        <p14:creationId xmlns:p14="http://schemas.microsoft.com/office/powerpoint/2010/main" val="1235878569"/>
+      </p:ext>
+    </p:extLst>
+  </p:cSld>
+  <p:clrMapOvr>
+    <a:masterClrMapping/>
+  </p:clrMapOvr>
+</p:sld>
+</file>
+
+<file path=ppt/slides/slide4.xml><?xml version="1.0" encoding="utf-8"?>
+<p:sld xmlns:a="http://schemas.openxmlformats.org/drawingml/2006/main" xmlns:r="http://schemas.openxmlformats.org/officeDocument/2006/relationships" xmlns:p="http://schemas.openxmlformats.org/presentationml/2006/main">
+  <p:cSld>
+    <p:spTree>
+      <p:nvGrpSpPr>
+        <p:cNvPr id="1" name=""/>
+        <p:cNvGrpSpPr/>
+        <p:nvPr/>
+      </p:nvGrpSpPr>
+      <p:grpSpPr>
+        <a:xfrm>
+          <a:off x="0" y="0"/>
+          <a:ext cx="0" cy="0"/>
+          <a:chOff x="0" y="0"/>
+          <a:chExt cx="0" cy="0"/>
+        </a:xfrm>
+      </p:grpSpPr>
+    </p:spTree>
+    <p:extLst>
+      <p:ext uri="{BB962C8B-B14F-4D97-AF65-F5344CB8AC3E}">
+        <p14:creationId xmlns:p14="http://schemas.microsoft.com/office/powerpoint/2010/main" val="3530712266"/>
+      </p:ext>
+    </p:extLst>
+  </p:cSld>
+  <p:clrMapOvr>
+    <a:masterClrMapping/>
+  </p:clrMapOvr>
+</p:sld>
+</file>
+
 <file path=ppt/theme/theme1.xml><?xml version="1.0" encoding="utf-8"?>
 <a:theme xmlns:a="http://schemas.openxmlformats.org/drawingml/2006/main" name="Office Theme">
   <a:themeElements>

--- a/China/CT/Presentation1.pptx
+++ b/China/CT/Presentation1.pptx
@@ -9,6 +9,9 @@
     <p:sldId id="257" r:id="rId3"/>
     <p:sldId id="258" r:id="rId4"/>
     <p:sldId id="259" r:id="rId5"/>
+    <p:sldId id="260" r:id="rId6"/>
+    <p:sldId id="261" r:id="rId7"/>
+    <p:sldId id="262" r:id="rId8"/>
   </p:sldIdLst>
   <p:sldSz cx="12192000" cy="6858000"/>
   <p:notesSz cx="6858000" cy="9144000"/>
@@ -137,7 +140,7 @@
           <p:cNvPr id="2" name="Title 1">
             <a:extLst>
               <a:ext uri="{FF2B5EF4-FFF2-40B4-BE49-F238E27FC236}">
-                <a16:creationId xmlns:a16="http://schemas.microsoft.com/office/drawing/2014/main" id="{788616F8-3EFB-106E-A4E9-A2362983E491}"/>
+                <a16:creationId xmlns:a16="http://schemas.microsoft.com/office/drawing/2014/main" id="{F0B3CBD1-1218-F78C-726E-66D2C999FB0B}"/>
               </a:ext>
             </a:extLst>
           </p:cNvPr>
@@ -174,7 +177,7 @@
           <p:cNvPr id="3" name="Subtitle 2">
             <a:extLst>
               <a:ext uri="{FF2B5EF4-FFF2-40B4-BE49-F238E27FC236}">
-                <a16:creationId xmlns:a16="http://schemas.microsoft.com/office/drawing/2014/main" id="{1BA4B3AD-F1BC-5E83-E14C-A2ADE82F0A4C}"/>
+                <a16:creationId xmlns:a16="http://schemas.microsoft.com/office/drawing/2014/main" id="{6E0F4F94-B3B6-01DA-6773-CB4BBEE8C4D3}"/>
               </a:ext>
             </a:extLst>
           </p:cNvPr>
@@ -244,7 +247,7 @@
           <p:cNvPr id="4" name="Date Placeholder 3">
             <a:extLst>
               <a:ext uri="{FF2B5EF4-FFF2-40B4-BE49-F238E27FC236}">
-                <a16:creationId xmlns:a16="http://schemas.microsoft.com/office/drawing/2014/main" id="{3CDF59F0-664B-4EBF-A7FD-B4CA63AF7B35}"/>
+                <a16:creationId xmlns:a16="http://schemas.microsoft.com/office/drawing/2014/main" id="{CFF5A9B2-F363-AAC3-0466-877735F6D8E6}"/>
               </a:ext>
             </a:extLst>
           </p:cNvPr>
@@ -260,9 +263,9 @@
           <a:bodyPr/>
           <a:lstStyle/>
           <a:p>
-            <a:fld id="{8914AFC7-9D55-48F2-BBD2-2A90358CCC0E}" type="datetimeFigureOut">
+            <a:fld id="{ADE93143-7665-4E72-B2F5-67BA59FB1B47}" type="datetimeFigureOut">
               <a:rPr lang="en-US" smtClean="0"/>
-              <a:t>5/2/2026</a:t>
+              <a:t>1/29/2026</a:t>
             </a:fld>
             <a:endParaRPr lang="en-US"/>
           </a:p>
@@ -273,7 +276,7 @@
           <p:cNvPr id="5" name="Footer Placeholder 4">
             <a:extLst>
               <a:ext uri="{FF2B5EF4-FFF2-40B4-BE49-F238E27FC236}">
-                <a16:creationId xmlns:a16="http://schemas.microsoft.com/office/drawing/2014/main" id="{884748DE-90EE-36E7-5DA8-5AF02DE003E4}"/>
+                <a16:creationId xmlns:a16="http://schemas.microsoft.com/office/drawing/2014/main" id="{4D69FD12-C7B0-22BF-40E3-8648930AE8D6}"/>
               </a:ext>
             </a:extLst>
           </p:cNvPr>
@@ -298,7 +301,7 @@
           <p:cNvPr id="6" name="Slide Number Placeholder 5">
             <a:extLst>
               <a:ext uri="{FF2B5EF4-FFF2-40B4-BE49-F238E27FC236}">
-                <a16:creationId xmlns:a16="http://schemas.microsoft.com/office/drawing/2014/main" id="{9154B451-B621-4E3D-B4A0-7793459E81E2}"/>
+                <a16:creationId xmlns:a16="http://schemas.microsoft.com/office/drawing/2014/main" id="{3CDF7C57-246A-E615-D65B-1357E94D5898}"/>
               </a:ext>
             </a:extLst>
           </p:cNvPr>
@@ -314,7 +317,7 @@
           <a:bodyPr/>
           <a:lstStyle/>
           <a:p>
-            <a:fld id="{75352AB6-06D4-4570-B3BE-B0130698F528}" type="slidenum">
+            <a:fld id="{A6876447-A34C-4188-A761-1FFE88A33A66}" type="slidenum">
               <a:rPr lang="en-US" smtClean="0"/>
               <a:t>‹#›</a:t>
             </a:fld>
@@ -325,7 +328,7 @@
     </p:spTree>
     <p:extLst>
       <p:ext uri="{BB962C8B-B14F-4D97-AF65-F5344CB8AC3E}">
-        <p14:creationId xmlns:p14="http://schemas.microsoft.com/office/powerpoint/2010/main" val="466128041"/>
+        <p14:creationId xmlns:p14="http://schemas.microsoft.com/office/powerpoint/2010/main" val="3464607555"/>
       </p:ext>
     </p:extLst>
   </p:cSld>
@@ -357,7 +360,7 @@
           <p:cNvPr id="2" name="Title 1">
             <a:extLst>
               <a:ext uri="{FF2B5EF4-FFF2-40B4-BE49-F238E27FC236}">
-                <a16:creationId xmlns:a16="http://schemas.microsoft.com/office/drawing/2014/main" id="{5C88936F-EA01-0CE8-05D8-5EF7EB5DCA59}"/>
+                <a16:creationId xmlns:a16="http://schemas.microsoft.com/office/drawing/2014/main" id="{0E81D2FA-7AA6-12E6-CB3C-A47EDBA8177B}"/>
               </a:ext>
             </a:extLst>
           </p:cNvPr>
@@ -385,7 +388,7 @@
           <p:cNvPr id="3" name="Vertical Text Placeholder 2">
             <a:extLst>
               <a:ext uri="{FF2B5EF4-FFF2-40B4-BE49-F238E27FC236}">
-                <a16:creationId xmlns:a16="http://schemas.microsoft.com/office/drawing/2014/main" id="{41D7CF6F-85B2-7D96-5712-56019E989083}"/>
+                <a16:creationId xmlns:a16="http://schemas.microsoft.com/office/drawing/2014/main" id="{5E72AF57-5547-DDF2-AC9A-5875412FA1F4}"/>
               </a:ext>
             </a:extLst>
           </p:cNvPr>
@@ -442,7 +445,7 @@
           <p:cNvPr id="4" name="Date Placeholder 3">
             <a:extLst>
               <a:ext uri="{FF2B5EF4-FFF2-40B4-BE49-F238E27FC236}">
-                <a16:creationId xmlns:a16="http://schemas.microsoft.com/office/drawing/2014/main" id="{9C54E175-7A4F-7D47-A6E0-DB7D868FF77C}"/>
+                <a16:creationId xmlns:a16="http://schemas.microsoft.com/office/drawing/2014/main" id="{27AE32C4-947F-3068-3B79-B20D6A70341D}"/>
               </a:ext>
             </a:extLst>
           </p:cNvPr>
@@ -458,9 +461,9 @@
           <a:bodyPr/>
           <a:lstStyle/>
           <a:p>
-            <a:fld id="{8914AFC7-9D55-48F2-BBD2-2A90358CCC0E}" type="datetimeFigureOut">
+            <a:fld id="{ADE93143-7665-4E72-B2F5-67BA59FB1B47}" type="datetimeFigureOut">
               <a:rPr lang="en-US" smtClean="0"/>
-              <a:t>5/2/2026</a:t>
+              <a:t>1/29/2026</a:t>
             </a:fld>
             <a:endParaRPr lang="en-US"/>
           </a:p>
@@ -471,7 +474,7 @@
           <p:cNvPr id="5" name="Footer Placeholder 4">
             <a:extLst>
               <a:ext uri="{FF2B5EF4-FFF2-40B4-BE49-F238E27FC236}">
-                <a16:creationId xmlns:a16="http://schemas.microsoft.com/office/drawing/2014/main" id="{55CD9EE4-F77C-5101-C0C1-5F6522718CD7}"/>
+                <a16:creationId xmlns:a16="http://schemas.microsoft.com/office/drawing/2014/main" id="{9E327A9B-9914-92F2-9B80-8C1026C1DFEE}"/>
               </a:ext>
             </a:extLst>
           </p:cNvPr>
@@ -496,7 +499,7 @@
           <p:cNvPr id="6" name="Slide Number Placeholder 5">
             <a:extLst>
               <a:ext uri="{FF2B5EF4-FFF2-40B4-BE49-F238E27FC236}">
-                <a16:creationId xmlns:a16="http://schemas.microsoft.com/office/drawing/2014/main" id="{576260AF-E745-3039-AB26-D2ECF8932076}"/>
+                <a16:creationId xmlns:a16="http://schemas.microsoft.com/office/drawing/2014/main" id="{42124421-BB4D-AB90-3E75-D9480772C93E}"/>
               </a:ext>
             </a:extLst>
           </p:cNvPr>
@@ -512,7 +515,7 @@
           <a:bodyPr/>
           <a:lstStyle/>
           <a:p>
-            <a:fld id="{75352AB6-06D4-4570-B3BE-B0130698F528}" type="slidenum">
+            <a:fld id="{A6876447-A34C-4188-A761-1FFE88A33A66}" type="slidenum">
               <a:rPr lang="en-US" smtClean="0"/>
               <a:t>‹#›</a:t>
             </a:fld>
@@ -523,7 +526,7 @@
     </p:spTree>
     <p:extLst>
       <p:ext uri="{BB962C8B-B14F-4D97-AF65-F5344CB8AC3E}">
-        <p14:creationId xmlns:p14="http://schemas.microsoft.com/office/powerpoint/2010/main" val="3232533580"/>
+        <p14:creationId xmlns:p14="http://schemas.microsoft.com/office/powerpoint/2010/main" val="3878720180"/>
       </p:ext>
     </p:extLst>
   </p:cSld>
@@ -555,7 +558,7 @@
           <p:cNvPr id="2" name="Vertical Title 1">
             <a:extLst>
               <a:ext uri="{FF2B5EF4-FFF2-40B4-BE49-F238E27FC236}">
-                <a16:creationId xmlns:a16="http://schemas.microsoft.com/office/drawing/2014/main" id="{392EB115-6604-5956-9C3F-BFDB467C3F34}"/>
+                <a16:creationId xmlns:a16="http://schemas.microsoft.com/office/drawing/2014/main" id="{95FB021F-790B-0E0D-A30D-6881C17B0E0A}"/>
               </a:ext>
             </a:extLst>
           </p:cNvPr>
@@ -588,7 +591,7 @@
           <p:cNvPr id="3" name="Vertical Text Placeholder 2">
             <a:extLst>
               <a:ext uri="{FF2B5EF4-FFF2-40B4-BE49-F238E27FC236}">
-                <a16:creationId xmlns:a16="http://schemas.microsoft.com/office/drawing/2014/main" id="{FD0CA528-A5FD-EC54-E4C9-EE2CBB5EDFCF}"/>
+                <a16:creationId xmlns:a16="http://schemas.microsoft.com/office/drawing/2014/main" id="{4189F222-BF70-7B9A-1414-8D5D0AB9D9DA}"/>
               </a:ext>
             </a:extLst>
           </p:cNvPr>
@@ -650,7 +653,7 @@
           <p:cNvPr id="4" name="Date Placeholder 3">
             <a:extLst>
               <a:ext uri="{FF2B5EF4-FFF2-40B4-BE49-F238E27FC236}">
-                <a16:creationId xmlns:a16="http://schemas.microsoft.com/office/drawing/2014/main" id="{011BA5BF-6437-B04E-6C2B-9349F454D3E6}"/>
+                <a16:creationId xmlns:a16="http://schemas.microsoft.com/office/drawing/2014/main" id="{17D496E1-46F9-927B-F003-B1D3ED24EDA5}"/>
               </a:ext>
             </a:extLst>
           </p:cNvPr>
@@ -666,9 +669,9 @@
           <a:bodyPr/>
           <a:lstStyle/>
           <a:p>
-            <a:fld id="{8914AFC7-9D55-48F2-BBD2-2A90358CCC0E}" type="datetimeFigureOut">
+            <a:fld id="{ADE93143-7665-4E72-B2F5-67BA59FB1B47}" type="datetimeFigureOut">
               <a:rPr lang="en-US" smtClean="0"/>
-              <a:t>5/2/2026</a:t>
+              <a:t>1/29/2026</a:t>
             </a:fld>
             <a:endParaRPr lang="en-US"/>
           </a:p>
@@ -679,7 +682,7 @@
           <p:cNvPr id="5" name="Footer Placeholder 4">
             <a:extLst>
               <a:ext uri="{FF2B5EF4-FFF2-40B4-BE49-F238E27FC236}">
-                <a16:creationId xmlns:a16="http://schemas.microsoft.com/office/drawing/2014/main" id="{22F4BC1E-7A18-E3FB-ECC9-B5574BA48A36}"/>
+                <a16:creationId xmlns:a16="http://schemas.microsoft.com/office/drawing/2014/main" id="{C5E2269C-8FED-D61C-B405-9C1A5152A286}"/>
               </a:ext>
             </a:extLst>
           </p:cNvPr>
@@ -704,7 +707,7 @@
           <p:cNvPr id="6" name="Slide Number Placeholder 5">
             <a:extLst>
               <a:ext uri="{FF2B5EF4-FFF2-40B4-BE49-F238E27FC236}">
-                <a16:creationId xmlns:a16="http://schemas.microsoft.com/office/drawing/2014/main" id="{ABC7E468-E980-5FD2-41CE-D86E18E676CB}"/>
+                <a16:creationId xmlns:a16="http://schemas.microsoft.com/office/drawing/2014/main" id="{11284F66-8831-273A-E8EA-C9D0C2045E11}"/>
               </a:ext>
             </a:extLst>
           </p:cNvPr>
@@ -720,7 +723,7 @@
           <a:bodyPr/>
           <a:lstStyle/>
           <a:p>
-            <a:fld id="{75352AB6-06D4-4570-B3BE-B0130698F528}" type="slidenum">
+            <a:fld id="{A6876447-A34C-4188-A761-1FFE88A33A66}" type="slidenum">
               <a:rPr lang="en-US" smtClean="0"/>
               <a:t>‹#›</a:t>
             </a:fld>
@@ -731,7 +734,7 @@
     </p:spTree>
     <p:extLst>
       <p:ext uri="{BB962C8B-B14F-4D97-AF65-F5344CB8AC3E}">
-        <p14:creationId xmlns:p14="http://schemas.microsoft.com/office/powerpoint/2010/main" val="1268102491"/>
+        <p14:creationId xmlns:p14="http://schemas.microsoft.com/office/powerpoint/2010/main" val="1711981814"/>
       </p:ext>
     </p:extLst>
   </p:cSld>
@@ -763,7 +766,7 @@
           <p:cNvPr id="2" name="Title 1">
             <a:extLst>
               <a:ext uri="{FF2B5EF4-FFF2-40B4-BE49-F238E27FC236}">
-                <a16:creationId xmlns:a16="http://schemas.microsoft.com/office/drawing/2014/main" id="{303AAE61-9268-EABA-BA7E-E0CF58761675}"/>
+                <a16:creationId xmlns:a16="http://schemas.microsoft.com/office/drawing/2014/main" id="{9BFD269A-8E44-03C5-298A-90D49B44A4D5}"/>
               </a:ext>
             </a:extLst>
           </p:cNvPr>
@@ -791,7 +794,7 @@
           <p:cNvPr id="3" name="Content Placeholder 2">
             <a:extLst>
               <a:ext uri="{FF2B5EF4-FFF2-40B4-BE49-F238E27FC236}">
-                <a16:creationId xmlns:a16="http://schemas.microsoft.com/office/drawing/2014/main" id="{4771A9E4-B5E2-7673-4999-E68BBCAB3EE3}"/>
+                <a16:creationId xmlns:a16="http://schemas.microsoft.com/office/drawing/2014/main" id="{8405A3A2-6CAB-4192-2A0C-F2E37E7AFCC9}"/>
               </a:ext>
             </a:extLst>
           </p:cNvPr>
@@ -848,7 +851,7 @@
           <p:cNvPr id="4" name="Date Placeholder 3">
             <a:extLst>
               <a:ext uri="{FF2B5EF4-FFF2-40B4-BE49-F238E27FC236}">
-                <a16:creationId xmlns:a16="http://schemas.microsoft.com/office/drawing/2014/main" id="{EF092E7D-FDBA-92F7-E3C0-15B016F2CC8C}"/>
+                <a16:creationId xmlns:a16="http://schemas.microsoft.com/office/drawing/2014/main" id="{4621D1C9-A3DE-707E-C7DB-9A8538ED27C5}"/>
               </a:ext>
             </a:extLst>
           </p:cNvPr>
@@ -864,9 +867,9 @@
           <a:bodyPr/>
           <a:lstStyle/>
           <a:p>
-            <a:fld id="{8914AFC7-9D55-48F2-BBD2-2A90358CCC0E}" type="datetimeFigureOut">
+            <a:fld id="{ADE93143-7665-4E72-B2F5-67BA59FB1B47}" type="datetimeFigureOut">
               <a:rPr lang="en-US" smtClean="0"/>
-              <a:t>5/2/2026</a:t>
+              <a:t>1/29/2026</a:t>
             </a:fld>
             <a:endParaRPr lang="en-US"/>
           </a:p>
@@ -877,7 +880,7 @@
           <p:cNvPr id="5" name="Footer Placeholder 4">
             <a:extLst>
               <a:ext uri="{FF2B5EF4-FFF2-40B4-BE49-F238E27FC236}">
-                <a16:creationId xmlns:a16="http://schemas.microsoft.com/office/drawing/2014/main" id="{59F9BD42-1C83-B215-B1E0-7D479CD377A8}"/>
+                <a16:creationId xmlns:a16="http://schemas.microsoft.com/office/drawing/2014/main" id="{04EA6D92-F190-7FAF-879D-EC6F4B7FF38B}"/>
               </a:ext>
             </a:extLst>
           </p:cNvPr>
@@ -902,7 +905,7 @@
           <p:cNvPr id="6" name="Slide Number Placeholder 5">
             <a:extLst>
               <a:ext uri="{FF2B5EF4-FFF2-40B4-BE49-F238E27FC236}">
-                <a16:creationId xmlns:a16="http://schemas.microsoft.com/office/drawing/2014/main" id="{06A91689-2C44-37F5-71CA-D7C41E81313D}"/>
+                <a16:creationId xmlns:a16="http://schemas.microsoft.com/office/drawing/2014/main" id="{4ED4544A-DB1F-446A-CFD3-9EF1C4E451AA}"/>
               </a:ext>
             </a:extLst>
           </p:cNvPr>
@@ -918,7 +921,7 @@
           <a:bodyPr/>
           <a:lstStyle/>
           <a:p>
-            <a:fld id="{75352AB6-06D4-4570-B3BE-B0130698F528}" type="slidenum">
+            <a:fld id="{A6876447-A34C-4188-A761-1FFE88A33A66}" type="slidenum">
               <a:rPr lang="en-US" smtClean="0"/>
               <a:t>‹#›</a:t>
             </a:fld>
@@ -929,7 +932,7 @@
     </p:spTree>
     <p:extLst>
       <p:ext uri="{BB962C8B-B14F-4D97-AF65-F5344CB8AC3E}">
-        <p14:creationId xmlns:p14="http://schemas.microsoft.com/office/powerpoint/2010/main" val="1585883200"/>
+        <p14:creationId xmlns:p14="http://schemas.microsoft.com/office/powerpoint/2010/main" val="256271179"/>
       </p:ext>
     </p:extLst>
   </p:cSld>
@@ -961,7 +964,7 @@
           <p:cNvPr id="2" name="Title 1">
             <a:extLst>
               <a:ext uri="{FF2B5EF4-FFF2-40B4-BE49-F238E27FC236}">
-                <a16:creationId xmlns:a16="http://schemas.microsoft.com/office/drawing/2014/main" id="{5F4CA091-09E8-2EDF-AC16-364F84F6248C}"/>
+                <a16:creationId xmlns:a16="http://schemas.microsoft.com/office/drawing/2014/main" id="{9B781971-C7E3-4D3A-DF76-202481EABADC}"/>
               </a:ext>
             </a:extLst>
           </p:cNvPr>
@@ -998,7 +1001,7 @@
           <p:cNvPr id="3" name="Text Placeholder 2">
             <a:extLst>
               <a:ext uri="{FF2B5EF4-FFF2-40B4-BE49-F238E27FC236}">
-                <a16:creationId xmlns:a16="http://schemas.microsoft.com/office/drawing/2014/main" id="{5A64EC87-2165-87D1-9047-7D205F71274A}"/>
+                <a16:creationId xmlns:a16="http://schemas.microsoft.com/office/drawing/2014/main" id="{AA279FF3-7B9F-F857-755E-2F8E1D1BA20E}"/>
               </a:ext>
             </a:extLst>
           </p:cNvPr>
@@ -1123,7 +1126,7 @@
           <p:cNvPr id="4" name="Date Placeholder 3">
             <a:extLst>
               <a:ext uri="{FF2B5EF4-FFF2-40B4-BE49-F238E27FC236}">
-                <a16:creationId xmlns:a16="http://schemas.microsoft.com/office/drawing/2014/main" id="{4739AD6B-0474-016F-E361-E6B895BAD9E4}"/>
+                <a16:creationId xmlns:a16="http://schemas.microsoft.com/office/drawing/2014/main" id="{46E71690-838E-77DC-BD13-46DC83E18F45}"/>
               </a:ext>
             </a:extLst>
           </p:cNvPr>
@@ -1139,9 +1142,9 @@
           <a:bodyPr/>
           <a:lstStyle/>
           <a:p>
-            <a:fld id="{8914AFC7-9D55-48F2-BBD2-2A90358CCC0E}" type="datetimeFigureOut">
+            <a:fld id="{ADE93143-7665-4E72-B2F5-67BA59FB1B47}" type="datetimeFigureOut">
               <a:rPr lang="en-US" smtClean="0"/>
-              <a:t>5/2/2026</a:t>
+              <a:t>1/29/2026</a:t>
             </a:fld>
             <a:endParaRPr lang="en-US"/>
           </a:p>
@@ -1152,7 +1155,7 @@
           <p:cNvPr id="5" name="Footer Placeholder 4">
             <a:extLst>
               <a:ext uri="{FF2B5EF4-FFF2-40B4-BE49-F238E27FC236}">
-                <a16:creationId xmlns:a16="http://schemas.microsoft.com/office/drawing/2014/main" id="{4051D221-1335-3791-A59E-543C34F9A862}"/>
+                <a16:creationId xmlns:a16="http://schemas.microsoft.com/office/drawing/2014/main" id="{D60AAF79-FFBC-BCCF-4AD1-2D068EBF230F}"/>
               </a:ext>
             </a:extLst>
           </p:cNvPr>
@@ -1177,7 +1180,7 @@
           <p:cNvPr id="6" name="Slide Number Placeholder 5">
             <a:extLst>
               <a:ext uri="{FF2B5EF4-FFF2-40B4-BE49-F238E27FC236}">
-                <a16:creationId xmlns:a16="http://schemas.microsoft.com/office/drawing/2014/main" id="{A7D6F28C-0A09-84A8-7BA1-E2C3D11BDAB6}"/>
+                <a16:creationId xmlns:a16="http://schemas.microsoft.com/office/drawing/2014/main" id="{2BC46858-D885-06E6-6B49-C83D64CC92E8}"/>
               </a:ext>
             </a:extLst>
           </p:cNvPr>
@@ -1193,7 +1196,7 @@
           <a:bodyPr/>
           <a:lstStyle/>
           <a:p>
-            <a:fld id="{75352AB6-06D4-4570-B3BE-B0130698F528}" type="slidenum">
+            <a:fld id="{A6876447-A34C-4188-A761-1FFE88A33A66}" type="slidenum">
               <a:rPr lang="en-US" smtClean="0"/>
               <a:t>‹#›</a:t>
             </a:fld>
@@ -1204,7 +1207,7 @@
     </p:spTree>
     <p:extLst>
       <p:ext uri="{BB962C8B-B14F-4D97-AF65-F5344CB8AC3E}">
-        <p14:creationId xmlns:p14="http://schemas.microsoft.com/office/powerpoint/2010/main" val="2617625544"/>
+        <p14:creationId xmlns:p14="http://schemas.microsoft.com/office/powerpoint/2010/main" val="1024462029"/>
       </p:ext>
     </p:extLst>
   </p:cSld>
@@ -1236,7 +1239,7 @@
           <p:cNvPr id="2" name="Title 1">
             <a:extLst>
               <a:ext uri="{FF2B5EF4-FFF2-40B4-BE49-F238E27FC236}">
-                <a16:creationId xmlns:a16="http://schemas.microsoft.com/office/drawing/2014/main" id="{FD36F9A5-4613-527B-89C0-EA0AC7DC7C0A}"/>
+                <a16:creationId xmlns:a16="http://schemas.microsoft.com/office/drawing/2014/main" id="{F9C68CD1-10BE-27A6-B931-D6234184E9E0}"/>
               </a:ext>
             </a:extLst>
           </p:cNvPr>
@@ -1264,7 +1267,7 @@
           <p:cNvPr id="3" name="Content Placeholder 2">
             <a:extLst>
               <a:ext uri="{FF2B5EF4-FFF2-40B4-BE49-F238E27FC236}">
-                <a16:creationId xmlns:a16="http://schemas.microsoft.com/office/drawing/2014/main" id="{864C4EF2-BC6E-A32D-0C1E-102C33C7BD2A}"/>
+                <a16:creationId xmlns:a16="http://schemas.microsoft.com/office/drawing/2014/main" id="{0570EF85-5207-85D0-6B99-2972C2785D34}"/>
               </a:ext>
             </a:extLst>
           </p:cNvPr>
@@ -1326,7 +1329,7 @@
           <p:cNvPr id="4" name="Content Placeholder 3">
             <a:extLst>
               <a:ext uri="{FF2B5EF4-FFF2-40B4-BE49-F238E27FC236}">
-                <a16:creationId xmlns:a16="http://schemas.microsoft.com/office/drawing/2014/main" id="{A6ABFA16-24A4-0B83-E5E5-B9D30337B9DE}"/>
+                <a16:creationId xmlns:a16="http://schemas.microsoft.com/office/drawing/2014/main" id="{1A5B1C9E-17F6-162A-942E-378848C217D0}"/>
               </a:ext>
             </a:extLst>
           </p:cNvPr>
@@ -1388,7 +1391,7 @@
           <p:cNvPr id="5" name="Date Placeholder 4">
             <a:extLst>
               <a:ext uri="{FF2B5EF4-FFF2-40B4-BE49-F238E27FC236}">
-                <a16:creationId xmlns:a16="http://schemas.microsoft.com/office/drawing/2014/main" id="{C853E87C-F536-5F85-F334-5A956C73B333}"/>
+                <a16:creationId xmlns:a16="http://schemas.microsoft.com/office/drawing/2014/main" id="{15411E72-9AC4-2AD2-9A74-FF7CAAE95124}"/>
               </a:ext>
             </a:extLst>
           </p:cNvPr>
@@ -1404,9 +1407,9 @@
           <a:bodyPr/>
           <a:lstStyle/>
           <a:p>
-            <a:fld id="{8914AFC7-9D55-48F2-BBD2-2A90358CCC0E}" type="datetimeFigureOut">
+            <a:fld id="{ADE93143-7665-4E72-B2F5-67BA59FB1B47}" type="datetimeFigureOut">
               <a:rPr lang="en-US" smtClean="0"/>
-              <a:t>5/2/2026</a:t>
+              <a:t>1/29/2026</a:t>
             </a:fld>
             <a:endParaRPr lang="en-US"/>
           </a:p>
@@ -1417,7 +1420,7 @@
           <p:cNvPr id="6" name="Footer Placeholder 5">
             <a:extLst>
               <a:ext uri="{FF2B5EF4-FFF2-40B4-BE49-F238E27FC236}">
-                <a16:creationId xmlns:a16="http://schemas.microsoft.com/office/drawing/2014/main" id="{B231FAE4-8087-A2F1-9ECD-273E8AD40231}"/>
+                <a16:creationId xmlns:a16="http://schemas.microsoft.com/office/drawing/2014/main" id="{504089AD-B81C-0594-0A85-9F218A4BC33F}"/>
               </a:ext>
             </a:extLst>
           </p:cNvPr>
@@ -1442,7 +1445,7 @@
           <p:cNvPr id="7" name="Slide Number Placeholder 6">
             <a:extLst>
               <a:ext uri="{FF2B5EF4-FFF2-40B4-BE49-F238E27FC236}">
-                <a16:creationId xmlns:a16="http://schemas.microsoft.com/office/drawing/2014/main" id="{786816B9-8B02-8642-03E1-54F98E366219}"/>
+                <a16:creationId xmlns:a16="http://schemas.microsoft.com/office/drawing/2014/main" id="{9B2E4B3B-D529-445A-3A86-88F4EAFF1003}"/>
               </a:ext>
             </a:extLst>
           </p:cNvPr>
@@ -1458,7 +1461,7 @@
           <a:bodyPr/>
           <a:lstStyle/>
           <a:p>
-            <a:fld id="{75352AB6-06D4-4570-B3BE-B0130698F528}" type="slidenum">
+            <a:fld id="{A6876447-A34C-4188-A761-1FFE88A33A66}" type="slidenum">
               <a:rPr lang="en-US" smtClean="0"/>
               <a:t>‹#›</a:t>
             </a:fld>
@@ -1469,7 +1472,7 @@
     </p:spTree>
     <p:extLst>
       <p:ext uri="{BB962C8B-B14F-4D97-AF65-F5344CB8AC3E}">
-        <p14:creationId xmlns:p14="http://schemas.microsoft.com/office/powerpoint/2010/main" val="1831959396"/>
+        <p14:creationId xmlns:p14="http://schemas.microsoft.com/office/powerpoint/2010/main" val="3303520193"/>
       </p:ext>
     </p:extLst>
   </p:cSld>
@@ -1501,7 +1504,7 @@
           <p:cNvPr id="2" name="Title 1">
             <a:extLst>
               <a:ext uri="{FF2B5EF4-FFF2-40B4-BE49-F238E27FC236}">
-                <a16:creationId xmlns:a16="http://schemas.microsoft.com/office/drawing/2014/main" id="{0744168E-457B-3499-66C7-A51B9D8038A3}"/>
+                <a16:creationId xmlns:a16="http://schemas.microsoft.com/office/drawing/2014/main" id="{98C78D76-13B6-B206-FEA4-117BAFBA3B35}"/>
               </a:ext>
             </a:extLst>
           </p:cNvPr>
@@ -1534,7 +1537,7 @@
           <p:cNvPr id="3" name="Text Placeholder 2">
             <a:extLst>
               <a:ext uri="{FF2B5EF4-FFF2-40B4-BE49-F238E27FC236}">
-                <a16:creationId xmlns:a16="http://schemas.microsoft.com/office/drawing/2014/main" id="{95171EC1-8979-4B49-ACF1-A4B945F276FB}"/>
+                <a16:creationId xmlns:a16="http://schemas.microsoft.com/office/drawing/2014/main" id="{7781CB48-50D7-8B10-44D3-8DF12CD6A99B}"/>
               </a:ext>
             </a:extLst>
           </p:cNvPr>
@@ -1605,7 +1608,7 @@
           <p:cNvPr id="4" name="Content Placeholder 3">
             <a:extLst>
               <a:ext uri="{FF2B5EF4-FFF2-40B4-BE49-F238E27FC236}">
-                <a16:creationId xmlns:a16="http://schemas.microsoft.com/office/drawing/2014/main" id="{B9A0F32C-B27C-76C6-EB14-36BBB4C9813A}"/>
+                <a16:creationId xmlns:a16="http://schemas.microsoft.com/office/drawing/2014/main" id="{05A99188-0B1F-2C93-FD06-7BA0946A8FA4}"/>
               </a:ext>
             </a:extLst>
           </p:cNvPr>
@@ -1667,7 +1670,7 @@
           <p:cNvPr id="5" name="Text Placeholder 4">
             <a:extLst>
               <a:ext uri="{FF2B5EF4-FFF2-40B4-BE49-F238E27FC236}">
-                <a16:creationId xmlns:a16="http://schemas.microsoft.com/office/drawing/2014/main" id="{FBC302D8-3250-AF53-D1BC-E2F4FF388D89}"/>
+                <a16:creationId xmlns:a16="http://schemas.microsoft.com/office/drawing/2014/main" id="{03FA5FFD-497A-E8DD-28BF-F3336BC3DA8B}"/>
               </a:ext>
             </a:extLst>
           </p:cNvPr>
@@ -1738,7 +1741,7 @@
           <p:cNvPr id="6" name="Content Placeholder 5">
             <a:extLst>
               <a:ext uri="{FF2B5EF4-FFF2-40B4-BE49-F238E27FC236}">
-                <a16:creationId xmlns:a16="http://schemas.microsoft.com/office/drawing/2014/main" id="{5EFE8813-5884-40AB-713A-FE5C1636ECD4}"/>
+                <a16:creationId xmlns:a16="http://schemas.microsoft.com/office/drawing/2014/main" id="{81632F70-3B93-BBBC-8747-0016D9953C73}"/>
               </a:ext>
             </a:extLst>
           </p:cNvPr>
@@ -1800,7 +1803,7 @@
           <p:cNvPr id="7" name="Date Placeholder 6">
             <a:extLst>
               <a:ext uri="{FF2B5EF4-FFF2-40B4-BE49-F238E27FC236}">
-                <a16:creationId xmlns:a16="http://schemas.microsoft.com/office/drawing/2014/main" id="{15054CD7-2014-83EC-54C0-926D8CC24F6F}"/>
+                <a16:creationId xmlns:a16="http://schemas.microsoft.com/office/drawing/2014/main" id="{DE960404-1221-6591-0904-1FCB63375DA8}"/>
               </a:ext>
             </a:extLst>
           </p:cNvPr>
@@ -1816,9 +1819,9 @@
           <a:bodyPr/>
           <a:lstStyle/>
           <a:p>
-            <a:fld id="{8914AFC7-9D55-48F2-BBD2-2A90358CCC0E}" type="datetimeFigureOut">
+            <a:fld id="{ADE93143-7665-4E72-B2F5-67BA59FB1B47}" type="datetimeFigureOut">
               <a:rPr lang="en-US" smtClean="0"/>
-              <a:t>5/2/2026</a:t>
+              <a:t>1/29/2026</a:t>
             </a:fld>
             <a:endParaRPr lang="en-US"/>
           </a:p>
@@ -1829,7 +1832,7 @@
           <p:cNvPr id="8" name="Footer Placeholder 7">
             <a:extLst>
               <a:ext uri="{FF2B5EF4-FFF2-40B4-BE49-F238E27FC236}">
-                <a16:creationId xmlns:a16="http://schemas.microsoft.com/office/drawing/2014/main" id="{15329643-E4F9-DF7D-90F5-510805961609}"/>
+                <a16:creationId xmlns:a16="http://schemas.microsoft.com/office/drawing/2014/main" id="{ED5728CA-A8ED-44D4-D198-330267EEDAE5}"/>
               </a:ext>
             </a:extLst>
           </p:cNvPr>
@@ -1854,7 +1857,7 @@
           <p:cNvPr id="9" name="Slide Number Placeholder 8">
             <a:extLst>
               <a:ext uri="{FF2B5EF4-FFF2-40B4-BE49-F238E27FC236}">
-                <a16:creationId xmlns:a16="http://schemas.microsoft.com/office/drawing/2014/main" id="{4C2F292C-C79E-B53A-4DB2-8CF6FF4E0E33}"/>
+                <a16:creationId xmlns:a16="http://schemas.microsoft.com/office/drawing/2014/main" id="{DE34C6AE-AC9B-7702-3C8A-98A86496E297}"/>
               </a:ext>
             </a:extLst>
           </p:cNvPr>
@@ -1870,7 +1873,7 @@
           <a:bodyPr/>
           <a:lstStyle/>
           <a:p>
-            <a:fld id="{75352AB6-06D4-4570-B3BE-B0130698F528}" type="slidenum">
+            <a:fld id="{A6876447-A34C-4188-A761-1FFE88A33A66}" type="slidenum">
               <a:rPr lang="en-US" smtClean="0"/>
               <a:t>‹#›</a:t>
             </a:fld>
@@ -1881,7 +1884,7 @@
     </p:spTree>
     <p:extLst>
       <p:ext uri="{BB962C8B-B14F-4D97-AF65-F5344CB8AC3E}">
-        <p14:creationId xmlns:p14="http://schemas.microsoft.com/office/powerpoint/2010/main" val="2851985365"/>
+        <p14:creationId xmlns:p14="http://schemas.microsoft.com/office/powerpoint/2010/main" val="1762413169"/>
       </p:ext>
     </p:extLst>
   </p:cSld>
@@ -1913,7 +1916,7 @@
           <p:cNvPr id="2" name="Title 1">
             <a:extLst>
               <a:ext uri="{FF2B5EF4-FFF2-40B4-BE49-F238E27FC236}">
-                <a16:creationId xmlns:a16="http://schemas.microsoft.com/office/drawing/2014/main" id="{37CB2EA4-3C32-50D1-4FA3-2245EB908F40}"/>
+                <a16:creationId xmlns:a16="http://schemas.microsoft.com/office/drawing/2014/main" id="{E89ED8D5-33F6-80EF-E928-DC820B092210}"/>
               </a:ext>
             </a:extLst>
           </p:cNvPr>
@@ -1941,7 +1944,7 @@
           <p:cNvPr id="3" name="Date Placeholder 2">
             <a:extLst>
               <a:ext uri="{FF2B5EF4-FFF2-40B4-BE49-F238E27FC236}">
-                <a16:creationId xmlns:a16="http://schemas.microsoft.com/office/drawing/2014/main" id="{E8D27EE9-0F32-1E15-3573-193D0D72062F}"/>
+                <a16:creationId xmlns:a16="http://schemas.microsoft.com/office/drawing/2014/main" id="{F97EA92D-4E67-70FF-6DB9-15A78A1DBAB1}"/>
               </a:ext>
             </a:extLst>
           </p:cNvPr>
@@ -1957,9 +1960,9 @@
           <a:bodyPr/>
           <a:lstStyle/>
           <a:p>
-            <a:fld id="{8914AFC7-9D55-48F2-BBD2-2A90358CCC0E}" type="datetimeFigureOut">
+            <a:fld id="{ADE93143-7665-4E72-B2F5-67BA59FB1B47}" type="datetimeFigureOut">
               <a:rPr lang="en-US" smtClean="0"/>
-              <a:t>5/2/2026</a:t>
+              <a:t>1/29/2026</a:t>
             </a:fld>
             <a:endParaRPr lang="en-US"/>
           </a:p>
@@ -1970,7 +1973,7 @@
           <p:cNvPr id="4" name="Footer Placeholder 3">
             <a:extLst>
               <a:ext uri="{FF2B5EF4-FFF2-40B4-BE49-F238E27FC236}">
-                <a16:creationId xmlns:a16="http://schemas.microsoft.com/office/drawing/2014/main" id="{C7AEF412-D14C-081D-2B55-4C09DED01FDD}"/>
+                <a16:creationId xmlns:a16="http://schemas.microsoft.com/office/drawing/2014/main" id="{5FD36CA4-0621-5715-6E2D-4AD259C4A7B5}"/>
               </a:ext>
             </a:extLst>
           </p:cNvPr>
@@ -1995,7 +1998,7 @@
           <p:cNvPr id="5" name="Slide Number Placeholder 4">
             <a:extLst>
               <a:ext uri="{FF2B5EF4-FFF2-40B4-BE49-F238E27FC236}">
-                <a16:creationId xmlns:a16="http://schemas.microsoft.com/office/drawing/2014/main" id="{1A2301C9-B849-3C58-B8E6-5C0E3BB2CE88}"/>
+                <a16:creationId xmlns:a16="http://schemas.microsoft.com/office/drawing/2014/main" id="{263D76E6-BC93-B299-0C40-82B70981FD53}"/>
               </a:ext>
             </a:extLst>
           </p:cNvPr>
@@ -2011,7 +2014,7 @@
           <a:bodyPr/>
           <a:lstStyle/>
           <a:p>
-            <a:fld id="{75352AB6-06D4-4570-B3BE-B0130698F528}" type="slidenum">
+            <a:fld id="{A6876447-A34C-4188-A761-1FFE88A33A66}" type="slidenum">
               <a:rPr lang="en-US" smtClean="0"/>
               <a:t>‹#›</a:t>
             </a:fld>
@@ -2022,7 +2025,7 @@
     </p:spTree>
     <p:extLst>
       <p:ext uri="{BB962C8B-B14F-4D97-AF65-F5344CB8AC3E}">
-        <p14:creationId xmlns:p14="http://schemas.microsoft.com/office/powerpoint/2010/main" val="4045720856"/>
+        <p14:creationId xmlns:p14="http://schemas.microsoft.com/office/powerpoint/2010/main" val="409232885"/>
       </p:ext>
     </p:extLst>
   </p:cSld>
@@ -2054,7 +2057,7 @@
           <p:cNvPr id="2" name="Date Placeholder 1">
             <a:extLst>
               <a:ext uri="{FF2B5EF4-FFF2-40B4-BE49-F238E27FC236}">
-                <a16:creationId xmlns:a16="http://schemas.microsoft.com/office/drawing/2014/main" id="{A35BB23F-3780-A56F-F924-07FFBFA50598}"/>
+                <a16:creationId xmlns:a16="http://schemas.microsoft.com/office/drawing/2014/main" id="{7DE9E594-00FA-4280-8D36-2661BF7EF84D}"/>
               </a:ext>
             </a:extLst>
           </p:cNvPr>
@@ -2070,9 +2073,9 @@
           <a:bodyPr/>
           <a:lstStyle/>
           <a:p>
-            <a:fld id="{8914AFC7-9D55-48F2-BBD2-2A90358CCC0E}" type="datetimeFigureOut">
+            <a:fld id="{ADE93143-7665-4E72-B2F5-67BA59FB1B47}" type="datetimeFigureOut">
               <a:rPr lang="en-US" smtClean="0"/>
-              <a:t>5/2/2026</a:t>
+              <a:t>1/29/2026</a:t>
             </a:fld>
             <a:endParaRPr lang="en-US"/>
           </a:p>
@@ -2083,7 +2086,7 @@
           <p:cNvPr id="3" name="Footer Placeholder 2">
             <a:extLst>
               <a:ext uri="{FF2B5EF4-FFF2-40B4-BE49-F238E27FC236}">
-                <a16:creationId xmlns:a16="http://schemas.microsoft.com/office/drawing/2014/main" id="{D1FE5AF8-ACD3-58B7-A8D9-3DC5CF5961D9}"/>
+                <a16:creationId xmlns:a16="http://schemas.microsoft.com/office/drawing/2014/main" id="{F2B90ABC-8032-F3D5-877F-5706DF26F8C6}"/>
               </a:ext>
             </a:extLst>
           </p:cNvPr>
@@ -2108,7 +2111,7 @@
           <p:cNvPr id="4" name="Slide Number Placeholder 3">
             <a:extLst>
               <a:ext uri="{FF2B5EF4-FFF2-40B4-BE49-F238E27FC236}">
-                <a16:creationId xmlns:a16="http://schemas.microsoft.com/office/drawing/2014/main" id="{D853FFE8-D550-9F6B-902C-BF0D8A073BFD}"/>
+                <a16:creationId xmlns:a16="http://schemas.microsoft.com/office/drawing/2014/main" id="{7B3B4349-2EAA-A725-A3B7-7A2CF21EE4A7}"/>
               </a:ext>
             </a:extLst>
           </p:cNvPr>
@@ -2124,7 +2127,7 @@
           <a:bodyPr/>
           <a:lstStyle/>
           <a:p>
-            <a:fld id="{75352AB6-06D4-4570-B3BE-B0130698F528}" type="slidenum">
+            <a:fld id="{A6876447-A34C-4188-A761-1FFE88A33A66}" type="slidenum">
               <a:rPr lang="en-US" smtClean="0"/>
               <a:t>‹#›</a:t>
             </a:fld>
@@ -2135,7 +2138,7 @@
     </p:spTree>
     <p:extLst>
       <p:ext uri="{BB962C8B-B14F-4D97-AF65-F5344CB8AC3E}">
-        <p14:creationId xmlns:p14="http://schemas.microsoft.com/office/powerpoint/2010/main" val="4294556474"/>
+        <p14:creationId xmlns:p14="http://schemas.microsoft.com/office/powerpoint/2010/main" val="3695868638"/>
       </p:ext>
     </p:extLst>
   </p:cSld>
@@ -2167,7 +2170,7 @@
           <p:cNvPr id="2" name="Title 1">
             <a:extLst>
               <a:ext uri="{FF2B5EF4-FFF2-40B4-BE49-F238E27FC236}">
-                <a16:creationId xmlns:a16="http://schemas.microsoft.com/office/drawing/2014/main" id="{8A08A07E-6644-F892-8B17-0B86D0315078}"/>
+                <a16:creationId xmlns:a16="http://schemas.microsoft.com/office/drawing/2014/main" id="{D5751ABA-C80F-3DB2-DC65-AF30D3567366}"/>
               </a:ext>
             </a:extLst>
           </p:cNvPr>
@@ -2204,7 +2207,7 @@
           <p:cNvPr id="3" name="Content Placeholder 2">
             <a:extLst>
               <a:ext uri="{FF2B5EF4-FFF2-40B4-BE49-F238E27FC236}">
-                <a16:creationId xmlns:a16="http://schemas.microsoft.com/office/drawing/2014/main" id="{08CBB1D0-593B-01A5-C0FC-5FA16BA82AA5}"/>
+                <a16:creationId xmlns:a16="http://schemas.microsoft.com/office/drawing/2014/main" id="{315ABD73-AB16-6EE9-DD94-26DA0DE19CC9}"/>
               </a:ext>
             </a:extLst>
           </p:cNvPr>
@@ -2294,7 +2297,7 @@
           <p:cNvPr id="4" name="Text Placeholder 3">
             <a:extLst>
               <a:ext uri="{FF2B5EF4-FFF2-40B4-BE49-F238E27FC236}">
-                <a16:creationId xmlns:a16="http://schemas.microsoft.com/office/drawing/2014/main" id="{1F64588F-23FE-A422-B9D1-B1BF5016626A}"/>
+                <a16:creationId xmlns:a16="http://schemas.microsoft.com/office/drawing/2014/main" id="{54B1505E-5B6A-F259-06A0-E6E2747D6AA9}"/>
               </a:ext>
             </a:extLst>
           </p:cNvPr>
@@ -2365,7 +2368,7 @@
           <p:cNvPr id="5" name="Date Placeholder 4">
             <a:extLst>
               <a:ext uri="{FF2B5EF4-FFF2-40B4-BE49-F238E27FC236}">
-                <a16:creationId xmlns:a16="http://schemas.microsoft.com/office/drawing/2014/main" id="{75C6D6A9-2850-AC49-20DE-4E68BD75762A}"/>
+                <a16:creationId xmlns:a16="http://schemas.microsoft.com/office/drawing/2014/main" id="{65FBA7E0-C968-56F8-A859-A76634DF5F90}"/>
               </a:ext>
             </a:extLst>
           </p:cNvPr>
@@ -2381,9 +2384,9 @@
           <a:bodyPr/>
           <a:lstStyle/>
           <a:p>
-            <a:fld id="{8914AFC7-9D55-48F2-BBD2-2A90358CCC0E}" type="datetimeFigureOut">
+            <a:fld id="{ADE93143-7665-4E72-B2F5-67BA59FB1B47}" type="datetimeFigureOut">
               <a:rPr lang="en-US" smtClean="0"/>
-              <a:t>5/2/2026</a:t>
+              <a:t>1/29/2026</a:t>
             </a:fld>
             <a:endParaRPr lang="en-US"/>
           </a:p>
@@ -2394,7 +2397,7 @@
           <p:cNvPr id="6" name="Footer Placeholder 5">
             <a:extLst>
               <a:ext uri="{FF2B5EF4-FFF2-40B4-BE49-F238E27FC236}">
-                <a16:creationId xmlns:a16="http://schemas.microsoft.com/office/drawing/2014/main" id="{F62A5860-A15F-FEB4-762E-349C0E679EA4}"/>
+                <a16:creationId xmlns:a16="http://schemas.microsoft.com/office/drawing/2014/main" id="{06B6E305-70BE-CB5E-A399-3690200F9D7C}"/>
               </a:ext>
             </a:extLst>
           </p:cNvPr>
@@ -2419,7 +2422,7 @@
           <p:cNvPr id="7" name="Slide Number Placeholder 6">
             <a:extLst>
               <a:ext uri="{FF2B5EF4-FFF2-40B4-BE49-F238E27FC236}">
-                <a16:creationId xmlns:a16="http://schemas.microsoft.com/office/drawing/2014/main" id="{7A92B1F1-5FC2-82F6-FE77-FAAE4C03FAA4}"/>
+                <a16:creationId xmlns:a16="http://schemas.microsoft.com/office/drawing/2014/main" id="{C3DC18C0-3390-68E5-B240-C660AF12E272}"/>
               </a:ext>
             </a:extLst>
           </p:cNvPr>
@@ -2435,7 +2438,7 @@
           <a:bodyPr/>
           <a:lstStyle/>
           <a:p>
-            <a:fld id="{75352AB6-06D4-4570-B3BE-B0130698F528}" type="slidenum">
+            <a:fld id="{A6876447-A34C-4188-A761-1FFE88A33A66}" type="slidenum">
               <a:rPr lang="en-US" smtClean="0"/>
               <a:t>‹#›</a:t>
             </a:fld>
@@ -2446,7 +2449,7 @@
     </p:spTree>
     <p:extLst>
       <p:ext uri="{BB962C8B-B14F-4D97-AF65-F5344CB8AC3E}">
-        <p14:creationId xmlns:p14="http://schemas.microsoft.com/office/powerpoint/2010/main" val="872989711"/>
+        <p14:creationId xmlns:p14="http://schemas.microsoft.com/office/powerpoint/2010/main" val="126185324"/>
       </p:ext>
     </p:extLst>
   </p:cSld>
@@ -2478,7 +2481,7 @@
           <p:cNvPr id="2" name="Title 1">
             <a:extLst>
               <a:ext uri="{FF2B5EF4-FFF2-40B4-BE49-F238E27FC236}">
-                <a16:creationId xmlns:a16="http://schemas.microsoft.com/office/drawing/2014/main" id="{F37CEDA0-87F3-94ED-FC3B-45BD539627BC}"/>
+                <a16:creationId xmlns:a16="http://schemas.microsoft.com/office/drawing/2014/main" id="{1741D258-F006-E883-E4AB-C7220D97CE87}"/>
               </a:ext>
             </a:extLst>
           </p:cNvPr>
@@ -2515,7 +2518,7 @@
           <p:cNvPr id="3" name="Picture Placeholder 2">
             <a:extLst>
               <a:ext uri="{FF2B5EF4-FFF2-40B4-BE49-F238E27FC236}">
-                <a16:creationId xmlns:a16="http://schemas.microsoft.com/office/drawing/2014/main" id="{80460123-AB18-CA19-13F6-C03168A9601E}"/>
+                <a16:creationId xmlns:a16="http://schemas.microsoft.com/office/drawing/2014/main" id="{0C4C94BF-AF8F-741C-4BA4-659B66F75C5D}"/>
               </a:ext>
             </a:extLst>
           </p:cNvPr>
@@ -2582,7 +2585,7 @@
           <p:cNvPr id="4" name="Text Placeholder 3">
             <a:extLst>
               <a:ext uri="{FF2B5EF4-FFF2-40B4-BE49-F238E27FC236}">
-                <a16:creationId xmlns:a16="http://schemas.microsoft.com/office/drawing/2014/main" id="{7F3D57F8-9491-D58F-2B54-EFA652EC60A4}"/>
+                <a16:creationId xmlns:a16="http://schemas.microsoft.com/office/drawing/2014/main" id="{9A98952A-EC50-9A73-F0A2-2D30E9B7E171}"/>
               </a:ext>
             </a:extLst>
           </p:cNvPr>
@@ -2653,7 +2656,7 @@
           <p:cNvPr id="5" name="Date Placeholder 4">
             <a:extLst>
               <a:ext uri="{FF2B5EF4-FFF2-40B4-BE49-F238E27FC236}">
-                <a16:creationId xmlns:a16="http://schemas.microsoft.com/office/drawing/2014/main" id="{9D9D639E-E0B1-ADEF-5070-10751C057088}"/>
+                <a16:creationId xmlns:a16="http://schemas.microsoft.com/office/drawing/2014/main" id="{0B8A7CAB-A8AB-C4A1-A171-123A9D0F745B}"/>
               </a:ext>
             </a:extLst>
           </p:cNvPr>
@@ -2669,9 +2672,9 @@
           <a:bodyPr/>
           <a:lstStyle/>
           <a:p>
-            <a:fld id="{8914AFC7-9D55-48F2-BBD2-2A90358CCC0E}" type="datetimeFigureOut">
+            <a:fld id="{ADE93143-7665-4E72-B2F5-67BA59FB1B47}" type="datetimeFigureOut">
               <a:rPr lang="en-US" smtClean="0"/>
-              <a:t>5/2/2026</a:t>
+              <a:t>1/29/2026</a:t>
             </a:fld>
             <a:endParaRPr lang="en-US"/>
           </a:p>
@@ -2682,7 +2685,7 @@
           <p:cNvPr id="6" name="Footer Placeholder 5">
             <a:extLst>
               <a:ext uri="{FF2B5EF4-FFF2-40B4-BE49-F238E27FC236}">
-                <a16:creationId xmlns:a16="http://schemas.microsoft.com/office/drawing/2014/main" id="{AEFC2324-2771-9828-1ED7-2953BB7CD33A}"/>
+                <a16:creationId xmlns:a16="http://schemas.microsoft.com/office/drawing/2014/main" id="{6FAD1FAB-CFCD-9BFB-BA5B-5F2708735FF1}"/>
               </a:ext>
             </a:extLst>
           </p:cNvPr>
@@ -2707,7 +2710,7 @@
           <p:cNvPr id="7" name="Slide Number Placeholder 6">
             <a:extLst>
               <a:ext uri="{FF2B5EF4-FFF2-40B4-BE49-F238E27FC236}">
-                <a16:creationId xmlns:a16="http://schemas.microsoft.com/office/drawing/2014/main" id="{59A96328-809E-A7D7-08F9-FD844DBB3BE5}"/>
+                <a16:creationId xmlns:a16="http://schemas.microsoft.com/office/drawing/2014/main" id="{87547761-4219-AE59-A53B-511B24537477}"/>
               </a:ext>
             </a:extLst>
           </p:cNvPr>
@@ -2723,7 +2726,7 @@
           <a:bodyPr/>
           <a:lstStyle/>
           <a:p>
-            <a:fld id="{75352AB6-06D4-4570-B3BE-B0130698F528}" type="slidenum">
+            <a:fld id="{A6876447-A34C-4188-A761-1FFE88A33A66}" type="slidenum">
               <a:rPr lang="en-US" smtClean="0"/>
               <a:t>‹#›</a:t>
             </a:fld>
@@ -2734,7 +2737,7 @@
     </p:spTree>
     <p:extLst>
       <p:ext uri="{BB962C8B-B14F-4D97-AF65-F5344CB8AC3E}">
-        <p14:creationId xmlns:p14="http://schemas.microsoft.com/office/powerpoint/2010/main" val="3500848029"/>
+        <p14:creationId xmlns:p14="http://schemas.microsoft.com/office/powerpoint/2010/main" val="2602117498"/>
       </p:ext>
     </p:extLst>
   </p:cSld>
@@ -2771,7 +2774,7 @@
           <p:cNvPr id="2" name="Title Placeholder 1">
             <a:extLst>
               <a:ext uri="{FF2B5EF4-FFF2-40B4-BE49-F238E27FC236}">
-                <a16:creationId xmlns:a16="http://schemas.microsoft.com/office/drawing/2014/main" id="{9BD58ABE-F0A6-254D-BC48-8CCFC61C178D}"/>
+                <a16:creationId xmlns:a16="http://schemas.microsoft.com/office/drawing/2014/main" id="{D6A220E5-98FF-559E-715E-6B9DF5D71F9E}"/>
               </a:ext>
             </a:extLst>
           </p:cNvPr>
@@ -2809,7 +2812,7 @@
           <p:cNvPr id="3" name="Text Placeholder 2">
             <a:extLst>
               <a:ext uri="{FF2B5EF4-FFF2-40B4-BE49-F238E27FC236}">
-                <a16:creationId xmlns:a16="http://schemas.microsoft.com/office/drawing/2014/main" id="{7BA1BD7C-5A57-F39B-4246-91587653B05F}"/>
+                <a16:creationId xmlns:a16="http://schemas.microsoft.com/office/drawing/2014/main" id="{23244B16-D0F1-EF85-3CF1-25A42F2BD077}"/>
               </a:ext>
             </a:extLst>
           </p:cNvPr>
@@ -2876,7 +2879,7 @@
           <p:cNvPr id="4" name="Date Placeholder 3">
             <a:extLst>
               <a:ext uri="{FF2B5EF4-FFF2-40B4-BE49-F238E27FC236}">
-                <a16:creationId xmlns:a16="http://schemas.microsoft.com/office/drawing/2014/main" id="{9B299570-95F4-D56A-3D9F-AF8E9CBFEA54}"/>
+                <a16:creationId xmlns:a16="http://schemas.microsoft.com/office/drawing/2014/main" id="{122ABD9A-5FD9-477D-2537-903EDEB8D304}"/>
               </a:ext>
             </a:extLst>
           </p:cNvPr>
@@ -2910,9 +2913,9 @@
             </a:lvl1pPr>
           </a:lstStyle>
           <a:p>
-            <a:fld id="{8914AFC7-9D55-48F2-BBD2-2A90358CCC0E}" type="datetimeFigureOut">
+            <a:fld id="{ADE93143-7665-4E72-B2F5-67BA59FB1B47}" type="datetimeFigureOut">
               <a:rPr lang="en-US" smtClean="0"/>
-              <a:t>5/2/2026</a:t>
+              <a:t>1/29/2026</a:t>
             </a:fld>
             <a:endParaRPr lang="en-US"/>
           </a:p>
@@ -2923,7 +2926,7 @@
           <p:cNvPr id="5" name="Footer Placeholder 4">
             <a:extLst>
               <a:ext uri="{FF2B5EF4-FFF2-40B4-BE49-F238E27FC236}">
-                <a16:creationId xmlns:a16="http://schemas.microsoft.com/office/drawing/2014/main" id="{8A0C67B8-CE80-EB9A-8E51-194044AD6A16}"/>
+                <a16:creationId xmlns:a16="http://schemas.microsoft.com/office/drawing/2014/main" id="{FA19B1F4-93BD-B0B1-F9F9-B00CB930AA3C}"/>
               </a:ext>
             </a:extLst>
           </p:cNvPr>
@@ -2966,7 +2969,7 @@
           <p:cNvPr id="6" name="Slide Number Placeholder 5">
             <a:extLst>
               <a:ext uri="{FF2B5EF4-FFF2-40B4-BE49-F238E27FC236}">
-                <a16:creationId xmlns:a16="http://schemas.microsoft.com/office/drawing/2014/main" id="{D3DA260F-CD86-7479-FC46-6080477251DF}"/>
+                <a16:creationId xmlns:a16="http://schemas.microsoft.com/office/drawing/2014/main" id="{30D49F05-E0FA-668E-9355-0AE3DC662DBE}"/>
               </a:ext>
             </a:extLst>
           </p:cNvPr>
@@ -3000,7 +3003,7 @@
             </a:lvl1pPr>
           </a:lstStyle>
           <a:p>
-            <a:fld id="{75352AB6-06D4-4570-B3BE-B0130698F528}" type="slidenum">
+            <a:fld id="{A6876447-A34C-4188-A761-1FFE88A33A66}" type="slidenum">
               <a:rPr lang="en-US" smtClean="0"/>
               <a:t>‹#›</a:t>
             </a:fld>
@@ -3011,7 +3014,7 @@
     </p:spTree>
     <p:extLst>
       <p:ext uri="{BB962C8B-B14F-4D97-AF65-F5344CB8AC3E}">
-        <p14:creationId xmlns:p14="http://schemas.microsoft.com/office/powerpoint/2010/main" val="3652637802"/>
+        <p14:creationId xmlns:p14="http://schemas.microsoft.com/office/powerpoint/2010/main" val="4030097736"/>
       </p:ext>
     </p:extLst>
   </p:cSld>
@@ -3331,10 +3334,10 @@
       </p:grpSpPr>
       <p:grpSp>
         <p:nvGrpSpPr>
-          <p:cNvPr id="64" name="Group 63">
+          <p:cNvPr id="17" name="Group 16">
             <a:extLst>
               <a:ext uri="{FF2B5EF4-FFF2-40B4-BE49-F238E27FC236}">
-                <a16:creationId xmlns:a16="http://schemas.microsoft.com/office/drawing/2014/main" id="{6416E9C8-D439-CA9E-5DA1-3A7A7E8315B7}"/>
+                <a16:creationId xmlns:a16="http://schemas.microsoft.com/office/drawing/2014/main" id="{70845BB6-3065-A740-A170-43772A051CA1}"/>
               </a:ext>
             </a:extLst>
           </p:cNvPr>
@@ -3343,18 +3346,18 @@
         </p:nvGrpSpPr>
         <p:grpSpPr>
           <a:xfrm>
-            <a:off x="1379621" y="113982"/>
-            <a:ext cx="8246642" cy="5522817"/>
-            <a:chOff x="1379621" y="113982"/>
-            <a:chExt cx="8246642" cy="5522817"/>
+            <a:off x="-648115" y="1418062"/>
+            <a:ext cx="11618510" cy="4018978"/>
+            <a:chOff x="-648115" y="1418062"/>
+            <a:chExt cx="11618510" cy="4018978"/>
           </a:xfrm>
         </p:grpSpPr>
         <p:grpSp>
           <p:nvGrpSpPr>
-            <p:cNvPr id="22" name="Group 21">
+            <p:cNvPr id="72" name="Group 71">
               <a:extLst>
                 <a:ext uri="{FF2B5EF4-FFF2-40B4-BE49-F238E27FC236}">
-                  <a16:creationId xmlns:a16="http://schemas.microsoft.com/office/drawing/2014/main" id="{EC407A57-9A63-C68A-E122-BA831E74250D}"/>
+                  <a16:creationId xmlns:a16="http://schemas.microsoft.com/office/drawing/2014/main" id="{3A01613E-223E-4AEA-63AC-8C231C175639}"/>
                 </a:ext>
               </a:extLst>
             </p:cNvPr>
@@ -3363,18 +3366,684 @@
           </p:nvGrpSpPr>
           <p:grpSpPr>
             <a:xfrm>
-              <a:off x="1614236" y="541420"/>
-              <a:ext cx="7726779" cy="1925053"/>
-              <a:chOff x="1493921" y="1295399"/>
-              <a:chExt cx="7726779" cy="1925053"/>
+              <a:off x="-648115" y="1418062"/>
+              <a:ext cx="11618510" cy="4018978"/>
+              <a:chOff x="-369939" y="1369486"/>
+              <a:chExt cx="11618510" cy="4018978"/>
             </a:xfrm>
           </p:grpSpPr>
+          <p:sp>
+            <p:nvSpPr>
+              <p:cNvPr id="53" name="Freeform: Shape 52">
+                <a:extLst>
+                  <a:ext uri="{FF2B5EF4-FFF2-40B4-BE49-F238E27FC236}">
+                    <a16:creationId xmlns:a16="http://schemas.microsoft.com/office/drawing/2014/main" id="{E882934B-4F33-99A5-5432-F53ECD363250}"/>
+                  </a:ext>
+                </a:extLst>
+              </p:cNvPr>
+              <p:cNvSpPr/>
+              <p:nvPr/>
+            </p:nvSpPr>
+            <p:spPr>
+              <a:xfrm flipH="1">
+                <a:off x="6977343" y="1882496"/>
+                <a:ext cx="1725686" cy="2945411"/>
+              </a:xfrm>
+              <a:custGeom>
+                <a:avLst/>
+                <a:gdLst>
+                  <a:gd name="connsiteX0" fmla="*/ 0 w 2093204"/>
+                  <a:gd name="connsiteY0" fmla="*/ 1024568 h 3051672"/>
+                  <a:gd name="connsiteX1" fmla="*/ 2093204 w 2093204"/>
+                  <a:gd name="connsiteY1" fmla="*/ 0 h 3051672"/>
+                  <a:gd name="connsiteX2" fmla="*/ 2082188 w 2093204"/>
+                  <a:gd name="connsiteY2" fmla="*/ 3051672 h 3051672"/>
+                  <a:gd name="connsiteX3" fmla="*/ 0 w 2093204"/>
+                  <a:gd name="connsiteY3" fmla="*/ 2093204 h 3051672"/>
+                  <a:gd name="connsiteX4" fmla="*/ 0 w 2093204"/>
+                  <a:gd name="connsiteY4" fmla="*/ 1024568 h 3051672"/>
+                  <a:gd name="connsiteX0" fmla="*/ 0 w 2082188"/>
+                  <a:gd name="connsiteY0" fmla="*/ 1013551 h 3040655"/>
+                  <a:gd name="connsiteX1" fmla="*/ 2060153 w 2082188"/>
+                  <a:gd name="connsiteY1" fmla="*/ 0 h 3040655"/>
+                  <a:gd name="connsiteX2" fmla="*/ 2082188 w 2082188"/>
+                  <a:gd name="connsiteY2" fmla="*/ 3040655 h 3040655"/>
+                  <a:gd name="connsiteX3" fmla="*/ 0 w 2082188"/>
+                  <a:gd name="connsiteY3" fmla="*/ 2082187 h 3040655"/>
+                  <a:gd name="connsiteX4" fmla="*/ 0 w 2082188"/>
+                  <a:gd name="connsiteY4" fmla="*/ 1013551 h 3040655"/>
+                  <a:gd name="connsiteX0" fmla="*/ 0 w 2082188"/>
+                  <a:gd name="connsiteY0" fmla="*/ 1013551 h 3040655"/>
+                  <a:gd name="connsiteX1" fmla="*/ 2060153 w 2082188"/>
+                  <a:gd name="connsiteY1" fmla="*/ 0 h 3040655"/>
+                  <a:gd name="connsiteX2" fmla="*/ 2082188 w 2082188"/>
+                  <a:gd name="connsiteY2" fmla="*/ 3040655 h 3040655"/>
+                  <a:gd name="connsiteX3" fmla="*/ 0 w 2082188"/>
+                  <a:gd name="connsiteY3" fmla="*/ 2082187 h 3040655"/>
+                  <a:gd name="connsiteX4" fmla="*/ 0 w 2082188"/>
+                  <a:gd name="connsiteY4" fmla="*/ 1013551 h 3040655"/>
+                  <a:gd name="connsiteX0" fmla="*/ 0 w 2082188"/>
+                  <a:gd name="connsiteY0" fmla="*/ 1013551 h 3040655"/>
+                  <a:gd name="connsiteX1" fmla="*/ 2060153 w 2082188"/>
+                  <a:gd name="connsiteY1" fmla="*/ 0 h 3040655"/>
+                  <a:gd name="connsiteX2" fmla="*/ 2082188 w 2082188"/>
+                  <a:gd name="connsiteY2" fmla="*/ 3040655 h 3040655"/>
+                  <a:gd name="connsiteX3" fmla="*/ 1388125 w 2082188"/>
+                  <a:gd name="connsiteY3" fmla="*/ 2379643 h 3040655"/>
+                  <a:gd name="connsiteX4" fmla="*/ 0 w 2082188"/>
+                  <a:gd name="connsiteY4" fmla="*/ 2082187 h 3040655"/>
+                  <a:gd name="connsiteX5" fmla="*/ 0 w 2082188"/>
+                  <a:gd name="connsiteY5" fmla="*/ 1013551 h 3040655"/>
+                  <a:gd name="connsiteX0" fmla="*/ 0 w 2082188"/>
+                  <a:gd name="connsiteY0" fmla="*/ 1013551 h 3040655"/>
+                  <a:gd name="connsiteX1" fmla="*/ 2060153 w 2082188"/>
+                  <a:gd name="connsiteY1" fmla="*/ 0 h 3040655"/>
+                  <a:gd name="connsiteX2" fmla="*/ 2082188 w 2082188"/>
+                  <a:gd name="connsiteY2" fmla="*/ 3040655 h 3040655"/>
+                  <a:gd name="connsiteX3" fmla="*/ 1344057 w 2082188"/>
+                  <a:gd name="connsiteY3" fmla="*/ 2500828 h 3040655"/>
+                  <a:gd name="connsiteX4" fmla="*/ 0 w 2082188"/>
+                  <a:gd name="connsiteY4" fmla="*/ 2082187 h 3040655"/>
+                  <a:gd name="connsiteX5" fmla="*/ 0 w 2082188"/>
+                  <a:gd name="connsiteY5" fmla="*/ 1013551 h 3040655"/>
+                  <a:gd name="connsiteX0" fmla="*/ 0 w 2082188"/>
+                  <a:gd name="connsiteY0" fmla="*/ 1013551 h 3040655"/>
+                  <a:gd name="connsiteX1" fmla="*/ 2060153 w 2082188"/>
+                  <a:gd name="connsiteY1" fmla="*/ 0 h 3040655"/>
+                  <a:gd name="connsiteX2" fmla="*/ 2082188 w 2082188"/>
+                  <a:gd name="connsiteY2" fmla="*/ 3040655 h 3040655"/>
+                  <a:gd name="connsiteX3" fmla="*/ 1288973 w 2082188"/>
+                  <a:gd name="connsiteY3" fmla="*/ 2500828 h 3040655"/>
+                  <a:gd name="connsiteX4" fmla="*/ 0 w 2082188"/>
+                  <a:gd name="connsiteY4" fmla="*/ 2082187 h 3040655"/>
+                  <a:gd name="connsiteX5" fmla="*/ 0 w 2082188"/>
+                  <a:gd name="connsiteY5" fmla="*/ 1013551 h 3040655"/>
+                  <a:gd name="connsiteX0" fmla="*/ 0 w 2082188"/>
+                  <a:gd name="connsiteY0" fmla="*/ 1013551 h 3040655"/>
+                  <a:gd name="connsiteX1" fmla="*/ 2060153 w 2082188"/>
+                  <a:gd name="connsiteY1" fmla="*/ 0 h 3040655"/>
+                  <a:gd name="connsiteX2" fmla="*/ 2082188 w 2082188"/>
+                  <a:gd name="connsiteY2" fmla="*/ 3040655 h 3040655"/>
+                  <a:gd name="connsiteX3" fmla="*/ 1222872 w 2082188"/>
+                  <a:gd name="connsiteY3" fmla="*/ 2566930 h 3040655"/>
+                  <a:gd name="connsiteX4" fmla="*/ 0 w 2082188"/>
+                  <a:gd name="connsiteY4" fmla="*/ 2082187 h 3040655"/>
+                  <a:gd name="connsiteX5" fmla="*/ 0 w 2082188"/>
+                  <a:gd name="connsiteY5" fmla="*/ 1013551 h 3040655"/>
+                  <a:gd name="connsiteX0" fmla="*/ 0 w 2082188"/>
+                  <a:gd name="connsiteY0" fmla="*/ 877779 h 2904883"/>
+                  <a:gd name="connsiteX1" fmla="*/ 2071104 w 2082188"/>
+                  <a:gd name="connsiteY1" fmla="*/ 0 h 2904883"/>
+                  <a:gd name="connsiteX2" fmla="*/ 2082188 w 2082188"/>
+                  <a:gd name="connsiteY2" fmla="*/ 2904883 h 2904883"/>
+                  <a:gd name="connsiteX3" fmla="*/ 1222872 w 2082188"/>
+                  <a:gd name="connsiteY3" fmla="*/ 2431158 h 2904883"/>
+                  <a:gd name="connsiteX4" fmla="*/ 0 w 2082188"/>
+                  <a:gd name="connsiteY4" fmla="*/ 1946415 h 2904883"/>
+                  <a:gd name="connsiteX5" fmla="*/ 0 w 2082188"/>
+                  <a:gd name="connsiteY5" fmla="*/ 877779 h 2904883"/>
+                  <a:gd name="connsiteX0" fmla="*/ 0 w 2082188"/>
+                  <a:gd name="connsiteY0" fmla="*/ 877779 h 2904883"/>
+                  <a:gd name="connsiteX1" fmla="*/ 2071104 w 2082188"/>
+                  <a:gd name="connsiteY1" fmla="*/ 0 h 2904883"/>
+                  <a:gd name="connsiteX2" fmla="*/ 2082188 w 2082188"/>
+                  <a:gd name="connsiteY2" fmla="*/ 2904883 h 2904883"/>
+                  <a:gd name="connsiteX3" fmla="*/ 1233822 w 2082188"/>
+                  <a:gd name="connsiteY3" fmla="*/ 2419844 h 2904883"/>
+                  <a:gd name="connsiteX4" fmla="*/ 0 w 2082188"/>
+                  <a:gd name="connsiteY4" fmla="*/ 1946415 h 2904883"/>
+                  <a:gd name="connsiteX5" fmla="*/ 0 w 2082188"/>
+                  <a:gd name="connsiteY5" fmla="*/ 877779 h 2904883"/>
+                  <a:gd name="connsiteX0" fmla="*/ 0 w 2082188"/>
+                  <a:gd name="connsiteY0" fmla="*/ 877779 h 2904883"/>
+                  <a:gd name="connsiteX1" fmla="*/ 2071104 w 2082188"/>
+                  <a:gd name="connsiteY1" fmla="*/ 0 h 2904883"/>
+                  <a:gd name="connsiteX2" fmla="*/ 2082188 w 2082188"/>
+                  <a:gd name="connsiteY2" fmla="*/ 2904883 h 2904883"/>
+                  <a:gd name="connsiteX3" fmla="*/ 1233822 w 2082188"/>
+                  <a:gd name="connsiteY3" fmla="*/ 2419844 h 2904883"/>
+                  <a:gd name="connsiteX4" fmla="*/ 0 w 2082188"/>
+                  <a:gd name="connsiteY4" fmla="*/ 1946415 h 2904883"/>
+                  <a:gd name="connsiteX5" fmla="*/ 0 w 2082188"/>
+                  <a:gd name="connsiteY5" fmla="*/ 877779 h 2904883"/>
+                  <a:gd name="connsiteX0" fmla="*/ 0 w 2082188"/>
+                  <a:gd name="connsiteY0" fmla="*/ 877779 h 2904883"/>
+                  <a:gd name="connsiteX1" fmla="*/ 2071104 w 2082188"/>
+                  <a:gd name="connsiteY1" fmla="*/ 0 h 2904883"/>
+                  <a:gd name="connsiteX2" fmla="*/ 2082188 w 2082188"/>
+                  <a:gd name="connsiteY2" fmla="*/ 2904883 h 2904883"/>
+                  <a:gd name="connsiteX3" fmla="*/ 1124321 w 2082188"/>
+                  <a:gd name="connsiteY3" fmla="*/ 2318016 h 2904883"/>
+                  <a:gd name="connsiteX4" fmla="*/ 0 w 2082188"/>
+                  <a:gd name="connsiteY4" fmla="*/ 1946415 h 2904883"/>
+                  <a:gd name="connsiteX5" fmla="*/ 0 w 2082188"/>
+                  <a:gd name="connsiteY5" fmla="*/ 877779 h 2904883"/>
+                  <a:gd name="connsiteX0" fmla="*/ 0 w 2082188"/>
+                  <a:gd name="connsiteY0" fmla="*/ 877779 h 2904883"/>
+                  <a:gd name="connsiteX1" fmla="*/ 2071104 w 2082188"/>
+                  <a:gd name="connsiteY1" fmla="*/ 0 h 2904883"/>
+                  <a:gd name="connsiteX2" fmla="*/ 2082188 w 2082188"/>
+                  <a:gd name="connsiteY2" fmla="*/ 2904883 h 2904883"/>
+                  <a:gd name="connsiteX3" fmla="*/ 1146222 w 2082188"/>
+                  <a:gd name="connsiteY3" fmla="*/ 2397216 h 2904883"/>
+                  <a:gd name="connsiteX4" fmla="*/ 0 w 2082188"/>
+                  <a:gd name="connsiteY4" fmla="*/ 1946415 h 2904883"/>
+                  <a:gd name="connsiteX5" fmla="*/ 0 w 2082188"/>
+                  <a:gd name="connsiteY5" fmla="*/ 877779 h 2904883"/>
+                  <a:gd name="connsiteX0" fmla="*/ 0 w 2082188"/>
+                  <a:gd name="connsiteY0" fmla="*/ 877779 h 2904883"/>
+                  <a:gd name="connsiteX1" fmla="*/ 2071104 w 2082188"/>
+                  <a:gd name="connsiteY1" fmla="*/ 0 h 2904883"/>
+                  <a:gd name="connsiteX2" fmla="*/ 2082188 w 2082188"/>
+                  <a:gd name="connsiteY2" fmla="*/ 2904883 h 2904883"/>
+                  <a:gd name="connsiteX3" fmla="*/ 1093192 w 2082188"/>
+                  <a:gd name="connsiteY3" fmla="*/ 2415063 h 2904883"/>
+                  <a:gd name="connsiteX4" fmla="*/ 0 w 2082188"/>
+                  <a:gd name="connsiteY4" fmla="*/ 1946415 h 2904883"/>
+                  <a:gd name="connsiteX5" fmla="*/ 0 w 2082188"/>
+                  <a:gd name="connsiteY5" fmla="*/ 877779 h 2904883"/>
+                  <a:gd name="connsiteX0" fmla="*/ 0 w 2082188"/>
+                  <a:gd name="connsiteY0" fmla="*/ 877779 h 2904883"/>
+                  <a:gd name="connsiteX1" fmla="*/ 2071104 w 2082188"/>
+                  <a:gd name="connsiteY1" fmla="*/ 0 h 2904883"/>
+                  <a:gd name="connsiteX2" fmla="*/ 2082188 w 2082188"/>
+                  <a:gd name="connsiteY2" fmla="*/ 2904883 h 2904883"/>
+                  <a:gd name="connsiteX3" fmla="*/ 1093192 w 2082188"/>
+                  <a:gd name="connsiteY3" fmla="*/ 2415063 h 2904883"/>
+                  <a:gd name="connsiteX4" fmla="*/ 0 w 2082188"/>
+                  <a:gd name="connsiteY4" fmla="*/ 1946415 h 2904883"/>
+                  <a:gd name="connsiteX5" fmla="*/ 0 w 2082188"/>
+                  <a:gd name="connsiteY5" fmla="*/ 877779 h 2904883"/>
+                  <a:gd name="connsiteX0" fmla="*/ 0 w 2082188"/>
+                  <a:gd name="connsiteY0" fmla="*/ 877779 h 2904883"/>
+                  <a:gd name="connsiteX1" fmla="*/ 2071104 w 2082188"/>
+                  <a:gd name="connsiteY1" fmla="*/ 0 h 2904883"/>
+                  <a:gd name="connsiteX2" fmla="*/ 2082188 w 2082188"/>
+                  <a:gd name="connsiteY2" fmla="*/ 2904883 h 2904883"/>
+                  <a:gd name="connsiteX3" fmla="*/ 1119708 w 2082188"/>
+                  <a:gd name="connsiteY3" fmla="*/ 2263371 h 2904883"/>
+                  <a:gd name="connsiteX4" fmla="*/ 0 w 2082188"/>
+                  <a:gd name="connsiteY4" fmla="*/ 1946415 h 2904883"/>
+                  <a:gd name="connsiteX5" fmla="*/ 0 w 2082188"/>
+                  <a:gd name="connsiteY5" fmla="*/ 877779 h 2904883"/>
+                  <a:gd name="connsiteX0" fmla="*/ 0 w 2082188"/>
+                  <a:gd name="connsiteY0" fmla="*/ 877779 h 2904883"/>
+                  <a:gd name="connsiteX1" fmla="*/ 2071104 w 2082188"/>
+                  <a:gd name="connsiteY1" fmla="*/ 0 h 2904883"/>
+                  <a:gd name="connsiteX2" fmla="*/ 2082188 w 2082188"/>
+                  <a:gd name="connsiteY2" fmla="*/ 2904883 h 2904883"/>
+                  <a:gd name="connsiteX3" fmla="*/ 1022486 w 2082188"/>
+                  <a:gd name="connsiteY3" fmla="*/ 2352601 h 2904883"/>
+                  <a:gd name="connsiteX4" fmla="*/ 0 w 2082188"/>
+                  <a:gd name="connsiteY4" fmla="*/ 1946415 h 2904883"/>
+                  <a:gd name="connsiteX5" fmla="*/ 0 w 2082188"/>
+                  <a:gd name="connsiteY5" fmla="*/ 877779 h 2904883"/>
+                  <a:gd name="connsiteX0" fmla="*/ 0 w 2082188"/>
+                  <a:gd name="connsiteY0" fmla="*/ 877779 h 2904883"/>
+                  <a:gd name="connsiteX1" fmla="*/ 2071104 w 2082188"/>
+                  <a:gd name="connsiteY1" fmla="*/ 0 h 2904883"/>
+                  <a:gd name="connsiteX2" fmla="*/ 2082188 w 2082188"/>
+                  <a:gd name="connsiteY2" fmla="*/ 2904883 h 2904883"/>
+                  <a:gd name="connsiteX3" fmla="*/ 1102032 w 2082188"/>
+                  <a:gd name="connsiteY3" fmla="*/ 2299063 h 2904883"/>
+                  <a:gd name="connsiteX4" fmla="*/ 0 w 2082188"/>
+                  <a:gd name="connsiteY4" fmla="*/ 1946415 h 2904883"/>
+                  <a:gd name="connsiteX5" fmla="*/ 0 w 2082188"/>
+                  <a:gd name="connsiteY5" fmla="*/ 877779 h 2904883"/>
+                  <a:gd name="connsiteX0" fmla="*/ 0 w 2082188"/>
+                  <a:gd name="connsiteY0" fmla="*/ 877779 h 2904883"/>
+                  <a:gd name="connsiteX1" fmla="*/ 2071104 w 2082188"/>
+                  <a:gd name="connsiteY1" fmla="*/ 0 h 2904883"/>
+                  <a:gd name="connsiteX2" fmla="*/ 2082188 w 2082188"/>
+                  <a:gd name="connsiteY2" fmla="*/ 2904883 h 2904883"/>
+                  <a:gd name="connsiteX3" fmla="*/ 1102032 w 2082188"/>
+                  <a:gd name="connsiteY3" fmla="*/ 2299063 h 2904883"/>
+                  <a:gd name="connsiteX4" fmla="*/ 0 w 2082188"/>
+                  <a:gd name="connsiteY4" fmla="*/ 1946415 h 2904883"/>
+                  <a:gd name="connsiteX5" fmla="*/ 0 w 2082188"/>
+                  <a:gd name="connsiteY5" fmla="*/ 877779 h 2904883"/>
+                </a:gdLst>
+                <a:ahLst/>
+                <a:cxnLst>
+                  <a:cxn ang="0">
+                    <a:pos x="connsiteX0" y="connsiteY0"/>
+                  </a:cxn>
+                  <a:cxn ang="0">
+                    <a:pos x="connsiteX1" y="connsiteY1"/>
+                  </a:cxn>
+                  <a:cxn ang="0">
+                    <a:pos x="connsiteX2" y="connsiteY2"/>
+                  </a:cxn>
+                  <a:cxn ang="0">
+                    <a:pos x="connsiteX3" y="connsiteY3"/>
+                  </a:cxn>
+                  <a:cxn ang="0">
+                    <a:pos x="connsiteX4" y="connsiteY4"/>
+                  </a:cxn>
+                  <a:cxn ang="0">
+                    <a:pos x="connsiteX5" y="connsiteY5"/>
+                  </a:cxn>
+                </a:cxnLst>
+                <a:rect l="l" t="t" r="r" b="b"/>
+                <a:pathLst>
+                  <a:path w="2082188" h="2904883">
+                    <a:moveTo>
+                      <a:pt x="0" y="877779"/>
+                    </a:moveTo>
+                    <a:cubicBezTo>
+                      <a:pt x="686718" y="539929"/>
+                      <a:pt x="1417437" y="701407"/>
+                      <a:pt x="2071104" y="0"/>
+                    </a:cubicBezTo>
+                    <a:cubicBezTo>
+                      <a:pt x="2074799" y="968294"/>
+                      <a:pt x="2078493" y="1936589"/>
+                      <a:pt x="2082188" y="2904883"/>
+                    </a:cubicBezTo>
+                    <a:cubicBezTo>
+                      <a:pt x="1821455" y="2783697"/>
+                      <a:pt x="1563651" y="2437434"/>
+                      <a:pt x="1102032" y="2299063"/>
+                    </a:cubicBezTo>
+                    <a:cubicBezTo>
+                      <a:pt x="640413" y="2160692"/>
+                      <a:pt x="367344" y="2063964"/>
+                      <a:pt x="0" y="1946415"/>
+                    </a:cubicBezTo>
+                    <a:lnTo>
+                      <a:pt x="0" y="877779"/>
+                    </a:lnTo>
+                    <a:close/>
+                  </a:path>
+                </a:pathLst>
+              </a:custGeom>
+              <a:gradFill flip="none" rotWithShape="1">
+                <a:gsLst>
+                  <a:gs pos="17000">
+                    <a:schemeClr val="bg1">
+                      <a:lumMod val="95000"/>
+                    </a:schemeClr>
+                  </a:gs>
+                  <a:gs pos="48000">
+                    <a:srgbClr val="FFFF00"/>
+                  </a:gs>
+                  <a:gs pos="82000">
+                    <a:schemeClr val="bg1"/>
+                  </a:gs>
+                </a:gsLst>
+                <a:lin ang="5400000" scaled="1"/>
+                <a:tileRect/>
+              </a:gradFill>
+              <a:ln>
+                <a:solidFill>
+                  <a:srgbClr val="FFC000"/>
+                </a:solidFill>
+              </a:ln>
+            </p:spPr>
+            <p:style>
+              <a:lnRef idx="2">
+                <a:schemeClr val="accent1">
+                  <a:shade val="15000"/>
+                </a:schemeClr>
+              </a:lnRef>
+              <a:fillRef idx="1">
+                <a:schemeClr val="accent1"/>
+              </a:fillRef>
+              <a:effectRef idx="0">
+                <a:schemeClr val="accent1"/>
+              </a:effectRef>
+              <a:fontRef idx="minor">
+                <a:schemeClr val="lt1"/>
+              </a:fontRef>
+            </p:style>
+            <p:txBody>
+              <a:bodyPr rtlCol="0" anchor="ctr"/>
+              <a:lstStyle/>
+              <a:p>
+                <a:pPr algn="ctr"/>
+                <a:endParaRPr lang="en-US"/>
+              </a:p>
+            </p:txBody>
+          </p:sp>
+          <p:sp>
+            <p:nvSpPr>
+              <p:cNvPr id="41" name="Freeform: Shape 40">
+                <a:extLst>
+                  <a:ext uri="{FF2B5EF4-FFF2-40B4-BE49-F238E27FC236}">
+                    <a16:creationId xmlns:a16="http://schemas.microsoft.com/office/drawing/2014/main" id="{336DFBA6-D4CF-6E76-8A0B-3653A8CB419E}"/>
+                  </a:ext>
+                </a:extLst>
+              </p:cNvPr>
+              <p:cNvSpPr/>
+              <p:nvPr/>
+            </p:nvSpPr>
+            <p:spPr>
+              <a:xfrm>
+                <a:off x="3208945" y="1610847"/>
+                <a:ext cx="3474247" cy="3488707"/>
+              </a:xfrm>
+              <a:custGeom>
+                <a:avLst/>
+                <a:gdLst>
+                  <a:gd name="connsiteX0" fmla="*/ 0 w 2093204"/>
+                  <a:gd name="connsiteY0" fmla="*/ 1024568 h 3051672"/>
+                  <a:gd name="connsiteX1" fmla="*/ 2093204 w 2093204"/>
+                  <a:gd name="connsiteY1" fmla="*/ 0 h 3051672"/>
+                  <a:gd name="connsiteX2" fmla="*/ 2082188 w 2093204"/>
+                  <a:gd name="connsiteY2" fmla="*/ 3051672 h 3051672"/>
+                  <a:gd name="connsiteX3" fmla="*/ 0 w 2093204"/>
+                  <a:gd name="connsiteY3" fmla="*/ 2093204 h 3051672"/>
+                  <a:gd name="connsiteX4" fmla="*/ 0 w 2093204"/>
+                  <a:gd name="connsiteY4" fmla="*/ 1024568 h 3051672"/>
+                  <a:gd name="connsiteX0" fmla="*/ 0 w 2082188"/>
+                  <a:gd name="connsiteY0" fmla="*/ 1013551 h 3040655"/>
+                  <a:gd name="connsiteX1" fmla="*/ 2060153 w 2082188"/>
+                  <a:gd name="connsiteY1" fmla="*/ 0 h 3040655"/>
+                  <a:gd name="connsiteX2" fmla="*/ 2082188 w 2082188"/>
+                  <a:gd name="connsiteY2" fmla="*/ 3040655 h 3040655"/>
+                  <a:gd name="connsiteX3" fmla="*/ 0 w 2082188"/>
+                  <a:gd name="connsiteY3" fmla="*/ 2082187 h 3040655"/>
+                  <a:gd name="connsiteX4" fmla="*/ 0 w 2082188"/>
+                  <a:gd name="connsiteY4" fmla="*/ 1013551 h 3040655"/>
+                  <a:gd name="connsiteX0" fmla="*/ 0 w 2082188"/>
+                  <a:gd name="connsiteY0" fmla="*/ 1013551 h 3040655"/>
+                  <a:gd name="connsiteX1" fmla="*/ 2060153 w 2082188"/>
+                  <a:gd name="connsiteY1" fmla="*/ 0 h 3040655"/>
+                  <a:gd name="connsiteX2" fmla="*/ 2082188 w 2082188"/>
+                  <a:gd name="connsiteY2" fmla="*/ 3040655 h 3040655"/>
+                  <a:gd name="connsiteX3" fmla="*/ 0 w 2082188"/>
+                  <a:gd name="connsiteY3" fmla="*/ 2082187 h 3040655"/>
+                  <a:gd name="connsiteX4" fmla="*/ 0 w 2082188"/>
+                  <a:gd name="connsiteY4" fmla="*/ 1013551 h 3040655"/>
+                  <a:gd name="connsiteX0" fmla="*/ 0 w 2082188"/>
+                  <a:gd name="connsiteY0" fmla="*/ 1013551 h 3040655"/>
+                  <a:gd name="connsiteX1" fmla="*/ 2060153 w 2082188"/>
+                  <a:gd name="connsiteY1" fmla="*/ 0 h 3040655"/>
+                  <a:gd name="connsiteX2" fmla="*/ 2082188 w 2082188"/>
+                  <a:gd name="connsiteY2" fmla="*/ 3040655 h 3040655"/>
+                  <a:gd name="connsiteX3" fmla="*/ 1388125 w 2082188"/>
+                  <a:gd name="connsiteY3" fmla="*/ 2379643 h 3040655"/>
+                  <a:gd name="connsiteX4" fmla="*/ 0 w 2082188"/>
+                  <a:gd name="connsiteY4" fmla="*/ 2082187 h 3040655"/>
+                  <a:gd name="connsiteX5" fmla="*/ 0 w 2082188"/>
+                  <a:gd name="connsiteY5" fmla="*/ 1013551 h 3040655"/>
+                  <a:gd name="connsiteX0" fmla="*/ 0 w 2082188"/>
+                  <a:gd name="connsiteY0" fmla="*/ 1013551 h 3040655"/>
+                  <a:gd name="connsiteX1" fmla="*/ 2060153 w 2082188"/>
+                  <a:gd name="connsiteY1" fmla="*/ 0 h 3040655"/>
+                  <a:gd name="connsiteX2" fmla="*/ 2082188 w 2082188"/>
+                  <a:gd name="connsiteY2" fmla="*/ 3040655 h 3040655"/>
+                  <a:gd name="connsiteX3" fmla="*/ 1344057 w 2082188"/>
+                  <a:gd name="connsiteY3" fmla="*/ 2500828 h 3040655"/>
+                  <a:gd name="connsiteX4" fmla="*/ 0 w 2082188"/>
+                  <a:gd name="connsiteY4" fmla="*/ 2082187 h 3040655"/>
+                  <a:gd name="connsiteX5" fmla="*/ 0 w 2082188"/>
+                  <a:gd name="connsiteY5" fmla="*/ 1013551 h 3040655"/>
+                  <a:gd name="connsiteX0" fmla="*/ 0 w 2082188"/>
+                  <a:gd name="connsiteY0" fmla="*/ 1013551 h 3040655"/>
+                  <a:gd name="connsiteX1" fmla="*/ 2060153 w 2082188"/>
+                  <a:gd name="connsiteY1" fmla="*/ 0 h 3040655"/>
+                  <a:gd name="connsiteX2" fmla="*/ 2082188 w 2082188"/>
+                  <a:gd name="connsiteY2" fmla="*/ 3040655 h 3040655"/>
+                  <a:gd name="connsiteX3" fmla="*/ 1288973 w 2082188"/>
+                  <a:gd name="connsiteY3" fmla="*/ 2500828 h 3040655"/>
+                  <a:gd name="connsiteX4" fmla="*/ 0 w 2082188"/>
+                  <a:gd name="connsiteY4" fmla="*/ 2082187 h 3040655"/>
+                  <a:gd name="connsiteX5" fmla="*/ 0 w 2082188"/>
+                  <a:gd name="connsiteY5" fmla="*/ 1013551 h 3040655"/>
+                  <a:gd name="connsiteX0" fmla="*/ 0 w 2082188"/>
+                  <a:gd name="connsiteY0" fmla="*/ 1013551 h 3040655"/>
+                  <a:gd name="connsiteX1" fmla="*/ 2060153 w 2082188"/>
+                  <a:gd name="connsiteY1" fmla="*/ 0 h 3040655"/>
+                  <a:gd name="connsiteX2" fmla="*/ 2082188 w 2082188"/>
+                  <a:gd name="connsiteY2" fmla="*/ 3040655 h 3040655"/>
+                  <a:gd name="connsiteX3" fmla="*/ 1222872 w 2082188"/>
+                  <a:gd name="connsiteY3" fmla="*/ 2566930 h 3040655"/>
+                  <a:gd name="connsiteX4" fmla="*/ 0 w 2082188"/>
+                  <a:gd name="connsiteY4" fmla="*/ 2082187 h 3040655"/>
+                  <a:gd name="connsiteX5" fmla="*/ 0 w 2082188"/>
+                  <a:gd name="connsiteY5" fmla="*/ 1013551 h 3040655"/>
+                  <a:gd name="connsiteX0" fmla="*/ 0 w 2082188"/>
+                  <a:gd name="connsiteY0" fmla="*/ 877779 h 2904883"/>
+                  <a:gd name="connsiteX1" fmla="*/ 2071104 w 2082188"/>
+                  <a:gd name="connsiteY1" fmla="*/ 0 h 2904883"/>
+                  <a:gd name="connsiteX2" fmla="*/ 2082188 w 2082188"/>
+                  <a:gd name="connsiteY2" fmla="*/ 2904883 h 2904883"/>
+                  <a:gd name="connsiteX3" fmla="*/ 1222872 w 2082188"/>
+                  <a:gd name="connsiteY3" fmla="*/ 2431158 h 2904883"/>
+                  <a:gd name="connsiteX4" fmla="*/ 0 w 2082188"/>
+                  <a:gd name="connsiteY4" fmla="*/ 1946415 h 2904883"/>
+                  <a:gd name="connsiteX5" fmla="*/ 0 w 2082188"/>
+                  <a:gd name="connsiteY5" fmla="*/ 877779 h 2904883"/>
+                  <a:gd name="connsiteX0" fmla="*/ 0 w 2082188"/>
+                  <a:gd name="connsiteY0" fmla="*/ 877779 h 2904883"/>
+                  <a:gd name="connsiteX1" fmla="*/ 2071104 w 2082188"/>
+                  <a:gd name="connsiteY1" fmla="*/ 0 h 2904883"/>
+                  <a:gd name="connsiteX2" fmla="*/ 2082188 w 2082188"/>
+                  <a:gd name="connsiteY2" fmla="*/ 2904883 h 2904883"/>
+                  <a:gd name="connsiteX3" fmla="*/ 1233822 w 2082188"/>
+                  <a:gd name="connsiteY3" fmla="*/ 2419844 h 2904883"/>
+                  <a:gd name="connsiteX4" fmla="*/ 0 w 2082188"/>
+                  <a:gd name="connsiteY4" fmla="*/ 1946415 h 2904883"/>
+                  <a:gd name="connsiteX5" fmla="*/ 0 w 2082188"/>
+                  <a:gd name="connsiteY5" fmla="*/ 877779 h 2904883"/>
+                  <a:gd name="connsiteX0" fmla="*/ 0 w 2082188"/>
+                  <a:gd name="connsiteY0" fmla="*/ 877779 h 2904883"/>
+                  <a:gd name="connsiteX1" fmla="*/ 2071104 w 2082188"/>
+                  <a:gd name="connsiteY1" fmla="*/ 0 h 2904883"/>
+                  <a:gd name="connsiteX2" fmla="*/ 2082188 w 2082188"/>
+                  <a:gd name="connsiteY2" fmla="*/ 2904883 h 2904883"/>
+                  <a:gd name="connsiteX3" fmla="*/ 1233822 w 2082188"/>
+                  <a:gd name="connsiteY3" fmla="*/ 2419844 h 2904883"/>
+                  <a:gd name="connsiteX4" fmla="*/ 0 w 2082188"/>
+                  <a:gd name="connsiteY4" fmla="*/ 1946415 h 2904883"/>
+                  <a:gd name="connsiteX5" fmla="*/ 0 w 2082188"/>
+                  <a:gd name="connsiteY5" fmla="*/ 877779 h 2904883"/>
+                  <a:gd name="connsiteX0" fmla="*/ 0 w 2082188"/>
+                  <a:gd name="connsiteY0" fmla="*/ 877779 h 2904883"/>
+                  <a:gd name="connsiteX1" fmla="*/ 2071104 w 2082188"/>
+                  <a:gd name="connsiteY1" fmla="*/ 0 h 2904883"/>
+                  <a:gd name="connsiteX2" fmla="*/ 2082188 w 2082188"/>
+                  <a:gd name="connsiteY2" fmla="*/ 2904883 h 2904883"/>
+                  <a:gd name="connsiteX3" fmla="*/ 1124321 w 2082188"/>
+                  <a:gd name="connsiteY3" fmla="*/ 2318016 h 2904883"/>
+                  <a:gd name="connsiteX4" fmla="*/ 0 w 2082188"/>
+                  <a:gd name="connsiteY4" fmla="*/ 1946415 h 2904883"/>
+                  <a:gd name="connsiteX5" fmla="*/ 0 w 2082188"/>
+                  <a:gd name="connsiteY5" fmla="*/ 877779 h 2904883"/>
+                  <a:gd name="connsiteX0" fmla="*/ 0 w 2082188"/>
+                  <a:gd name="connsiteY0" fmla="*/ 877779 h 2904883"/>
+                  <a:gd name="connsiteX1" fmla="*/ 2071104 w 2082188"/>
+                  <a:gd name="connsiteY1" fmla="*/ 0 h 2904883"/>
+                  <a:gd name="connsiteX2" fmla="*/ 2082188 w 2082188"/>
+                  <a:gd name="connsiteY2" fmla="*/ 2904883 h 2904883"/>
+                  <a:gd name="connsiteX3" fmla="*/ 1146222 w 2082188"/>
+                  <a:gd name="connsiteY3" fmla="*/ 2397216 h 2904883"/>
+                  <a:gd name="connsiteX4" fmla="*/ 0 w 2082188"/>
+                  <a:gd name="connsiteY4" fmla="*/ 1946415 h 2904883"/>
+                  <a:gd name="connsiteX5" fmla="*/ 0 w 2082188"/>
+                  <a:gd name="connsiteY5" fmla="*/ 877779 h 2904883"/>
+                  <a:gd name="connsiteX0" fmla="*/ 0 w 2082188"/>
+                  <a:gd name="connsiteY0" fmla="*/ 877779 h 2904883"/>
+                  <a:gd name="connsiteX1" fmla="*/ 2071104 w 2082188"/>
+                  <a:gd name="connsiteY1" fmla="*/ 0 h 2904883"/>
+                  <a:gd name="connsiteX2" fmla="*/ 2082188 w 2082188"/>
+                  <a:gd name="connsiteY2" fmla="*/ 2904883 h 2904883"/>
+                  <a:gd name="connsiteX3" fmla="*/ 1093192 w 2082188"/>
+                  <a:gd name="connsiteY3" fmla="*/ 2415063 h 2904883"/>
+                  <a:gd name="connsiteX4" fmla="*/ 0 w 2082188"/>
+                  <a:gd name="connsiteY4" fmla="*/ 1946415 h 2904883"/>
+                  <a:gd name="connsiteX5" fmla="*/ 0 w 2082188"/>
+                  <a:gd name="connsiteY5" fmla="*/ 877779 h 2904883"/>
+                  <a:gd name="connsiteX0" fmla="*/ 0 w 2082188"/>
+                  <a:gd name="connsiteY0" fmla="*/ 877779 h 2904883"/>
+                  <a:gd name="connsiteX1" fmla="*/ 2071104 w 2082188"/>
+                  <a:gd name="connsiteY1" fmla="*/ 0 h 2904883"/>
+                  <a:gd name="connsiteX2" fmla="*/ 2082188 w 2082188"/>
+                  <a:gd name="connsiteY2" fmla="*/ 2904883 h 2904883"/>
+                  <a:gd name="connsiteX3" fmla="*/ 1093192 w 2082188"/>
+                  <a:gd name="connsiteY3" fmla="*/ 2415063 h 2904883"/>
+                  <a:gd name="connsiteX4" fmla="*/ 0 w 2082188"/>
+                  <a:gd name="connsiteY4" fmla="*/ 1946415 h 2904883"/>
+                  <a:gd name="connsiteX5" fmla="*/ 0 w 2082188"/>
+                  <a:gd name="connsiteY5" fmla="*/ 877779 h 2904883"/>
+                  <a:gd name="connsiteX0" fmla="*/ 0 w 2082188"/>
+                  <a:gd name="connsiteY0" fmla="*/ 877779 h 2904883"/>
+                  <a:gd name="connsiteX1" fmla="*/ 2071104 w 2082188"/>
+                  <a:gd name="connsiteY1" fmla="*/ 0 h 2904883"/>
+                  <a:gd name="connsiteX2" fmla="*/ 2082188 w 2082188"/>
+                  <a:gd name="connsiteY2" fmla="*/ 2904883 h 2904883"/>
+                  <a:gd name="connsiteX3" fmla="*/ 1119708 w 2082188"/>
+                  <a:gd name="connsiteY3" fmla="*/ 2263371 h 2904883"/>
+                  <a:gd name="connsiteX4" fmla="*/ 0 w 2082188"/>
+                  <a:gd name="connsiteY4" fmla="*/ 1946415 h 2904883"/>
+                  <a:gd name="connsiteX5" fmla="*/ 0 w 2082188"/>
+                  <a:gd name="connsiteY5" fmla="*/ 877779 h 2904883"/>
+                  <a:gd name="connsiteX0" fmla="*/ 0 w 2082188"/>
+                  <a:gd name="connsiteY0" fmla="*/ 877779 h 2904883"/>
+                  <a:gd name="connsiteX1" fmla="*/ 2071104 w 2082188"/>
+                  <a:gd name="connsiteY1" fmla="*/ 0 h 2904883"/>
+                  <a:gd name="connsiteX2" fmla="*/ 2082188 w 2082188"/>
+                  <a:gd name="connsiteY2" fmla="*/ 2904883 h 2904883"/>
+                  <a:gd name="connsiteX3" fmla="*/ 1022486 w 2082188"/>
+                  <a:gd name="connsiteY3" fmla="*/ 2352601 h 2904883"/>
+                  <a:gd name="connsiteX4" fmla="*/ 0 w 2082188"/>
+                  <a:gd name="connsiteY4" fmla="*/ 1946415 h 2904883"/>
+                  <a:gd name="connsiteX5" fmla="*/ 0 w 2082188"/>
+                  <a:gd name="connsiteY5" fmla="*/ 877779 h 2904883"/>
+                  <a:gd name="connsiteX0" fmla="*/ 0 w 2082188"/>
+                  <a:gd name="connsiteY0" fmla="*/ 877779 h 2904883"/>
+                  <a:gd name="connsiteX1" fmla="*/ 2071104 w 2082188"/>
+                  <a:gd name="connsiteY1" fmla="*/ 0 h 2904883"/>
+                  <a:gd name="connsiteX2" fmla="*/ 2082188 w 2082188"/>
+                  <a:gd name="connsiteY2" fmla="*/ 2904883 h 2904883"/>
+                  <a:gd name="connsiteX3" fmla="*/ 1102032 w 2082188"/>
+                  <a:gd name="connsiteY3" fmla="*/ 2299063 h 2904883"/>
+                  <a:gd name="connsiteX4" fmla="*/ 0 w 2082188"/>
+                  <a:gd name="connsiteY4" fmla="*/ 1946415 h 2904883"/>
+                  <a:gd name="connsiteX5" fmla="*/ 0 w 2082188"/>
+                  <a:gd name="connsiteY5" fmla="*/ 877779 h 2904883"/>
+                  <a:gd name="connsiteX0" fmla="*/ 0 w 2082188"/>
+                  <a:gd name="connsiteY0" fmla="*/ 877779 h 2904883"/>
+                  <a:gd name="connsiteX1" fmla="*/ 2071104 w 2082188"/>
+                  <a:gd name="connsiteY1" fmla="*/ 0 h 2904883"/>
+                  <a:gd name="connsiteX2" fmla="*/ 2082188 w 2082188"/>
+                  <a:gd name="connsiteY2" fmla="*/ 2904883 h 2904883"/>
+                  <a:gd name="connsiteX3" fmla="*/ 1102032 w 2082188"/>
+                  <a:gd name="connsiteY3" fmla="*/ 2299063 h 2904883"/>
+                  <a:gd name="connsiteX4" fmla="*/ 0 w 2082188"/>
+                  <a:gd name="connsiteY4" fmla="*/ 1946415 h 2904883"/>
+                  <a:gd name="connsiteX5" fmla="*/ 0 w 2082188"/>
+                  <a:gd name="connsiteY5" fmla="*/ 877779 h 2904883"/>
+                </a:gdLst>
+                <a:ahLst/>
+                <a:cxnLst>
+                  <a:cxn ang="0">
+                    <a:pos x="connsiteX0" y="connsiteY0"/>
+                  </a:cxn>
+                  <a:cxn ang="0">
+                    <a:pos x="connsiteX1" y="connsiteY1"/>
+                  </a:cxn>
+                  <a:cxn ang="0">
+                    <a:pos x="connsiteX2" y="connsiteY2"/>
+                  </a:cxn>
+                  <a:cxn ang="0">
+                    <a:pos x="connsiteX3" y="connsiteY3"/>
+                  </a:cxn>
+                  <a:cxn ang="0">
+                    <a:pos x="connsiteX4" y="connsiteY4"/>
+                  </a:cxn>
+                  <a:cxn ang="0">
+                    <a:pos x="connsiteX5" y="connsiteY5"/>
+                  </a:cxn>
+                </a:cxnLst>
+                <a:rect l="l" t="t" r="r" b="b"/>
+                <a:pathLst>
+                  <a:path w="2082188" h="2904883">
+                    <a:moveTo>
+                      <a:pt x="0" y="877779"/>
+                    </a:moveTo>
+                    <a:cubicBezTo>
+                      <a:pt x="686718" y="539929"/>
+                      <a:pt x="1417437" y="701407"/>
+                      <a:pt x="2071104" y="0"/>
+                    </a:cubicBezTo>
+                    <a:cubicBezTo>
+                      <a:pt x="2074799" y="968294"/>
+                      <a:pt x="2078493" y="1936589"/>
+                      <a:pt x="2082188" y="2904883"/>
+                    </a:cubicBezTo>
+                    <a:cubicBezTo>
+                      <a:pt x="1821455" y="2783697"/>
+                      <a:pt x="1563651" y="2437434"/>
+                      <a:pt x="1102032" y="2299063"/>
+                    </a:cubicBezTo>
+                    <a:cubicBezTo>
+                      <a:pt x="640413" y="2160692"/>
+                      <a:pt x="367344" y="2063964"/>
+                      <a:pt x="0" y="1946415"/>
+                    </a:cubicBezTo>
+                    <a:lnTo>
+                      <a:pt x="0" y="877779"/>
+                    </a:lnTo>
+                    <a:close/>
+                  </a:path>
+                </a:pathLst>
+              </a:custGeom>
+              <a:gradFill flip="none" rotWithShape="1">
+                <a:gsLst>
+                  <a:gs pos="17000">
+                    <a:schemeClr val="bg1">
+                      <a:lumMod val="95000"/>
+                    </a:schemeClr>
+                  </a:gs>
+                  <a:gs pos="48000">
+                    <a:srgbClr val="FFFF00"/>
+                  </a:gs>
+                  <a:gs pos="82000">
+                    <a:schemeClr val="bg1"/>
+                  </a:gs>
+                </a:gsLst>
+                <a:lin ang="5400000" scaled="1"/>
+                <a:tileRect/>
+              </a:gradFill>
+              <a:ln>
+                <a:solidFill>
+                  <a:srgbClr val="FFC000"/>
+                </a:solidFill>
+              </a:ln>
+            </p:spPr>
+            <p:style>
+              <a:lnRef idx="2">
+                <a:schemeClr val="accent1">
+                  <a:shade val="15000"/>
+                </a:schemeClr>
+              </a:lnRef>
+              <a:fillRef idx="1">
+                <a:schemeClr val="accent1"/>
+              </a:fillRef>
+              <a:effectRef idx="0">
+                <a:schemeClr val="accent1"/>
+              </a:effectRef>
+              <a:fontRef idx="minor">
+                <a:schemeClr val="lt1"/>
+              </a:fontRef>
+            </p:style>
+            <p:txBody>
+              <a:bodyPr rtlCol="0" anchor="ctr"/>
+              <a:lstStyle/>
+              <a:p>
+                <a:pPr algn="ctr"/>
+                <a:endParaRPr lang="en-US"/>
+              </a:p>
+            </p:txBody>
+          </p:sp>
           <p:grpSp>
             <p:nvGrpSpPr>
-              <p:cNvPr id="12" name="Group 11">
+              <p:cNvPr id="27" name="Group 26">
                 <a:extLst>
                   <a:ext uri="{FF2B5EF4-FFF2-40B4-BE49-F238E27FC236}">
-                    <a16:creationId xmlns:a16="http://schemas.microsoft.com/office/drawing/2014/main" id="{FC899E5F-C0D6-AD0E-4426-3F8D1E0E6B86}"/>
+                    <a16:creationId xmlns:a16="http://schemas.microsoft.com/office/drawing/2014/main" id="{46C54610-EE07-AC35-5111-05D1A1520490}"/>
                   </a:ext>
                 </a:extLst>
               </p:cNvPr>
@@ -3383,10 +4052,10 @@
             </p:nvGrpSpPr>
             <p:grpSpPr>
               <a:xfrm>
-                <a:off x="1493921" y="1295399"/>
-                <a:ext cx="7726779" cy="1925053"/>
-                <a:chOff x="657726" y="1503947"/>
-                <a:chExt cx="7726779" cy="1925053"/>
+                <a:off x="-369939" y="1369486"/>
+                <a:ext cx="4438434" cy="3569465"/>
+                <a:chOff x="439539" y="699685"/>
+                <a:chExt cx="4438434" cy="3569465"/>
               </a:xfrm>
             </p:grpSpPr>
             <p:sp>
@@ -3394,7 +4063,7 @@
                 <p:cNvPr id="4" name="Oval 3">
                   <a:extLst>
                     <a:ext uri="{FF2B5EF4-FFF2-40B4-BE49-F238E27FC236}">
-                      <a16:creationId xmlns:a16="http://schemas.microsoft.com/office/drawing/2014/main" id="{182ACB0B-001C-71B4-96E8-A278688E6092}"/>
+                      <a16:creationId xmlns:a16="http://schemas.microsoft.com/office/drawing/2014/main" id="{AA72EF6A-652D-D3D3-4758-345C23FE2717}"/>
                     </a:ext>
                   </a:extLst>
                 </p:cNvPr>
@@ -3403,100 +4072,37 @@
               </p:nvSpPr>
               <p:spPr>
                 <a:xfrm>
-                  <a:off x="3994485" y="1503947"/>
-                  <a:ext cx="393031" cy="1925053"/>
+                  <a:off x="1695340" y="1378455"/>
+                  <a:ext cx="3182633" cy="2401677"/>
                 </a:xfrm>
                 <a:prstGeom prst="ellipse">
                   <a:avLst/>
                 </a:prstGeom>
-              </p:spPr>
-              <p:style>
-                <a:lnRef idx="2">
-                  <a:schemeClr val="accent1">
-                    <a:shade val="15000"/>
-                  </a:schemeClr>
-                </a:lnRef>
-                <a:fillRef idx="1">
-                  <a:schemeClr val="accent1"/>
-                </a:fillRef>
-                <a:effectRef idx="0">
-                  <a:schemeClr val="accent1"/>
-                </a:effectRef>
-                <a:fontRef idx="minor">
-                  <a:schemeClr val="lt1"/>
-                </a:fontRef>
-              </p:style>
-              <p:txBody>
-                <a:bodyPr rtlCol="0" anchor="ctr"/>
-                <a:lstStyle/>
-                <a:p>
-                  <a:pPr algn="ctr"/>
-                  <a:endParaRPr lang="en-US"/>
-                </a:p>
-              </p:txBody>
-            </p:sp>
-            <p:cxnSp>
-              <p:nvCxnSpPr>
-                <p:cNvPr id="6" name="Straight Connector 5">
-                  <a:extLst>
-                    <a:ext uri="{FF2B5EF4-FFF2-40B4-BE49-F238E27FC236}">
-                      <a16:creationId xmlns:a16="http://schemas.microsoft.com/office/drawing/2014/main" id="{5794E01B-74E5-4063-C30F-292B943CA248}"/>
-                    </a:ext>
-                  </a:extLst>
-                </p:cNvPr>
-                <p:cNvCxnSpPr>
-                  <a:cxnSpLocks/>
-                  <a:endCxn id="7" idx="6"/>
-                </p:cNvCxnSpPr>
-                <p:nvPr/>
-              </p:nvCxnSpPr>
-              <p:spPr>
-                <a:xfrm flipV="1">
-                  <a:off x="858253" y="2454440"/>
-                  <a:ext cx="7303168" cy="12033"/>
-                </a:xfrm>
-                <a:prstGeom prst="line">
-                  <a:avLst/>
-                </a:prstGeom>
-              </p:spPr>
-              <p:style>
-                <a:lnRef idx="2">
-                  <a:schemeClr val="accent1"/>
-                </a:lnRef>
-                <a:fillRef idx="0">
-                  <a:schemeClr val="accent1"/>
-                </a:fillRef>
-                <a:effectRef idx="1">
-                  <a:schemeClr val="accent1"/>
-                </a:effectRef>
-                <a:fontRef idx="minor">
-                  <a:schemeClr val="tx1"/>
-                </a:fontRef>
-              </p:style>
-            </p:cxnSp>
-            <p:sp>
-              <p:nvSpPr>
-                <p:cNvPr id="7" name="Oval 6">
-                  <a:extLst>
-                    <a:ext uri="{FF2B5EF4-FFF2-40B4-BE49-F238E27FC236}">
-                      <a16:creationId xmlns:a16="http://schemas.microsoft.com/office/drawing/2014/main" id="{0F355DA8-41D5-EA1F-0ACA-FB440E5387C8}"/>
-                    </a:ext>
-                  </a:extLst>
-                </p:cNvPr>
-                <p:cNvSpPr/>
-                <p:nvPr/>
-              </p:nvSpPr>
-              <p:spPr>
-                <a:xfrm>
-                  <a:off x="8025063" y="2350167"/>
-                  <a:ext cx="136358" cy="208545"/>
-                </a:xfrm>
-                <a:prstGeom prst="ellipse">
-                  <a:avLst/>
-                </a:prstGeom>
-                <a:solidFill>
-                  <a:srgbClr val="FF0000"/>
-                </a:solidFill>
+                <a:gradFill>
+                  <a:gsLst>
+                    <a:gs pos="0">
+                      <a:schemeClr val="accent3">
+                        <a:lumMod val="0"/>
+                        <a:lumOff val="100000"/>
+                      </a:schemeClr>
+                    </a:gs>
+                    <a:gs pos="11000">
+                      <a:schemeClr val="accent3">
+                        <a:lumMod val="0"/>
+                        <a:lumOff val="100000"/>
+                      </a:schemeClr>
+                    </a:gs>
+                    <a:gs pos="58000">
+                      <a:srgbClr val="0070C0"/>
+                    </a:gs>
+                  </a:gsLst>
+                  <a:path path="circle">
+                    <a:fillToRect l="50000" t="50000" r="50000" b="50000"/>
+                  </a:path>
+                </a:gradFill>
+                <a:ln>
+                  <a:noFill/>
+                </a:ln>
               </p:spPr>
               <p:style>
                 <a:lnRef idx="2">
@@ -3525,50 +4131,10 @@
             </p:sp>
             <p:sp>
               <p:nvSpPr>
-                <p:cNvPr id="8" name="TextBox 7">
+                <p:cNvPr id="5" name="Arc 4">
                   <a:extLst>
                     <a:ext uri="{FF2B5EF4-FFF2-40B4-BE49-F238E27FC236}">
-                      <a16:creationId xmlns:a16="http://schemas.microsoft.com/office/drawing/2014/main" id="{AEE3EEC9-A483-770F-EC3E-04A1675BCA86}"/>
-                    </a:ext>
-                  </a:extLst>
-                </p:cNvPr>
-                <p:cNvSpPr txBox="1"/>
-                <p:nvPr/>
-              </p:nvSpPr>
-              <p:spPr>
-                <a:xfrm>
-                  <a:off x="8061655" y="2486574"/>
-                  <a:ext cx="322850" cy="369332"/>
-                </a:xfrm>
-                <a:prstGeom prst="rect">
-                  <a:avLst/>
-                </a:prstGeom>
-                <a:noFill/>
-              </p:spPr>
-              <p:txBody>
-                <a:bodyPr wrap="square" rtlCol="0">
-                  <a:spAutoFit/>
-                </a:bodyPr>
-                <a:lstStyle/>
-                <a:p>
-                  <a:r>
-                    <a:rPr lang="en-US" altLang="zh-CN" dirty="0"/>
-                    <a:t>x</a:t>
-                  </a:r>
-                  <a:r>
-                    <a:rPr lang="en-US" altLang="zh-CN" baseline="-25000" dirty="0"/>
-                    <a:t>i</a:t>
-                  </a:r>
-                  <a:endParaRPr lang="en-US" baseline="-25000" dirty="0"/>
-                </a:p>
-              </p:txBody>
-            </p:sp>
-            <p:sp>
-              <p:nvSpPr>
-                <p:cNvPr id="10" name="Oval 9">
-                  <a:extLst>
-                    <a:ext uri="{FF2B5EF4-FFF2-40B4-BE49-F238E27FC236}">
-                      <a16:creationId xmlns:a16="http://schemas.microsoft.com/office/drawing/2014/main" id="{C6C07751-E595-1326-A4ED-F15127B02D19}"/>
+                      <a16:creationId xmlns:a16="http://schemas.microsoft.com/office/drawing/2014/main" id="{D81B2518-6BD3-0362-9202-310BAE53A31A}"/>
                     </a:ext>
                   </a:extLst>
                 </p:cNvPr>
@@ -3576,31 +4142,34 @@
                 <p:nvPr/>
               </p:nvSpPr>
               <p:spPr>
-                <a:xfrm>
-                  <a:off x="790074" y="2362200"/>
-                  <a:ext cx="136358" cy="208545"/>
+                <a:xfrm rot="2847909">
+                  <a:off x="1767655" y="1573060"/>
+                  <a:ext cx="1827633" cy="1899603"/>
                 </a:xfrm>
-                <a:prstGeom prst="ellipse">
-                  <a:avLst/>
+                <a:prstGeom prst="arc">
+                  <a:avLst>
+                    <a:gd name="adj1" fmla="val 16604931"/>
+                    <a:gd name="adj2" fmla="val 20803925"/>
+                  </a:avLst>
                 </a:prstGeom>
-                <a:solidFill>
-                  <a:srgbClr val="FF0000"/>
-                </a:solidFill>
+                <a:ln>
+                  <a:solidFill>
+                    <a:srgbClr val="FF0000"/>
+                  </a:solidFill>
+                </a:ln>
               </p:spPr>
               <p:style>
                 <a:lnRef idx="2">
-                  <a:schemeClr val="accent1">
-                    <a:shade val="15000"/>
-                  </a:schemeClr>
+                  <a:schemeClr val="accent1"/>
                 </a:lnRef>
-                <a:fillRef idx="1">
+                <a:fillRef idx="0">
                   <a:schemeClr val="accent1"/>
                 </a:fillRef>
-                <a:effectRef idx="0">
+                <a:effectRef idx="1">
                   <a:schemeClr val="accent1"/>
                 </a:effectRef>
                 <a:fontRef idx="minor">
-                  <a:schemeClr val="lt1"/>
+                  <a:schemeClr val="tx1"/>
                 </a:fontRef>
               </p:style>
               <p:txBody>
@@ -3614,90 +4183,172 @@
             </p:sp>
             <p:sp>
               <p:nvSpPr>
-                <p:cNvPr id="11" name="TextBox 10">
+                <p:cNvPr id="6" name="Arc 5">
                   <a:extLst>
                     <a:ext uri="{FF2B5EF4-FFF2-40B4-BE49-F238E27FC236}">
-                      <a16:creationId xmlns:a16="http://schemas.microsoft.com/office/drawing/2014/main" id="{34134D0F-808F-F4E0-C3F5-5C9FABB512EF}"/>
+                      <a16:creationId xmlns:a16="http://schemas.microsoft.com/office/drawing/2014/main" id="{C16A42E6-289C-7A7D-69FB-20657694828B}"/>
                     </a:ext>
                   </a:extLst>
                 </p:cNvPr>
-                <p:cNvSpPr txBox="1"/>
+                <p:cNvSpPr/>
                 <p:nvPr/>
               </p:nvSpPr>
               <p:spPr>
-                <a:xfrm>
-                  <a:off x="657726" y="2607207"/>
-                  <a:ext cx="537411" cy="369332"/>
+                <a:xfrm rot="2847909">
+                  <a:off x="384454" y="754770"/>
+                  <a:ext cx="3569465" cy="3459296"/>
                 </a:xfrm>
-                <a:prstGeom prst="rect">
-                  <a:avLst/>
+                <a:prstGeom prst="arc">
+                  <a:avLst>
+                    <a:gd name="adj1" fmla="val 17468915"/>
+                    <a:gd name="adj2" fmla="val 20338135"/>
+                  </a:avLst>
                 </a:prstGeom>
-                <a:noFill/>
+                <a:ln>
+                  <a:solidFill>
+                    <a:srgbClr val="FF0000"/>
+                  </a:solidFill>
+                </a:ln>
               </p:spPr>
+              <p:style>
+                <a:lnRef idx="2">
+                  <a:schemeClr val="accent1"/>
+                </a:lnRef>
+                <a:fillRef idx="0">
+                  <a:schemeClr val="accent1"/>
+                </a:fillRef>
+                <a:effectRef idx="1">
+                  <a:schemeClr val="accent1"/>
+                </a:effectRef>
+                <a:fontRef idx="minor">
+                  <a:schemeClr val="tx1"/>
+                </a:fontRef>
+              </p:style>
               <p:txBody>
-                <a:bodyPr wrap="square" rtlCol="0">
-                  <a:spAutoFit/>
-                </a:bodyPr>
+                <a:bodyPr rtlCol="0" anchor="ctr"/>
                 <a:lstStyle/>
                 <a:p>
-                  <a:r>
-                    <a:rPr lang="en-US" altLang="zh-CN" dirty="0"/>
-                    <a:t>x</a:t>
-                  </a:r>
-                  <a:r>
-                    <a:rPr lang="en-US" altLang="zh-CN" baseline="-25000" dirty="0"/>
-                    <a:t>o</a:t>
-                  </a:r>
-                  <a:endParaRPr lang="en-US" baseline="-25000" dirty="0"/>
+                  <a:pPr algn="ctr"/>
+                  <a:endParaRPr lang="en-US"/>
+                </a:p>
+              </p:txBody>
+            </p:sp>
+            <p:sp>
+              <p:nvSpPr>
+                <p:cNvPr id="7" name="Arc 6">
+                  <a:extLst>
+                    <a:ext uri="{FF2B5EF4-FFF2-40B4-BE49-F238E27FC236}">
+                      <a16:creationId xmlns:a16="http://schemas.microsoft.com/office/drawing/2014/main" id="{5D18CE7B-663A-75C1-1C6C-2A610920E24C}"/>
+                    </a:ext>
+                  </a:extLst>
+                </p:cNvPr>
+                <p:cNvSpPr/>
+                <p:nvPr/>
+              </p:nvSpPr>
+              <p:spPr>
+                <a:xfrm rot="2847909">
+                  <a:off x="784469" y="754770"/>
+                  <a:ext cx="3569465" cy="3459296"/>
+                </a:xfrm>
+                <a:prstGeom prst="arc">
+                  <a:avLst>
+                    <a:gd name="adj1" fmla="val 17036113"/>
+                    <a:gd name="adj2" fmla="val 20742427"/>
+                  </a:avLst>
+                </a:prstGeom>
+                <a:ln>
+                  <a:solidFill>
+                    <a:srgbClr val="FF0000"/>
+                  </a:solidFill>
+                </a:ln>
+              </p:spPr>
+              <p:style>
+                <a:lnRef idx="2">
+                  <a:schemeClr val="accent1"/>
+                </a:lnRef>
+                <a:fillRef idx="0">
+                  <a:schemeClr val="accent1"/>
+                </a:fillRef>
+                <a:effectRef idx="1">
+                  <a:schemeClr val="accent1"/>
+                </a:effectRef>
+                <a:fontRef idx="minor">
+                  <a:schemeClr val="tx1"/>
+                </a:fontRef>
+              </p:style>
+              <p:txBody>
+                <a:bodyPr rtlCol="0" anchor="ctr"/>
+                <a:lstStyle/>
+                <a:p>
+                  <a:pPr algn="ctr"/>
+                  <a:endParaRPr lang="en-US"/>
                 </a:p>
               </p:txBody>
             </p:sp>
           </p:grpSp>
-          <p:cxnSp>
-            <p:nvCxnSpPr>
-              <p:cNvPr id="14" name="Straight Connector 13">
+          <p:sp>
+            <p:nvSpPr>
+              <p:cNvPr id="52" name="Oval 51">
                 <a:extLst>
                   <a:ext uri="{FF2B5EF4-FFF2-40B4-BE49-F238E27FC236}">
-                    <a16:creationId xmlns:a16="http://schemas.microsoft.com/office/drawing/2014/main" id="{F2A791E1-8E6A-7082-FB4D-F7844501F197}"/>
+                    <a16:creationId xmlns:a16="http://schemas.microsoft.com/office/drawing/2014/main" id="{854C3FED-FE0D-4D21-C92D-705773154171}"/>
                   </a:ext>
                 </a:extLst>
               </p:cNvPr>
-              <p:cNvCxnSpPr>
-                <a:cxnSpLocks/>
-                <a:stCxn id="7" idx="0"/>
-              </p:cNvCxnSpPr>
+              <p:cNvSpPr/>
               <p:nvPr/>
-            </p:nvCxnSpPr>
+            </p:nvSpPr>
             <p:spPr>
-              <a:xfrm flipH="1" flipV="1">
-                <a:off x="5149516" y="1425742"/>
-                <a:ext cx="3779921" cy="715877"/>
+              <a:xfrm>
+                <a:off x="6317830" y="1524353"/>
+                <a:ext cx="828675" cy="3694667"/>
               </a:xfrm>
-              <a:prstGeom prst="line">
+              <a:prstGeom prst="ellipse">
                 <a:avLst/>
               </a:prstGeom>
+              <a:solidFill>
+                <a:schemeClr val="accent3">
+                  <a:lumMod val="20000"/>
+                  <a:lumOff val="80000"/>
+                </a:schemeClr>
+              </a:solidFill>
+              <a:ln>
+                <a:solidFill>
+                  <a:schemeClr val="tx1"/>
+                </a:solidFill>
+              </a:ln>
             </p:spPr>
             <p:style>
               <a:lnRef idx="2">
-                <a:schemeClr val="accent2"/>
+                <a:schemeClr val="accent1">
+                  <a:shade val="15000"/>
+                </a:schemeClr>
               </a:lnRef>
-              <a:fillRef idx="0">
-                <a:schemeClr val="accent2"/>
+              <a:fillRef idx="1">
+                <a:schemeClr val="accent1"/>
               </a:fillRef>
-              <a:effectRef idx="1">
-                <a:schemeClr val="accent2"/>
+              <a:effectRef idx="0">
+                <a:schemeClr val="accent1"/>
               </a:effectRef>
               <a:fontRef idx="minor">
-                <a:schemeClr val="tx1"/>
+                <a:schemeClr val="lt1"/>
               </a:fontRef>
             </p:style>
-          </p:cxnSp>
+            <p:txBody>
+              <a:bodyPr rtlCol="0" anchor="ctr"/>
+              <a:lstStyle/>
+              <a:p>
+                <a:pPr algn="ctr"/>
+                <a:endParaRPr lang="en-US"/>
+              </a:p>
+            </p:txBody>
+          </p:sp>
           <p:cxnSp>
             <p:nvCxnSpPr>
-              <p:cNvPr id="16" name="Straight Connector 15">
+              <p:cNvPr id="55" name="Straight Arrow Connector 54">
                 <a:extLst>
                   <a:ext uri="{FF2B5EF4-FFF2-40B4-BE49-F238E27FC236}">
-                    <a16:creationId xmlns:a16="http://schemas.microsoft.com/office/drawing/2014/main" id="{EF3516B4-E727-D25B-830E-5C0878E81008}"/>
+                    <a16:creationId xmlns:a16="http://schemas.microsoft.com/office/drawing/2014/main" id="{096D4AEF-C694-0B6D-6B85-E37C510AC18C}"/>
                   </a:ext>
                 </a:extLst>
               </p:cNvPr>
@@ -3708,22 +4359,105 @@
             </p:nvCxnSpPr>
             <p:spPr>
               <a:xfrm flipH="1">
-                <a:off x="5149515" y="2362197"/>
-                <a:ext cx="3779921" cy="715877"/>
+                <a:off x="7984572" y="3395934"/>
+                <a:ext cx="1436914" cy="0"/>
+              </a:xfrm>
+              <a:prstGeom prst="straightConnector1">
+                <a:avLst/>
+              </a:prstGeom>
+              <a:ln w="44450">
+                <a:tailEnd type="triangle"/>
+              </a:ln>
+            </p:spPr>
+            <p:style>
+              <a:lnRef idx="2">
+                <a:schemeClr val="dk1"/>
+              </a:lnRef>
+              <a:fillRef idx="0">
+                <a:schemeClr val="dk1"/>
+              </a:fillRef>
+              <a:effectRef idx="1">
+                <a:schemeClr val="dk1"/>
+              </a:effectRef>
+              <a:fontRef idx="minor">
+                <a:schemeClr val="tx1"/>
+              </a:fontRef>
+            </p:style>
+          </p:cxnSp>
+          <p:sp>
+            <p:nvSpPr>
+              <p:cNvPr id="57" name="TextBox 56">
+                <a:extLst>
+                  <a:ext uri="{FF2B5EF4-FFF2-40B4-BE49-F238E27FC236}">
+                    <a16:creationId xmlns:a16="http://schemas.microsoft.com/office/drawing/2014/main" id="{78AE3D8C-C755-D1EE-6A61-9E1A96FDD91A}"/>
+                  </a:ext>
+                </a:extLst>
+              </p:cNvPr>
+              <p:cNvSpPr txBox="1"/>
+              <p:nvPr/>
+            </p:nvSpPr>
+            <p:spPr>
+              <a:xfrm>
+                <a:off x="7987963" y="2607619"/>
+                <a:ext cx="1959428" cy="646331"/>
+              </a:xfrm>
+              <a:prstGeom prst="rect">
+                <a:avLst/>
+              </a:prstGeom>
+              <a:noFill/>
+            </p:spPr>
+            <p:txBody>
+              <a:bodyPr wrap="square" rtlCol="0">
+                <a:spAutoFit/>
+              </a:bodyPr>
+              <a:lstStyle/>
+              <a:p>
+                <a:r>
+                  <a:rPr lang="en-US" b="1" dirty="0"/>
+                  <a:t>multi-</a:t>
+                </a:r>
+              </a:p>
+              <a:p>
+                <a:r>
+                  <a:rPr lang="en-US" b="1" dirty="0"/>
+                  <a:t>frequency</a:t>
+                </a:r>
+              </a:p>
+            </p:txBody>
+          </p:sp>
+          <p:cxnSp>
+            <p:nvCxnSpPr>
+              <p:cNvPr id="59" name="Straight Connector 58">
+                <a:extLst>
+                  <a:ext uri="{FF2B5EF4-FFF2-40B4-BE49-F238E27FC236}">
+                    <a16:creationId xmlns:a16="http://schemas.microsoft.com/office/drawing/2014/main" id="{5E9AE575-C6D3-EFE7-3AF3-5DC2FBC2BDC7}"/>
+                  </a:ext>
+                </a:extLst>
+              </p:cNvPr>
+              <p:cNvCxnSpPr>
+                <a:cxnSpLocks/>
+              </p:cNvCxnSpPr>
+              <p:nvPr/>
+            </p:nvCxnSpPr>
+            <p:spPr>
+              <a:xfrm>
+                <a:off x="9223544" y="2777236"/>
+                <a:ext cx="533969" cy="618698"/>
               </a:xfrm>
               <a:prstGeom prst="line">
                 <a:avLst/>
               </a:prstGeom>
+              <a:ln w="63500"/>
             </p:spPr>
             <p:style>
               <a:lnRef idx="2">
-                <a:schemeClr val="accent2"/>
+                <a:schemeClr val="dk1"/>
               </a:lnRef>
               <a:fillRef idx="0">
-                <a:schemeClr val="accent2"/>
+                <a:schemeClr val="dk1"/>
               </a:fillRef>
               <a:effectRef idx="1">
-                <a:schemeClr val="accent2"/>
+                <a:schemeClr val="dk1"/>
               </a:effectRef>
               <a:fontRef idx="minor">
                 <a:schemeClr val="tx1"/>
@@ -3732,37 +4466,37 @@
           </p:cxnSp>
           <p:cxnSp>
             <p:nvCxnSpPr>
-              <p:cNvPr id="17" name="Straight Connector 16">
+              <p:cNvPr id="62" name="Straight Connector 61">
                 <a:extLst>
                   <a:ext uri="{FF2B5EF4-FFF2-40B4-BE49-F238E27FC236}">
-                    <a16:creationId xmlns:a16="http://schemas.microsoft.com/office/drawing/2014/main" id="{36A83D8D-8AE0-6729-C1DD-C8093CCD7252}"/>
+                    <a16:creationId xmlns:a16="http://schemas.microsoft.com/office/drawing/2014/main" id="{C2681630-0F69-BE87-03D1-40F1FEA44822}"/>
                   </a:ext>
                 </a:extLst>
               </p:cNvPr>
               <p:cNvCxnSpPr>
                 <a:cxnSpLocks/>
-                <a:stCxn id="10" idx="0"/>
               </p:cNvCxnSpPr>
               <p:nvPr/>
             </p:nvCxnSpPr>
             <p:spPr>
               <a:xfrm flipV="1">
-                <a:off x="1694448" y="1413709"/>
-                <a:ext cx="3207420" cy="739943"/>
+                <a:off x="9212943" y="3379272"/>
+                <a:ext cx="533969" cy="618698"/>
               </a:xfrm>
               <a:prstGeom prst="line">
                 <a:avLst/>
               </a:prstGeom>
+              <a:ln w="63500"/>
             </p:spPr>
             <p:style>
               <a:lnRef idx="2">
-                <a:schemeClr val="accent2"/>
+                <a:schemeClr val="dk1"/>
               </a:lnRef>
               <a:fillRef idx="0">
-                <a:schemeClr val="accent2"/>
+                <a:schemeClr val="dk1"/>
               </a:fillRef>
               <a:effectRef idx="1">
-                <a:schemeClr val="accent2"/>
+                <a:schemeClr val="dk1"/>
               </a:effectRef>
               <a:fontRef idx="minor">
                 <a:schemeClr val="tx1"/>
@@ -3771,37 +4505,227 @@
           </p:cxnSp>
           <p:cxnSp>
             <p:nvCxnSpPr>
-              <p:cNvPr id="18" name="Straight Connector 17">
+              <p:cNvPr id="64" name="Straight Connector 63">
                 <a:extLst>
                   <a:ext uri="{FF2B5EF4-FFF2-40B4-BE49-F238E27FC236}">
-                    <a16:creationId xmlns:a16="http://schemas.microsoft.com/office/drawing/2014/main" id="{9E45E052-3225-A382-8200-0CE295CC66CD}"/>
+                    <a16:creationId xmlns:a16="http://schemas.microsoft.com/office/drawing/2014/main" id="{A0763917-9C8D-62B8-FA16-451B94CF2B83}"/>
+                  </a:ext>
+                </a:extLst>
+              </p:cNvPr>
+              <p:cNvCxnSpPr/>
+              <p:nvPr/>
+            </p:nvCxnSpPr>
+            <p:spPr>
+              <a:xfrm>
+                <a:off x="9746912" y="3379272"/>
+                <a:ext cx="1501659" cy="0"/>
+              </a:xfrm>
+              <a:prstGeom prst="line">
+                <a:avLst/>
+              </a:prstGeom>
+              <a:ln w="63500">
+                <a:solidFill>
+                  <a:schemeClr val="tx1"/>
+                </a:solidFill>
+              </a:ln>
+            </p:spPr>
+            <p:style>
+              <a:lnRef idx="2">
+                <a:schemeClr val="accent1"/>
+              </a:lnRef>
+              <a:fillRef idx="0">
+                <a:schemeClr val="accent1"/>
+              </a:fillRef>
+              <a:effectRef idx="1">
+                <a:schemeClr val="accent1"/>
+              </a:effectRef>
+              <a:fontRef idx="minor">
+                <a:schemeClr val="tx1"/>
+              </a:fontRef>
+            </p:style>
+          </p:cxnSp>
+          <p:sp>
+            <p:nvSpPr>
+              <p:cNvPr id="65" name="TextBox 64">
+                <a:extLst>
+                  <a:ext uri="{FF2B5EF4-FFF2-40B4-BE49-F238E27FC236}">
+                    <a16:creationId xmlns:a16="http://schemas.microsoft.com/office/drawing/2014/main" id="{FE166B4A-C802-754A-8697-35C5C3C67ED6}"/>
+                  </a:ext>
+                </a:extLst>
+              </p:cNvPr>
+              <p:cNvSpPr txBox="1"/>
+              <p:nvPr/>
+            </p:nvSpPr>
+            <p:spPr>
+              <a:xfrm>
+                <a:off x="1113489" y="2860828"/>
+                <a:ext cx="1959428" cy="369332"/>
+              </a:xfrm>
+              <a:prstGeom prst="rect">
+                <a:avLst/>
+              </a:prstGeom>
+              <a:noFill/>
+            </p:spPr>
+            <p:txBody>
+              <a:bodyPr wrap="square" rtlCol="0">
+                <a:spAutoFit/>
+              </a:bodyPr>
+              <a:lstStyle/>
+              <a:p>
+                <a:r>
+                  <a:rPr lang="en-US" b="1" dirty="0"/>
+                  <a:t>Plasma</a:t>
+                </a:r>
+              </a:p>
+            </p:txBody>
+          </p:sp>
+          <p:sp>
+            <p:nvSpPr>
+              <p:cNvPr id="66" name="TextBox 65">
+                <a:extLst>
+                  <a:ext uri="{FF2B5EF4-FFF2-40B4-BE49-F238E27FC236}">
+                    <a16:creationId xmlns:a16="http://schemas.microsoft.com/office/drawing/2014/main" id="{DFE2D727-F47E-3D21-1505-2756D0000549}"/>
+                  </a:ext>
+                </a:extLst>
+              </p:cNvPr>
+              <p:cNvSpPr txBox="1"/>
+              <p:nvPr/>
+            </p:nvSpPr>
+            <p:spPr>
+              <a:xfrm>
+                <a:off x="2796947" y="4560306"/>
+                <a:ext cx="1959428" cy="369332"/>
+              </a:xfrm>
+              <a:prstGeom prst="rect">
+                <a:avLst/>
+              </a:prstGeom>
+              <a:noFill/>
+            </p:spPr>
+            <p:txBody>
+              <a:bodyPr wrap="square" rtlCol="0">
+                <a:spAutoFit/>
+              </a:bodyPr>
+              <a:lstStyle/>
+              <a:p>
+                <a:r>
+                  <a:rPr lang="en-US" b="1" dirty="0"/>
+                  <a:t>Cut-off layer</a:t>
+                </a:r>
+              </a:p>
+            </p:txBody>
+          </p:sp>
+          <p:cxnSp>
+            <p:nvCxnSpPr>
+              <p:cNvPr id="67" name="Straight Arrow Connector 66">
+                <a:extLst>
+                  <a:ext uri="{FF2B5EF4-FFF2-40B4-BE49-F238E27FC236}">
+                    <a16:creationId xmlns:a16="http://schemas.microsoft.com/office/drawing/2014/main" id="{26C5E951-2DAF-8B96-C457-91FA1DDC9E78}"/>
                   </a:ext>
                 </a:extLst>
               </p:cNvPr>
               <p:cNvCxnSpPr>
                 <a:cxnSpLocks/>
-                <a:stCxn id="10" idx="5"/>
+                <a:endCxn id="6" idx="2"/>
               </p:cNvCxnSpPr>
               <p:nvPr/>
             </p:nvCxnSpPr>
             <p:spPr>
-              <a:xfrm>
-                <a:off x="1742658" y="2331656"/>
-                <a:ext cx="3159209" cy="734385"/>
+              <a:xfrm flipH="1" flipV="1">
+                <a:off x="2951224" y="3945434"/>
+                <a:ext cx="565427" cy="621720"/>
               </a:xfrm>
-              <a:prstGeom prst="line">
+              <a:prstGeom prst="straightConnector1">
                 <a:avLst/>
               </a:prstGeom>
+              <a:ln w="44450">
+                <a:tailEnd type="triangle"/>
+              </a:ln>
             </p:spPr>
             <p:style>
               <a:lnRef idx="2">
-                <a:schemeClr val="accent2"/>
+                <a:schemeClr val="dk1"/>
               </a:lnRef>
               <a:fillRef idx="0">
-                <a:schemeClr val="accent2"/>
+                <a:schemeClr val="dk1"/>
               </a:fillRef>
               <a:effectRef idx="1">
-                <a:schemeClr val="accent2"/>
+                <a:schemeClr val="dk1"/>
+              </a:effectRef>
+              <a:fontRef idx="minor">
+                <a:schemeClr val="tx1"/>
+              </a:fontRef>
+            </p:style>
+          </p:cxnSp>
+          <p:sp>
+            <p:nvSpPr>
+              <p:cNvPr id="69" name="TextBox 68">
+                <a:extLst>
+                  <a:ext uri="{FF2B5EF4-FFF2-40B4-BE49-F238E27FC236}">
+                    <a16:creationId xmlns:a16="http://schemas.microsoft.com/office/drawing/2014/main" id="{BAF9148D-9739-B867-6222-8E8FD531F416}"/>
+                  </a:ext>
+                </a:extLst>
+              </p:cNvPr>
+              <p:cNvSpPr txBox="1"/>
+              <p:nvPr/>
+            </p:nvSpPr>
+            <p:spPr>
+              <a:xfrm>
+                <a:off x="7647508" y="5019132"/>
+                <a:ext cx="1959428" cy="369332"/>
+              </a:xfrm>
+              <a:prstGeom prst="rect">
+                <a:avLst/>
+              </a:prstGeom>
+              <a:noFill/>
+            </p:spPr>
+            <p:txBody>
+              <a:bodyPr wrap="square" rtlCol="0">
+                <a:spAutoFit/>
+              </a:bodyPr>
+              <a:lstStyle/>
+              <a:p>
+                <a:r>
+                  <a:rPr lang="en-US" b="1" dirty="0"/>
+                  <a:t>Optical lens</a:t>
+                </a:r>
+              </a:p>
+            </p:txBody>
+          </p:sp>
+          <p:cxnSp>
+            <p:nvCxnSpPr>
+              <p:cNvPr id="70" name="Straight Arrow Connector 69">
+                <a:extLst>
+                  <a:ext uri="{FF2B5EF4-FFF2-40B4-BE49-F238E27FC236}">
+                    <a16:creationId xmlns:a16="http://schemas.microsoft.com/office/drawing/2014/main" id="{40FE9DD7-D249-0B69-6AD6-8CCA9CA91365}"/>
+                  </a:ext>
+                </a:extLst>
+              </p:cNvPr>
+              <p:cNvCxnSpPr>
+                <a:cxnSpLocks/>
+              </p:cNvCxnSpPr>
+              <p:nvPr/>
+            </p:nvCxnSpPr>
+            <p:spPr>
+              <a:xfrm flipH="1" flipV="1">
+                <a:off x="6964779" y="4712604"/>
+                <a:ext cx="677274" cy="391113"/>
+              </a:xfrm>
+              <a:prstGeom prst="straightConnector1">
+                <a:avLst/>
+              </a:prstGeom>
+              <a:ln w="44450">
+                <a:tailEnd type="triangle"/>
+              </a:ln>
+            </p:spPr>
+            <p:style>
+              <a:lnRef idx="2">
+                <a:schemeClr val="dk1"/>
+              </a:lnRef>
+              <a:fillRef idx="0">
+                <a:schemeClr val="dk1"/>
+              </a:fillRef>
+              <a:effectRef idx="1">
+                <a:schemeClr val="dk1"/>
               </a:effectRef>
               <a:fontRef idx="minor">
                 <a:schemeClr val="tx1"/>
@@ -3809,12 +4733,491 @@
             </p:style>
           </p:cxnSp>
         </p:grpSp>
+        <p:grpSp>
+          <p:nvGrpSpPr>
+            <p:cNvPr id="16" name="Group 15">
+              <a:extLst>
+                <a:ext uri="{FF2B5EF4-FFF2-40B4-BE49-F238E27FC236}">
+                  <a16:creationId xmlns:a16="http://schemas.microsoft.com/office/drawing/2014/main" id="{43502FF7-FA45-1DEA-133E-BE979DF3C007}"/>
+                </a:ext>
+              </a:extLst>
+            </p:cNvPr>
+            <p:cNvGrpSpPr/>
+            <p:nvPr/>
+          </p:nvGrpSpPr>
+          <p:grpSpPr>
+            <a:xfrm>
+              <a:off x="1143084" y="1610061"/>
+              <a:ext cx="4363456" cy="3240200"/>
+              <a:chOff x="1143084" y="1610061"/>
+              <a:chExt cx="4363456" cy="3240200"/>
+            </a:xfrm>
+          </p:grpSpPr>
+          <p:sp>
+            <p:nvSpPr>
+              <p:cNvPr id="11" name="Arc 10">
+                <a:extLst>
+                  <a:ext uri="{FF2B5EF4-FFF2-40B4-BE49-F238E27FC236}">
+                    <a16:creationId xmlns:a16="http://schemas.microsoft.com/office/drawing/2014/main" id="{C1B39886-63CA-C037-F906-3633CDFE2777}"/>
+                  </a:ext>
+                </a:extLst>
+              </p:cNvPr>
+              <p:cNvSpPr/>
+              <p:nvPr/>
+            </p:nvSpPr>
+            <p:spPr>
+              <a:xfrm rot="2847909">
+                <a:off x="1021542" y="1731603"/>
+                <a:ext cx="3240200" cy="2997115"/>
+              </a:xfrm>
+              <a:prstGeom prst="arc">
+                <a:avLst>
+                  <a:gd name="adj1" fmla="val 17036113"/>
+                  <a:gd name="adj2" fmla="val 20932698"/>
+                </a:avLst>
+              </a:prstGeom>
+              <a:ln>
+                <a:solidFill>
+                  <a:srgbClr val="00B0F0"/>
+                </a:solidFill>
+                <a:prstDash val="dash"/>
+              </a:ln>
+            </p:spPr>
+            <p:style>
+              <a:lnRef idx="2">
+                <a:schemeClr val="accent1"/>
+              </a:lnRef>
+              <a:fillRef idx="0">
+                <a:schemeClr val="accent1"/>
+              </a:fillRef>
+              <a:effectRef idx="1">
+                <a:schemeClr val="accent1"/>
+              </a:effectRef>
+              <a:fontRef idx="minor">
+                <a:schemeClr val="tx1"/>
+              </a:fontRef>
+            </p:style>
+            <p:txBody>
+              <a:bodyPr rtlCol="0" anchor="ctr"/>
+              <a:lstStyle/>
+              <a:p>
+                <a:pPr algn="ctr"/>
+                <a:endParaRPr lang="en-US"/>
+              </a:p>
+            </p:txBody>
+          </p:sp>
+          <p:sp>
+            <p:nvSpPr>
+              <p:cNvPr id="13" name="TextBox 12">
+                <a:extLst>
+                  <a:ext uri="{FF2B5EF4-FFF2-40B4-BE49-F238E27FC236}">
+                    <a16:creationId xmlns:a16="http://schemas.microsoft.com/office/drawing/2014/main" id="{7DC7534D-E839-DE44-CD11-4628926C91B9}"/>
+                  </a:ext>
+                </a:extLst>
+              </p:cNvPr>
+              <p:cNvSpPr txBox="1"/>
+              <p:nvPr/>
+            </p:nvSpPr>
+            <p:spPr>
+              <a:xfrm>
+                <a:off x="3547112" y="1753217"/>
+                <a:ext cx="1959428" cy="369332"/>
+              </a:xfrm>
+              <a:prstGeom prst="rect">
+                <a:avLst/>
+              </a:prstGeom>
+              <a:noFill/>
+            </p:spPr>
+            <p:txBody>
+              <a:bodyPr wrap="square" rtlCol="0">
+                <a:spAutoFit/>
+              </a:bodyPr>
+              <a:lstStyle/>
+              <a:p>
+                <a:r>
+                  <a:rPr lang="en-US" altLang="zh-CN" b="1" dirty="0"/>
+                  <a:t>Wavefront </a:t>
+                </a:r>
+                <a:endParaRPr lang="en-US" b="1" dirty="0"/>
+              </a:p>
+            </p:txBody>
+          </p:sp>
+          <p:cxnSp>
+            <p:nvCxnSpPr>
+              <p:cNvPr id="14" name="Straight Arrow Connector 13">
+                <a:extLst>
+                  <a:ext uri="{FF2B5EF4-FFF2-40B4-BE49-F238E27FC236}">
+                    <a16:creationId xmlns:a16="http://schemas.microsoft.com/office/drawing/2014/main" id="{96078416-2AC4-830D-9CC3-5EDFF6971B2B}"/>
+                  </a:ext>
+                </a:extLst>
+              </p:cNvPr>
+              <p:cNvCxnSpPr>
+                <a:cxnSpLocks/>
+              </p:cNvCxnSpPr>
+              <p:nvPr/>
+            </p:nvCxnSpPr>
+            <p:spPr>
+              <a:xfrm flipH="1">
+                <a:off x="4328987" y="2041102"/>
+                <a:ext cx="149212" cy="473850"/>
+              </a:xfrm>
+              <a:prstGeom prst="straightConnector1">
+                <a:avLst/>
+              </a:prstGeom>
+              <a:ln w="44450">
+                <a:tailEnd type="triangle"/>
+              </a:ln>
+            </p:spPr>
+            <p:style>
+              <a:lnRef idx="2">
+                <a:schemeClr val="dk1"/>
+              </a:lnRef>
+              <a:fillRef idx="0">
+                <a:schemeClr val="dk1"/>
+              </a:fillRef>
+              <a:effectRef idx="1">
+                <a:schemeClr val="dk1"/>
+              </a:effectRef>
+              <a:fontRef idx="minor">
+                <a:schemeClr val="tx1"/>
+              </a:fontRef>
+            </p:style>
+          </p:cxnSp>
+        </p:grpSp>
+      </p:grpSp>
+      <p:grpSp>
+        <p:nvGrpSpPr>
+          <p:cNvPr id="19" name="Group 18">
+            <a:extLst>
+              <a:ext uri="{FF2B5EF4-FFF2-40B4-BE49-F238E27FC236}">
+                <a16:creationId xmlns:a16="http://schemas.microsoft.com/office/drawing/2014/main" id="{0153951D-8607-DAEF-5230-AEFA0A703350}"/>
+              </a:ext>
+            </a:extLst>
+          </p:cNvPr>
+          <p:cNvGrpSpPr/>
+          <p:nvPr/>
+        </p:nvGrpSpPr>
+        <p:grpSpPr>
+          <a:xfrm>
+            <a:off x="850551" y="1464361"/>
+            <a:ext cx="3559170" cy="3569465"/>
+            <a:chOff x="850551" y="1464361"/>
+            <a:chExt cx="3559170" cy="3569465"/>
+          </a:xfrm>
+        </p:grpSpPr>
         <p:sp>
           <p:nvSpPr>
-            <p:cNvPr id="23" name="Arrow: Down 22">
+            <p:cNvPr id="2" name="Arc 1">
               <a:extLst>
                 <a:ext uri="{FF2B5EF4-FFF2-40B4-BE49-F238E27FC236}">
-                  <a16:creationId xmlns:a16="http://schemas.microsoft.com/office/drawing/2014/main" id="{689C43F2-33AF-CB5B-21AF-1E85DF21CEC3}"/>
+                  <a16:creationId xmlns:a16="http://schemas.microsoft.com/office/drawing/2014/main" id="{C20587A4-BCFB-EA4D-ACF0-54B21B80E767}"/>
+                </a:ext>
+              </a:extLst>
+            </p:cNvPr>
+            <p:cNvSpPr/>
+            <p:nvPr/>
+          </p:nvSpPr>
+          <p:spPr>
+            <a:xfrm rot="2847909">
+              <a:off x="895340" y="1519446"/>
+              <a:ext cx="3569465" cy="3459296"/>
+            </a:xfrm>
+            <a:prstGeom prst="arc">
+              <a:avLst>
+                <a:gd name="adj1" fmla="val 17036113"/>
+                <a:gd name="adj2" fmla="val 20742427"/>
+              </a:avLst>
+            </a:prstGeom>
+            <a:ln>
+              <a:solidFill>
+                <a:srgbClr val="00B0F0"/>
+              </a:solidFill>
+              <a:prstDash val="dash"/>
+            </a:ln>
+          </p:spPr>
+          <p:style>
+            <a:lnRef idx="2">
+              <a:schemeClr val="accent1"/>
+            </a:lnRef>
+            <a:fillRef idx="0">
+              <a:schemeClr val="accent1"/>
+            </a:fillRef>
+            <a:effectRef idx="1">
+              <a:schemeClr val="accent1"/>
+            </a:effectRef>
+            <a:fontRef idx="minor">
+              <a:schemeClr val="tx1"/>
+            </a:fontRef>
+          </p:style>
+          <p:txBody>
+            <a:bodyPr rtlCol="0" anchor="ctr"/>
+            <a:lstStyle/>
+            <a:p>
+              <a:pPr algn="ctr"/>
+              <a:endParaRPr lang="en-US"/>
+            </a:p>
+          </p:txBody>
+        </p:sp>
+        <p:sp>
+          <p:nvSpPr>
+            <p:cNvPr id="18" name="Arc 17">
+              <a:extLst>
+                <a:ext uri="{FF2B5EF4-FFF2-40B4-BE49-F238E27FC236}">
+                  <a16:creationId xmlns:a16="http://schemas.microsoft.com/office/drawing/2014/main" id="{6668241E-41BF-8831-8A10-B682FADBF677}"/>
+                </a:ext>
+              </a:extLst>
+            </p:cNvPr>
+            <p:cNvSpPr/>
+            <p:nvPr/>
+          </p:nvSpPr>
+          <p:spPr>
+            <a:xfrm rot="2847909">
+              <a:off x="729009" y="1750536"/>
+              <a:ext cx="3240200" cy="2997115"/>
+            </a:xfrm>
+            <a:prstGeom prst="arc">
+              <a:avLst>
+                <a:gd name="adj1" fmla="val 17036113"/>
+                <a:gd name="adj2" fmla="val 20742427"/>
+              </a:avLst>
+            </a:prstGeom>
+            <a:ln>
+              <a:solidFill>
+                <a:srgbClr val="00B0F0"/>
+              </a:solidFill>
+              <a:prstDash val="dash"/>
+            </a:ln>
+          </p:spPr>
+          <p:style>
+            <a:lnRef idx="2">
+              <a:schemeClr val="accent1"/>
+            </a:lnRef>
+            <a:fillRef idx="0">
+              <a:schemeClr val="accent1"/>
+            </a:fillRef>
+            <a:effectRef idx="1">
+              <a:schemeClr val="accent1"/>
+            </a:effectRef>
+            <a:fontRef idx="minor">
+              <a:schemeClr val="tx1"/>
+            </a:fontRef>
+          </p:style>
+          <p:txBody>
+            <a:bodyPr rtlCol="0" anchor="ctr"/>
+            <a:lstStyle/>
+            <a:p>
+              <a:pPr algn="ctr"/>
+              <a:endParaRPr lang="en-US"/>
+            </a:p>
+          </p:txBody>
+        </p:sp>
+      </p:grpSp>
+    </p:spTree>
+    <p:extLst>
+      <p:ext uri="{BB962C8B-B14F-4D97-AF65-F5344CB8AC3E}">
+        <p14:creationId xmlns:p14="http://schemas.microsoft.com/office/powerpoint/2010/main" val="232026979"/>
+      </p:ext>
+    </p:extLst>
+  </p:cSld>
+  <p:clrMapOvr>
+    <a:masterClrMapping/>
+  </p:clrMapOvr>
+</p:sld>
+</file>
+
+<file path=ppt/slides/slide2.xml><?xml version="1.0" encoding="utf-8"?>
+<p:sld xmlns:a="http://schemas.openxmlformats.org/drawingml/2006/main" xmlns:r="http://schemas.openxmlformats.org/officeDocument/2006/relationships" xmlns:p="http://schemas.openxmlformats.org/presentationml/2006/main">
+  <p:cSld>
+    <p:spTree>
+      <p:nvGrpSpPr>
+        <p:cNvPr id="1" name=""/>
+        <p:cNvGrpSpPr/>
+        <p:nvPr/>
+      </p:nvGrpSpPr>
+      <p:grpSpPr>
+        <a:xfrm>
+          <a:off x="0" y="0"/>
+          <a:ext cx="0" cy="0"/>
+          <a:chOff x="0" y="0"/>
+          <a:chExt cx="0" cy="0"/>
+        </a:xfrm>
+      </p:grpSpPr>
+      <p:pic>
+        <p:nvPicPr>
+          <p:cNvPr id="2" name="Picture 1">
+            <a:extLst>
+              <a:ext uri="{FF2B5EF4-FFF2-40B4-BE49-F238E27FC236}">
+                <a16:creationId xmlns:a16="http://schemas.microsoft.com/office/drawing/2014/main" id="{ACAB4B02-E1A8-8AC7-D3D3-9A96F481C721}"/>
+              </a:ext>
+            </a:extLst>
+          </p:cNvPr>
+          <p:cNvPicPr>
+            <a:picLocks noChangeAspect="1"/>
+          </p:cNvPicPr>
+          <p:nvPr/>
+        </p:nvPicPr>
+        <p:blipFill>
+          <a:blip r:embed="rId2"/>
+          <a:stretch>
+            <a:fillRect/>
+          </a:stretch>
+        </p:blipFill>
+        <p:spPr>
+          <a:xfrm>
+            <a:off x="238832" y="1444580"/>
+            <a:ext cx="10394581" cy="3968840"/>
+          </a:xfrm>
+          <a:prstGeom prst="rect">
+            <a:avLst/>
+          </a:prstGeom>
+        </p:spPr>
+      </p:pic>
+    </p:spTree>
+    <p:extLst>
+      <p:ext uri="{BB962C8B-B14F-4D97-AF65-F5344CB8AC3E}">
+        <p14:creationId xmlns:p14="http://schemas.microsoft.com/office/powerpoint/2010/main" val="349484734"/>
+      </p:ext>
+    </p:extLst>
+  </p:cSld>
+  <p:clrMapOvr>
+    <a:masterClrMapping/>
+  </p:clrMapOvr>
+</p:sld>
+</file>
+
+<file path=ppt/slides/slide3.xml><?xml version="1.0" encoding="utf-8"?>
+<p:sld xmlns:a="http://schemas.openxmlformats.org/drawingml/2006/main" xmlns:r="http://schemas.openxmlformats.org/officeDocument/2006/relationships" xmlns:p="http://schemas.openxmlformats.org/presentationml/2006/main">
+  <p:cSld>
+    <p:spTree>
+      <p:nvGrpSpPr>
+        <p:cNvPr id="1" name=""/>
+        <p:cNvGrpSpPr/>
+        <p:nvPr/>
+      </p:nvGrpSpPr>
+      <p:grpSpPr>
+        <a:xfrm>
+          <a:off x="0" y="0"/>
+          <a:ext cx="0" cy="0"/>
+          <a:chOff x="0" y="0"/>
+          <a:chExt cx="0" cy="0"/>
+        </a:xfrm>
+      </p:grpSpPr>
+      <p:pic>
+        <p:nvPicPr>
+          <p:cNvPr id="3" name="Picture 2">
+            <a:extLst>
+              <a:ext uri="{FF2B5EF4-FFF2-40B4-BE49-F238E27FC236}">
+                <a16:creationId xmlns:a16="http://schemas.microsoft.com/office/drawing/2014/main" id="{7C7A3BEB-3265-6A2D-DA2B-4967131EB1BF}"/>
+              </a:ext>
+            </a:extLst>
+          </p:cNvPr>
+          <p:cNvPicPr>
+            <a:picLocks noChangeAspect="1"/>
+          </p:cNvPicPr>
+          <p:nvPr/>
+        </p:nvPicPr>
+        <p:blipFill>
+          <a:blip r:embed="rId2"/>
+          <a:stretch>
+            <a:fillRect/>
+          </a:stretch>
+        </p:blipFill>
+        <p:spPr>
+          <a:xfrm>
+            <a:off x="898709" y="1345675"/>
+            <a:ext cx="10394581" cy="3968840"/>
+          </a:xfrm>
+          <a:prstGeom prst="rect">
+            <a:avLst/>
+          </a:prstGeom>
+        </p:spPr>
+      </p:pic>
+    </p:spTree>
+    <p:extLst>
+      <p:ext uri="{BB962C8B-B14F-4D97-AF65-F5344CB8AC3E}">
+        <p14:creationId xmlns:p14="http://schemas.microsoft.com/office/powerpoint/2010/main" val="433594536"/>
+      </p:ext>
+    </p:extLst>
+  </p:cSld>
+  <p:clrMapOvr>
+    <a:masterClrMapping/>
+  </p:clrMapOvr>
+</p:sld>
+</file>
+
+<file path=ppt/slides/slide4.xml><?xml version="1.0" encoding="utf-8"?>
+<p:sld xmlns:a="http://schemas.openxmlformats.org/drawingml/2006/main" xmlns:r="http://schemas.openxmlformats.org/officeDocument/2006/relationships" xmlns:p="http://schemas.openxmlformats.org/presentationml/2006/main">
+  <p:cSld>
+    <p:spTree>
+      <p:nvGrpSpPr>
+        <p:cNvPr id="1" name=""/>
+        <p:cNvGrpSpPr/>
+        <p:nvPr/>
+      </p:nvGrpSpPr>
+      <p:grpSpPr>
+        <a:xfrm>
+          <a:off x="0" y="0"/>
+          <a:ext cx="0" cy="0"/>
+          <a:chOff x="0" y="0"/>
+          <a:chExt cx="0" cy="0"/>
+        </a:xfrm>
+      </p:grpSpPr>
+      <p:grpSp>
+        <p:nvGrpSpPr>
+          <p:cNvPr id="4" name="Group 3">
+            <a:extLst>
+              <a:ext uri="{FF2B5EF4-FFF2-40B4-BE49-F238E27FC236}">
+                <a16:creationId xmlns:a16="http://schemas.microsoft.com/office/drawing/2014/main" id="{100720FE-DF12-7E53-08F3-44667706E3AD}"/>
+              </a:ext>
+            </a:extLst>
+          </p:cNvPr>
+          <p:cNvGrpSpPr/>
+          <p:nvPr/>
+        </p:nvGrpSpPr>
+        <p:grpSpPr>
+          <a:xfrm>
+            <a:off x="383988" y="3638996"/>
+            <a:ext cx="4316342" cy="3633531"/>
+            <a:chOff x="2976295" y="839236"/>
+            <a:chExt cx="4316342" cy="3633531"/>
+          </a:xfrm>
+        </p:grpSpPr>
+        <p:pic>
+          <p:nvPicPr>
+            <p:cNvPr id="2" name="Picture 1">
+              <a:extLst>
+                <a:ext uri="{FF2B5EF4-FFF2-40B4-BE49-F238E27FC236}">
+                  <a16:creationId xmlns:a16="http://schemas.microsoft.com/office/drawing/2014/main" id="{D8F35B64-7029-59F7-227A-C4BFD6F1A793}"/>
+                </a:ext>
+              </a:extLst>
+            </p:cNvPr>
+            <p:cNvPicPr>
+              <a:picLocks noChangeAspect="1"/>
+            </p:cNvPicPr>
+            <p:nvPr/>
+          </p:nvPicPr>
+          <p:blipFill>
+            <a:blip r:embed="rId2"/>
+            <a:stretch>
+              <a:fillRect/>
+            </a:stretch>
+          </p:blipFill>
+          <p:spPr>
+            <a:xfrm>
+              <a:off x="2976295" y="839236"/>
+              <a:ext cx="4316342" cy="3633531"/>
+            </a:xfrm>
+            <a:prstGeom prst="rect">
+              <a:avLst/>
+            </a:prstGeom>
+          </p:spPr>
+        </p:pic>
+        <p:sp>
+          <p:nvSpPr>
+            <p:cNvPr id="3" name="Rectangle 2">
+              <a:extLst>
+                <a:ext uri="{FF2B5EF4-FFF2-40B4-BE49-F238E27FC236}">
+                  <a16:creationId xmlns:a16="http://schemas.microsoft.com/office/drawing/2014/main" id="{81E6C6A9-0CFE-5475-874E-4B9704A43331}"/>
                 </a:ext>
               </a:extLst>
             </p:cNvPr>
@@ -3823,10 +5226,718 @@
           </p:nvSpPr>
           <p:spPr>
             <a:xfrm>
-              <a:off x="5040228" y="2927684"/>
-              <a:ext cx="214563" cy="296779"/>
+              <a:off x="5769204" y="4147794"/>
+              <a:ext cx="1480008" cy="254524"/>
             </a:xfrm>
-            <a:prstGeom prst="downArrow">
+            <a:prstGeom prst="rect">
+              <a:avLst/>
+            </a:prstGeom>
+            <a:solidFill>
+              <a:schemeClr val="bg1"/>
+            </a:solidFill>
+            <a:ln>
+              <a:noFill/>
+            </a:ln>
+          </p:spPr>
+          <p:style>
+            <a:lnRef idx="2">
+              <a:schemeClr val="accent1">
+                <a:shade val="15000"/>
+              </a:schemeClr>
+            </a:lnRef>
+            <a:fillRef idx="1">
+              <a:schemeClr val="accent1"/>
+            </a:fillRef>
+            <a:effectRef idx="0">
+              <a:schemeClr val="accent1"/>
+            </a:effectRef>
+            <a:fontRef idx="minor">
+              <a:schemeClr val="lt1"/>
+            </a:fontRef>
+          </p:style>
+          <p:txBody>
+            <a:bodyPr rtlCol="0" anchor="ctr"/>
+            <a:lstStyle/>
+            <a:p>
+              <a:pPr algn="ctr"/>
+              <a:endParaRPr lang="en-US"/>
+            </a:p>
+          </p:txBody>
+        </p:sp>
+      </p:grpSp>
+      <p:grpSp>
+        <p:nvGrpSpPr>
+          <p:cNvPr id="34" name="Group 33">
+            <a:extLst>
+              <a:ext uri="{FF2B5EF4-FFF2-40B4-BE49-F238E27FC236}">
+                <a16:creationId xmlns:a16="http://schemas.microsoft.com/office/drawing/2014/main" id="{B16D14DE-87AF-92CD-E750-3FC63E3FBDEB}"/>
+              </a:ext>
+            </a:extLst>
+          </p:cNvPr>
+          <p:cNvGrpSpPr/>
+          <p:nvPr/>
+        </p:nvGrpSpPr>
+        <p:grpSpPr>
+          <a:xfrm>
+            <a:off x="743254" y="412445"/>
+            <a:ext cx="7914152" cy="2368462"/>
+            <a:chOff x="3405268" y="553848"/>
+            <a:chExt cx="7914152" cy="2368462"/>
+          </a:xfrm>
+        </p:grpSpPr>
+        <p:grpSp>
+          <p:nvGrpSpPr>
+            <p:cNvPr id="16" name="Group 15">
+              <a:extLst>
+                <a:ext uri="{FF2B5EF4-FFF2-40B4-BE49-F238E27FC236}">
+                  <a16:creationId xmlns:a16="http://schemas.microsoft.com/office/drawing/2014/main" id="{29E72640-1F32-F696-37ED-64E9D38EC7E8}"/>
+                </a:ext>
+              </a:extLst>
+            </p:cNvPr>
+            <p:cNvGrpSpPr/>
+            <p:nvPr/>
+          </p:nvGrpSpPr>
+          <p:grpSpPr>
+            <a:xfrm>
+              <a:off x="3582184" y="1150190"/>
+              <a:ext cx="4718519" cy="1472948"/>
+              <a:chOff x="5618375" y="3956896"/>
+              <a:chExt cx="4718519" cy="1472948"/>
+            </a:xfrm>
+          </p:grpSpPr>
+          <p:sp>
+            <p:nvSpPr>
+              <p:cNvPr id="8" name="Oval 5">
+                <a:extLst>
+                  <a:ext uri="{FF2B5EF4-FFF2-40B4-BE49-F238E27FC236}">
+                    <a16:creationId xmlns:a16="http://schemas.microsoft.com/office/drawing/2014/main" id="{DD01C8C2-5CE0-66A0-E9E2-6EE19257462D}"/>
+                  </a:ext>
+                </a:extLst>
+              </p:cNvPr>
+              <p:cNvSpPr/>
+              <p:nvPr/>
+            </p:nvSpPr>
+            <p:spPr>
+              <a:xfrm>
+                <a:off x="9933681" y="3978106"/>
+                <a:ext cx="403213" cy="1451738"/>
+              </a:xfrm>
+              <a:custGeom>
+                <a:avLst/>
+                <a:gdLst>
+                  <a:gd name="connsiteX0" fmla="*/ 0 w 393785"/>
+                  <a:gd name="connsiteY0" fmla="*/ 725864 h 1451728"/>
+                  <a:gd name="connsiteX1" fmla="*/ 196893 w 393785"/>
+                  <a:gd name="connsiteY1" fmla="*/ 0 h 1451728"/>
+                  <a:gd name="connsiteX2" fmla="*/ 393786 w 393785"/>
+                  <a:gd name="connsiteY2" fmla="*/ 725864 h 1451728"/>
+                  <a:gd name="connsiteX3" fmla="*/ 196893 w 393785"/>
+                  <a:gd name="connsiteY3" fmla="*/ 1451728 h 1451728"/>
+                  <a:gd name="connsiteX4" fmla="*/ 0 w 393785"/>
+                  <a:gd name="connsiteY4" fmla="*/ 725864 h 1451728"/>
+                  <a:gd name="connsiteX0" fmla="*/ 0 w 233556"/>
+                  <a:gd name="connsiteY0" fmla="*/ 725869 h 1451738"/>
+                  <a:gd name="connsiteX1" fmla="*/ 196893 w 233556"/>
+                  <a:gd name="connsiteY1" fmla="*/ 5 h 1451738"/>
+                  <a:gd name="connsiteX2" fmla="*/ 233531 w 233556"/>
+                  <a:gd name="connsiteY2" fmla="*/ 735295 h 1451738"/>
+                  <a:gd name="connsiteX3" fmla="*/ 196893 w 233556"/>
+                  <a:gd name="connsiteY3" fmla="*/ 1451733 h 1451738"/>
+                  <a:gd name="connsiteX4" fmla="*/ 0 w 233556"/>
+                  <a:gd name="connsiteY4" fmla="*/ 725869 h 1451738"/>
+                  <a:gd name="connsiteX0" fmla="*/ 0 w 403213"/>
+                  <a:gd name="connsiteY0" fmla="*/ 725869 h 1451738"/>
+                  <a:gd name="connsiteX1" fmla="*/ 196893 w 403213"/>
+                  <a:gd name="connsiteY1" fmla="*/ 5 h 1451738"/>
+                  <a:gd name="connsiteX2" fmla="*/ 403213 w 403213"/>
+                  <a:gd name="connsiteY2" fmla="*/ 735295 h 1451738"/>
+                  <a:gd name="connsiteX3" fmla="*/ 196893 w 403213"/>
+                  <a:gd name="connsiteY3" fmla="*/ 1451733 h 1451738"/>
+                  <a:gd name="connsiteX4" fmla="*/ 0 w 403213"/>
+                  <a:gd name="connsiteY4" fmla="*/ 725869 h 1451738"/>
+                </a:gdLst>
+                <a:ahLst/>
+                <a:cxnLst>
+                  <a:cxn ang="0">
+                    <a:pos x="connsiteX0" y="connsiteY0"/>
+                  </a:cxn>
+                  <a:cxn ang="0">
+                    <a:pos x="connsiteX1" y="connsiteY1"/>
+                  </a:cxn>
+                  <a:cxn ang="0">
+                    <a:pos x="connsiteX2" y="connsiteY2"/>
+                  </a:cxn>
+                  <a:cxn ang="0">
+                    <a:pos x="connsiteX3" y="connsiteY3"/>
+                  </a:cxn>
+                  <a:cxn ang="0">
+                    <a:pos x="connsiteX4" y="connsiteY4"/>
+                  </a:cxn>
+                </a:cxnLst>
+                <a:rect l="l" t="t" r="r" b="b"/>
+                <a:pathLst>
+                  <a:path w="403213" h="1451738">
+                    <a:moveTo>
+                      <a:pt x="0" y="725869"/>
+                    </a:moveTo>
+                    <a:cubicBezTo>
+                      <a:pt x="0" y="324985"/>
+                      <a:pt x="129691" y="-1566"/>
+                      <a:pt x="196893" y="5"/>
+                    </a:cubicBezTo>
+                    <a:cubicBezTo>
+                      <a:pt x="264095" y="1576"/>
+                      <a:pt x="403213" y="334411"/>
+                      <a:pt x="403213" y="735295"/>
+                    </a:cubicBezTo>
+                    <a:cubicBezTo>
+                      <a:pt x="403213" y="1136179"/>
+                      <a:pt x="264095" y="1453304"/>
+                      <a:pt x="196893" y="1451733"/>
+                    </a:cubicBezTo>
+                    <a:cubicBezTo>
+                      <a:pt x="129691" y="1450162"/>
+                      <a:pt x="0" y="1126753"/>
+                      <a:pt x="0" y="725869"/>
+                    </a:cubicBezTo>
+                    <a:close/>
+                  </a:path>
+                </a:pathLst>
+              </a:custGeom>
+            </p:spPr>
+            <p:style>
+              <a:lnRef idx="2">
+                <a:schemeClr val="accent1">
+                  <a:shade val="15000"/>
+                </a:schemeClr>
+              </a:lnRef>
+              <a:fillRef idx="1">
+                <a:schemeClr val="accent1"/>
+              </a:fillRef>
+              <a:effectRef idx="0">
+                <a:schemeClr val="accent1"/>
+              </a:effectRef>
+              <a:fontRef idx="minor">
+                <a:schemeClr val="lt1"/>
+              </a:fontRef>
+            </p:style>
+            <p:txBody>
+              <a:bodyPr rtlCol="0" anchor="ctr"/>
+              <a:lstStyle/>
+              <a:p>
+                <a:pPr algn="ctr"/>
+                <a:endParaRPr lang="en-US"/>
+              </a:p>
+            </p:txBody>
+          </p:sp>
+          <p:sp>
+            <p:nvSpPr>
+              <p:cNvPr id="13" name="Freeform: Shape 12">
+                <a:extLst>
+                  <a:ext uri="{FF2B5EF4-FFF2-40B4-BE49-F238E27FC236}">
+                    <a16:creationId xmlns:a16="http://schemas.microsoft.com/office/drawing/2014/main" id="{B203A7B2-A6DF-4E57-394E-4A11D603840A}"/>
+                  </a:ext>
+                </a:extLst>
+              </p:cNvPr>
+              <p:cNvSpPr/>
+              <p:nvPr/>
+            </p:nvSpPr>
+            <p:spPr>
+              <a:xfrm>
+                <a:off x="7945345" y="3967501"/>
+                <a:ext cx="311084" cy="1451738"/>
+              </a:xfrm>
+              <a:custGeom>
+                <a:avLst/>
+                <a:gdLst>
+                  <a:gd name="connsiteX0" fmla="*/ 0 w 311084"/>
+                  <a:gd name="connsiteY0" fmla="*/ 0 h 1451738"/>
+                  <a:gd name="connsiteX1" fmla="*/ 311084 w 311084"/>
+                  <a:gd name="connsiteY1" fmla="*/ 0 h 1451738"/>
+                  <a:gd name="connsiteX2" fmla="*/ 311084 w 311084"/>
+                  <a:gd name="connsiteY2" fmla="*/ 1451738 h 1451738"/>
+                  <a:gd name="connsiteX3" fmla="*/ 0 w 311084"/>
+                  <a:gd name="connsiteY3" fmla="*/ 1451738 h 1451738"/>
+                  <a:gd name="connsiteX4" fmla="*/ 0 w 311084"/>
+                  <a:gd name="connsiteY4" fmla="*/ 1446889 h 1451738"/>
+                  <a:gd name="connsiteX5" fmla="*/ 18340 w 311084"/>
+                  <a:gd name="connsiteY5" fmla="*/ 1437842 h 1451738"/>
+                  <a:gd name="connsiteX6" fmla="*/ 196500 w 311084"/>
+                  <a:gd name="connsiteY6" fmla="*/ 735295 h 1451738"/>
+                  <a:gd name="connsiteX7" fmla="*/ 18340 w 311084"/>
+                  <a:gd name="connsiteY7" fmla="*/ 15608 h 1451738"/>
+                  <a:gd name="connsiteX8" fmla="*/ 0 w 311084"/>
+                  <a:gd name="connsiteY8" fmla="*/ 5446 h 1451738"/>
+                </a:gdLst>
+                <a:ahLst/>
+                <a:cxnLst>
+                  <a:cxn ang="0">
+                    <a:pos x="connsiteX0" y="connsiteY0"/>
+                  </a:cxn>
+                  <a:cxn ang="0">
+                    <a:pos x="connsiteX1" y="connsiteY1"/>
+                  </a:cxn>
+                  <a:cxn ang="0">
+                    <a:pos x="connsiteX2" y="connsiteY2"/>
+                  </a:cxn>
+                  <a:cxn ang="0">
+                    <a:pos x="connsiteX3" y="connsiteY3"/>
+                  </a:cxn>
+                  <a:cxn ang="0">
+                    <a:pos x="connsiteX4" y="connsiteY4"/>
+                  </a:cxn>
+                  <a:cxn ang="0">
+                    <a:pos x="connsiteX5" y="connsiteY5"/>
+                  </a:cxn>
+                  <a:cxn ang="0">
+                    <a:pos x="connsiteX6" y="connsiteY6"/>
+                  </a:cxn>
+                  <a:cxn ang="0">
+                    <a:pos x="connsiteX7" y="connsiteY7"/>
+                  </a:cxn>
+                  <a:cxn ang="0">
+                    <a:pos x="connsiteX8" y="connsiteY8"/>
+                  </a:cxn>
+                </a:cxnLst>
+                <a:rect l="l" t="t" r="r" b="b"/>
+                <a:pathLst>
+                  <a:path w="311084" h="1451738">
+                    <a:moveTo>
+                      <a:pt x="0" y="0"/>
+                    </a:moveTo>
+                    <a:lnTo>
+                      <a:pt x="311084" y="0"/>
+                    </a:lnTo>
+                    <a:lnTo>
+                      <a:pt x="311084" y="1451738"/>
+                    </a:lnTo>
+                    <a:lnTo>
+                      <a:pt x="0" y="1451738"/>
+                    </a:lnTo>
+                    <a:lnTo>
+                      <a:pt x="0" y="1446889"/>
+                    </a:lnTo>
+                    <a:lnTo>
+                      <a:pt x="18340" y="1437842"/>
+                    </a:lnTo>
+                    <a:cubicBezTo>
+                      <a:pt x="89988" y="1372714"/>
+                      <a:pt x="196500" y="1086069"/>
+                      <a:pt x="196500" y="735295"/>
+                    </a:cubicBezTo>
+                    <a:cubicBezTo>
+                      <a:pt x="196500" y="384522"/>
+                      <a:pt x="89988" y="85848"/>
+                      <a:pt x="18340" y="15608"/>
+                    </a:cubicBezTo>
+                    <a:lnTo>
+                      <a:pt x="0" y="5446"/>
+                    </a:lnTo>
+                    <a:close/>
+                  </a:path>
+                </a:pathLst>
+              </a:custGeom>
+            </p:spPr>
+            <p:style>
+              <a:lnRef idx="2">
+                <a:schemeClr val="accent1">
+                  <a:shade val="15000"/>
+                </a:schemeClr>
+              </a:lnRef>
+              <a:fillRef idx="1">
+                <a:schemeClr val="accent1"/>
+              </a:fillRef>
+              <a:effectRef idx="0">
+                <a:schemeClr val="accent1"/>
+              </a:effectRef>
+              <a:fontRef idx="minor">
+                <a:schemeClr val="lt1"/>
+              </a:fontRef>
+            </p:style>
+            <p:txBody>
+              <a:bodyPr wrap="square" rtlCol="0" anchor="ctr">
+                <a:noAutofit/>
+              </a:bodyPr>
+              <a:lstStyle/>
+              <a:p>
+                <a:pPr algn="ctr"/>
+                <a:endParaRPr lang="en-US" dirty="0"/>
+              </a:p>
+            </p:txBody>
+          </p:sp>
+          <p:sp>
+            <p:nvSpPr>
+              <p:cNvPr id="14" name="Oval 6">
+                <a:extLst>
+                  <a:ext uri="{FF2B5EF4-FFF2-40B4-BE49-F238E27FC236}">
+                    <a16:creationId xmlns:a16="http://schemas.microsoft.com/office/drawing/2014/main" id="{2D10A83D-0E92-016A-06BD-6700CB9B51A7}"/>
+                  </a:ext>
+                </a:extLst>
+              </p:cNvPr>
+              <p:cNvSpPr/>
+              <p:nvPr/>
+            </p:nvSpPr>
+            <p:spPr>
+              <a:xfrm>
+                <a:off x="6419587" y="3956896"/>
+                <a:ext cx="316934" cy="1451738"/>
+              </a:xfrm>
+              <a:custGeom>
+                <a:avLst/>
+                <a:gdLst>
+                  <a:gd name="connsiteX0" fmla="*/ 0 w 393785"/>
+                  <a:gd name="connsiteY0" fmla="*/ 725864 h 1451728"/>
+                  <a:gd name="connsiteX1" fmla="*/ 196893 w 393785"/>
+                  <a:gd name="connsiteY1" fmla="*/ 0 h 1451728"/>
+                  <a:gd name="connsiteX2" fmla="*/ 393786 w 393785"/>
+                  <a:gd name="connsiteY2" fmla="*/ 725864 h 1451728"/>
+                  <a:gd name="connsiteX3" fmla="*/ 196893 w 393785"/>
+                  <a:gd name="connsiteY3" fmla="*/ 1451728 h 1451728"/>
+                  <a:gd name="connsiteX4" fmla="*/ 0 w 393785"/>
+                  <a:gd name="connsiteY4" fmla="*/ 725864 h 1451728"/>
+                  <a:gd name="connsiteX0" fmla="*/ 9363 w 214613"/>
+                  <a:gd name="connsiteY0" fmla="*/ 735296 h 1451738"/>
+                  <a:gd name="connsiteX1" fmla="*/ 17720 w 214613"/>
+                  <a:gd name="connsiteY1" fmla="*/ 5 h 1451738"/>
+                  <a:gd name="connsiteX2" fmla="*/ 214613 w 214613"/>
+                  <a:gd name="connsiteY2" fmla="*/ 725869 h 1451738"/>
+                  <a:gd name="connsiteX3" fmla="*/ 17720 w 214613"/>
+                  <a:gd name="connsiteY3" fmla="*/ 1451733 h 1451738"/>
+                  <a:gd name="connsiteX4" fmla="*/ 9363 w 214613"/>
+                  <a:gd name="connsiteY4" fmla="*/ 735296 h 1451738"/>
+                </a:gdLst>
+                <a:ahLst/>
+                <a:cxnLst>
+                  <a:cxn ang="0">
+                    <a:pos x="connsiteX0" y="connsiteY0"/>
+                  </a:cxn>
+                  <a:cxn ang="0">
+                    <a:pos x="connsiteX1" y="connsiteY1"/>
+                  </a:cxn>
+                  <a:cxn ang="0">
+                    <a:pos x="connsiteX2" y="connsiteY2"/>
+                  </a:cxn>
+                  <a:cxn ang="0">
+                    <a:pos x="connsiteX3" y="connsiteY3"/>
+                  </a:cxn>
+                  <a:cxn ang="0">
+                    <a:pos x="connsiteX4" y="connsiteY4"/>
+                  </a:cxn>
+                </a:cxnLst>
+                <a:rect l="l" t="t" r="r" b="b"/>
+                <a:pathLst>
+                  <a:path w="214613" h="1451738">
+                    <a:moveTo>
+                      <a:pt x="9363" y="735296"/>
+                    </a:moveTo>
+                    <a:cubicBezTo>
+                      <a:pt x="9363" y="334412"/>
+                      <a:pt x="-16488" y="1576"/>
+                      <a:pt x="17720" y="5"/>
+                    </a:cubicBezTo>
+                    <a:cubicBezTo>
+                      <a:pt x="51928" y="-1566"/>
+                      <a:pt x="214613" y="324985"/>
+                      <a:pt x="214613" y="725869"/>
+                    </a:cubicBezTo>
+                    <a:cubicBezTo>
+                      <a:pt x="214613" y="1126753"/>
+                      <a:pt x="51928" y="1450162"/>
+                      <a:pt x="17720" y="1451733"/>
+                    </a:cubicBezTo>
+                    <a:cubicBezTo>
+                      <a:pt x="-16488" y="1453304"/>
+                      <a:pt x="9363" y="1136180"/>
+                      <a:pt x="9363" y="735296"/>
+                    </a:cubicBezTo>
+                    <a:close/>
+                  </a:path>
+                </a:pathLst>
+              </a:custGeom>
+            </p:spPr>
+            <p:style>
+              <a:lnRef idx="2">
+                <a:schemeClr val="accent1">
+                  <a:shade val="15000"/>
+                </a:schemeClr>
+              </a:lnRef>
+              <a:fillRef idx="1">
+                <a:schemeClr val="accent1"/>
+              </a:fillRef>
+              <a:effectRef idx="0">
+                <a:schemeClr val="accent1"/>
+              </a:effectRef>
+              <a:fontRef idx="minor">
+                <a:schemeClr val="lt1"/>
+              </a:fontRef>
+            </p:style>
+            <p:txBody>
+              <a:bodyPr rtlCol="0" anchor="ctr"/>
+              <a:lstStyle/>
+              <a:p>
+                <a:pPr algn="ctr"/>
+                <a:endParaRPr lang="en-US"/>
+              </a:p>
+            </p:txBody>
+          </p:sp>
+          <p:sp>
+            <p:nvSpPr>
+              <p:cNvPr id="15" name="Rectangle 14">
+                <a:extLst>
+                  <a:ext uri="{FF2B5EF4-FFF2-40B4-BE49-F238E27FC236}">
+                    <a16:creationId xmlns:a16="http://schemas.microsoft.com/office/drawing/2014/main" id="{F648BDA8-7A4F-F44B-6331-013DA6AAA830}"/>
+                  </a:ext>
+                </a:extLst>
+              </p:cNvPr>
+              <p:cNvSpPr/>
+              <p:nvPr/>
+            </p:nvSpPr>
+            <p:spPr>
+              <a:xfrm>
+                <a:off x="5618375" y="3978106"/>
+                <a:ext cx="56561" cy="1451738"/>
+              </a:xfrm>
+              <a:prstGeom prst="rect">
+                <a:avLst/>
+              </a:prstGeom>
+              <a:solidFill>
+                <a:schemeClr val="tx1"/>
+              </a:solidFill>
+            </p:spPr>
+            <p:style>
+              <a:lnRef idx="2">
+                <a:schemeClr val="accent1">
+                  <a:shade val="15000"/>
+                </a:schemeClr>
+              </a:lnRef>
+              <a:fillRef idx="1">
+                <a:schemeClr val="accent1"/>
+              </a:fillRef>
+              <a:effectRef idx="0">
+                <a:schemeClr val="accent1"/>
+              </a:effectRef>
+              <a:fontRef idx="minor">
+                <a:schemeClr val="lt1"/>
+              </a:fontRef>
+            </p:style>
+            <p:txBody>
+              <a:bodyPr rtlCol="0" anchor="ctr"/>
+              <a:lstStyle/>
+              <a:p>
+                <a:pPr algn="ctr"/>
+                <a:endParaRPr lang="en-US"/>
+              </a:p>
+            </p:txBody>
+          </p:sp>
+        </p:grpSp>
+        <p:sp>
+          <p:nvSpPr>
+            <p:cNvPr id="19" name="Rectangle 18">
+              <a:extLst>
+                <a:ext uri="{FF2B5EF4-FFF2-40B4-BE49-F238E27FC236}">
+                  <a16:creationId xmlns:a16="http://schemas.microsoft.com/office/drawing/2014/main" id="{3224EAA3-00A0-216C-99D0-C79BB0ACAE8C}"/>
+                </a:ext>
+              </a:extLst>
+            </p:cNvPr>
+            <p:cNvSpPr/>
+            <p:nvPr/>
+          </p:nvSpPr>
+          <p:spPr>
+            <a:xfrm>
+              <a:off x="3405268" y="980638"/>
+              <a:ext cx="1442301" cy="1790842"/>
+            </a:xfrm>
+            <a:prstGeom prst="rect">
+              <a:avLst/>
+            </a:prstGeom>
+            <a:noFill/>
+          </p:spPr>
+          <p:style>
+            <a:lnRef idx="2">
+              <a:schemeClr val="accent1">
+                <a:shade val="15000"/>
+              </a:schemeClr>
+            </a:lnRef>
+            <a:fillRef idx="1">
+              <a:schemeClr val="accent1"/>
+            </a:fillRef>
+            <a:effectRef idx="0">
+              <a:schemeClr val="accent1"/>
+            </a:effectRef>
+            <a:fontRef idx="minor">
+              <a:schemeClr val="lt1"/>
+            </a:fontRef>
+          </p:style>
+          <p:txBody>
+            <a:bodyPr rtlCol="0" anchor="ctr"/>
+            <a:lstStyle/>
+            <a:p>
+              <a:pPr algn="ctr"/>
+              <a:endParaRPr lang="en-US"/>
+            </a:p>
+          </p:txBody>
+        </p:sp>
+        <p:sp>
+          <p:nvSpPr>
+            <p:cNvPr id="20" name="Rectangle 19">
+              <a:extLst>
+                <a:ext uri="{FF2B5EF4-FFF2-40B4-BE49-F238E27FC236}">
+                  <a16:creationId xmlns:a16="http://schemas.microsoft.com/office/drawing/2014/main" id="{E2AB76C6-5609-0DDB-B514-802B7D5F6857}"/>
+                </a:ext>
+              </a:extLst>
+            </p:cNvPr>
+            <p:cNvSpPr/>
+            <p:nvPr/>
+          </p:nvSpPr>
+          <p:spPr>
+            <a:xfrm>
+              <a:off x="5229680" y="980638"/>
+              <a:ext cx="1442301" cy="1790842"/>
+            </a:xfrm>
+            <a:prstGeom prst="rect">
+              <a:avLst/>
+            </a:prstGeom>
+            <a:noFill/>
+          </p:spPr>
+          <p:style>
+            <a:lnRef idx="2">
+              <a:schemeClr val="accent1">
+                <a:shade val="15000"/>
+              </a:schemeClr>
+            </a:lnRef>
+            <a:fillRef idx="1">
+              <a:schemeClr val="accent1"/>
+            </a:fillRef>
+            <a:effectRef idx="0">
+              <a:schemeClr val="accent1"/>
+            </a:effectRef>
+            <a:fontRef idx="minor">
+              <a:schemeClr val="lt1"/>
+            </a:fontRef>
+          </p:style>
+          <p:txBody>
+            <a:bodyPr rtlCol="0" anchor="ctr"/>
+            <a:lstStyle/>
+            <a:p>
+              <a:pPr algn="ctr"/>
+              <a:endParaRPr lang="en-US"/>
+            </a:p>
+          </p:txBody>
+        </p:sp>
+        <p:sp>
+          <p:nvSpPr>
+            <p:cNvPr id="21" name="Rectangle 20">
+              <a:extLst>
+                <a:ext uri="{FF2B5EF4-FFF2-40B4-BE49-F238E27FC236}">
+                  <a16:creationId xmlns:a16="http://schemas.microsoft.com/office/drawing/2014/main" id="{7C584C00-FBDD-59D9-82C2-A2B17AF1CC74}"/>
+                </a:ext>
+              </a:extLst>
+            </p:cNvPr>
+            <p:cNvSpPr/>
+            <p:nvPr/>
+          </p:nvSpPr>
+          <p:spPr>
+            <a:xfrm>
+              <a:off x="6996079" y="980638"/>
+              <a:ext cx="1442301" cy="1790842"/>
+            </a:xfrm>
+            <a:prstGeom prst="rect">
+              <a:avLst/>
+            </a:prstGeom>
+            <a:noFill/>
+          </p:spPr>
+          <p:style>
+            <a:lnRef idx="2">
+              <a:schemeClr val="accent1">
+                <a:shade val="15000"/>
+              </a:schemeClr>
+            </a:lnRef>
+            <a:fillRef idx="1">
+              <a:schemeClr val="accent1"/>
+            </a:fillRef>
+            <a:effectRef idx="0">
+              <a:schemeClr val="accent1"/>
+            </a:effectRef>
+            <a:fontRef idx="minor">
+              <a:schemeClr val="lt1"/>
+            </a:fontRef>
+          </p:style>
+          <p:txBody>
+            <a:bodyPr rtlCol="0" anchor="ctr"/>
+            <a:lstStyle/>
+            <a:p>
+              <a:pPr algn="ctr"/>
+              <a:endParaRPr lang="en-US"/>
+            </a:p>
+          </p:txBody>
+        </p:sp>
+        <p:sp>
+          <p:nvSpPr>
+            <p:cNvPr id="27" name="Oval 26">
+              <a:extLst>
+                <a:ext uri="{FF2B5EF4-FFF2-40B4-BE49-F238E27FC236}">
+                  <a16:creationId xmlns:a16="http://schemas.microsoft.com/office/drawing/2014/main" id="{DADA2612-6B34-1A78-7A71-3DAF3F1BC2AA}"/>
+                </a:ext>
+              </a:extLst>
+            </p:cNvPr>
+            <p:cNvSpPr/>
+            <p:nvPr/>
+          </p:nvSpPr>
+          <p:spPr>
+            <a:xfrm>
+              <a:off x="9339791" y="603567"/>
+              <a:ext cx="1979629" cy="2318743"/>
+            </a:xfrm>
+            <a:prstGeom prst="ellipse">
+              <a:avLst/>
+            </a:prstGeom>
+            <a:solidFill>
+              <a:srgbClr val="FFC000"/>
+            </a:solidFill>
+          </p:spPr>
+          <p:style>
+            <a:lnRef idx="2">
+              <a:schemeClr val="accent1">
+                <a:shade val="15000"/>
+              </a:schemeClr>
+            </a:lnRef>
+            <a:fillRef idx="1">
+              <a:schemeClr val="accent1"/>
+            </a:fillRef>
+            <a:effectRef idx="0">
+              <a:schemeClr val="accent1"/>
+            </a:effectRef>
+            <a:fontRef idx="minor">
+              <a:schemeClr val="lt1"/>
+            </a:fontRef>
+          </p:style>
+          <p:txBody>
+            <a:bodyPr rtlCol="0" anchor="ctr"/>
+            <a:lstStyle/>
+            <a:p>
+              <a:pPr algn="ctr"/>
+              <a:endParaRPr lang="en-US"/>
+            </a:p>
+          </p:txBody>
+        </p:sp>
+        <p:sp>
+          <p:nvSpPr>
+            <p:cNvPr id="28" name="Rectangle 27">
+              <a:extLst>
+                <a:ext uri="{FF2B5EF4-FFF2-40B4-BE49-F238E27FC236}">
+                  <a16:creationId xmlns:a16="http://schemas.microsoft.com/office/drawing/2014/main" id="{92B06794-6506-4195-7991-D93140ED1D12}"/>
+                </a:ext>
+              </a:extLst>
+            </p:cNvPr>
+            <p:cNvSpPr/>
+            <p:nvPr/>
+          </p:nvSpPr>
+          <p:spPr>
+            <a:xfrm>
+              <a:off x="8521831" y="1055802"/>
+              <a:ext cx="113122" cy="1640264"/>
+            </a:xfrm>
+            <a:prstGeom prst="rect">
               <a:avLst/>
             </a:prstGeom>
           </p:spPr>
@@ -3855,524 +5966,12 @@
             </a:p>
           </p:txBody>
         </p:sp>
-        <p:grpSp>
-          <p:nvGrpSpPr>
-            <p:cNvPr id="24" name="Group 23">
+        <p:sp>
+          <p:nvSpPr>
+            <p:cNvPr id="29" name="TextBox 28">
               <a:extLst>
                 <a:ext uri="{FF2B5EF4-FFF2-40B4-BE49-F238E27FC236}">
-                  <a16:creationId xmlns:a16="http://schemas.microsoft.com/office/drawing/2014/main" id="{825794F7-6B44-8C15-499D-7D0E8D2C1DB5}"/>
-                </a:ext>
-              </a:extLst>
-            </p:cNvPr>
-            <p:cNvGrpSpPr/>
-            <p:nvPr/>
-          </p:nvGrpSpPr>
-          <p:grpSpPr>
-            <a:xfrm>
-              <a:off x="1746584" y="3685674"/>
-              <a:ext cx="7853607" cy="1925053"/>
-              <a:chOff x="1626269" y="1295399"/>
-              <a:chExt cx="7853607" cy="1925053"/>
-            </a:xfrm>
-          </p:grpSpPr>
-          <p:grpSp>
-            <p:nvGrpSpPr>
-              <p:cNvPr id="25" name="Group 24">
-                <a:extLst>
-                  <a:ext uri="{FF2B5EF4-FFF2-40B4-BE49-F238E27FC236}">
-                    <a16:creationId xmlns:a16="http://schemas.microsoft.com/office/drawing/2014/main" id="{0E9FAB37-13FE-66C1-A793-908B9688055A}"/>
-                  </a:ext>
-                </a:extLst>
-              </p:cNvPr>
-              <p:cNvGrpSpPr/>
-              <p:nvPr/>
-            </p:nvGrpSpPr>
-            <p:grpSpPr>
-              <a:xfrm>
-                <a:off x="1626269" y="1295399"/>
-                <a:ext cx="7853607" cy="1925053"/>
-                <a:chOff x="790074" y="1503947"/>
-                <a:chExt cx="7853607" cy="1925053"/>
-              </a:xfrm>
-            </p:grpSpPr>
-            <p:sp>
-              <p:nvSpPr>
-                <p:cNvPr id="30" name="Oval 29">
-                  <a:extLst>
-                    <a:ext uri="{FF2B5EF4-FFF2-40B4-BE49-F238E27FC236}">
-                      <a16:creationId xmlns:a16="http://schemas.microsoft.com/office/drawing/2014/main" id="{23A1CCEC-786B-FFBB-128D-F827004B78EA}"/>
-                    </a:ext>
-                  </a:extLst>
-                </p:cNvPr>
-                <p:cNvSpPr/>
-                <p:nvPr/>
-              </p:nvSpPr>
-              <p:spPr>
-                <a:xfrm>
-                  <a:off x="3994485" y="1503947"/>
-                  <a:ext cx="393031" cy="1925053"/>
-                </a:xfrm>
-                <a:prstGeom prst="ellipse">
-                  <a:avLst/>
-                </a:prstGeom>
-              </p:spPr>
-              <p:style>
-                <a:lnRef idx="2">
-                  <a:schemeClr val="accent1">
-                    <a:shade val="15000"/>
-                  </a:schemeClr>
-                </a:lnRef>
-                <a:fillRef idx="1">
-                  <a:schemeClr val="accent1"/>
-                </a:fillRef>
-                <a:effectRef idx="0">
-                  <a:schemeClr val="accent1"/>
-                </a:effectRef>
-                <a:fontRef idx="minor">
-                  <a:schemeClr val="lt1"/>
-                </a:fontRef>
-              </p:style>
-              <p:txBody>
-                <a:bodyPr rtlCol="0" anchor="ctr"/>
-                <a:lstStyle/>
-                <a:p>
-                  <a:pPr algn="ctr"/>
-                  <a:endParaRPr lang="en-US"/>
-                </a:p>
-              </p:txBody>
-            </p:sp>
-            <p:cxnSp>
-              <p:nvCxnSpPr>
-                <p:cNvPr id="31" name="Straight Connector 30">
-                  <a:extLst>
-                    <a:ext uri="{FF2B5EF4-FFF2-40B4-BE49-F238E27FC236}">
-                      <a16:creationId xmlns:a16="http://schemas.microsoft.com/office/drawing/2014/main" id="{EA025D3C-CBAB-6971-A015-8072DE04631A}"/>
-                    </a:ext>
-                  </a:extLst>
-                </p:cNvPr>
-                <p:cNvCxnSpPr>
-                  <a:cxnSpLocks/>
-                  <a:endCxn id="32" idx="6"/>
-                </p:cNvCxnSpPr>
-                <p:nvPr/>
-              </p:nvCxnSpPr>
-              <p:spPr>
-                <a:xfrm flipV="1">
-                  <a:off x="858253" y="2454440"/>
-                  <a:ext cx="7303168" cy="12033"/>
-                </a:xfrm>
-                <a:prstGeom prst="line">
-                  <a:avLst/>
-                </a:prstGeom>
-              </p:spPr>
-              <p:style>
-                <a:lnRef idx="2">
-                  <a:schemeClr val="accent1"/>
-                </a:lnRef>
-                <a:fillRef idx="0">
-                  <a:schemeClr val="accent1"/>
-                </a:fillRef>
-                <a:effectRef idx="1">
-                  <a:schemeClr val="accent1"/>
-                </a:effectRef>
-                <a:fontRef idx="minor">
-                  <a:schemeClr val="tx1"/>
-                </a:fontRef>
-              </p:style>
-            </p:cxnSp>
-            <p:sp>
-              <p:nvSpPr>
-                <p:cNvPr id="32" name="Oval 31">
-                  <a:extLst>
-                    <a:ext uri="{FF2B5EF4-FFF2-40B4-BE49-F238E27FC236}">
-                      <a16:creationId xmlns:a16="http://schemas.microsoft.com/office/drawing/2014/main" id="{E76364EA-6F7E-6EE3-55EB-7DC4D6A434B3}"/>
-                    </a:ext>
-                  </a:extLst>
-                </p:cNvPr>
-                <p:cNvSpPr/>
-                <p:nvPr/>
-              </p:nvSpPr>
-              <p:spPr>
-                <a:xfrm>
-                  <a:off x="8025063" y="2350167"/>
-                  <a:ext cx="136358" cy="208545"/>
-                </a:xfrm>
-                <a:prstGeom prst="ellipse">
-                  <a:avLst/>
-                </a:prstGeom>
-                <a:solidFill>
-                  <a:srgbClr val="FF0000"/>
-                </a:solidFill>
-              </p:spPr>
-              <p:style>
-                <a:lnRef idx="2">
-                  <a:schemeClr val="accent1">
-                    <a:shade val="15000"/>
-                  </a:schemeClr>
-                </a:lnRef>
-                <a:fillRef idx="1">
-                  <a:schemeClr val="accent1"/>
-                </a:fillRef>
-                <a:effectRef idx="0">
-                  <a:schemeClr val="accent1"/>
-                </a:effectRef>
-                <a:fontRef idx="minor">
-                  <a:schemeClr val="lt1"/>
-                </a:fontRef>
-              </p:style>
-              <p:txBody>
-                <a:bodyPr rtlCol="0" anchor="ctr"/>
-                <a:lstStyle/>
-                <a:p>
-                  <a:pPr algn="ctr"/>
-                  <a:endParaRPr lang="en-US"/>
-                </a:p>
-              </p:txBody>
-            </p:sp>
-            <p:sp>
-              <p:nvSpPr>
-                <p:cNvPr id="33" name="TextBox 32">
-                  <a:extLst>
-                    <a:ext uri="{FF2B5EF4-FFF2-40B4-BE49-F238E27FC236}">
-                      <a16:creationId xmlns:a16="http://schemas.microsoft.com/office/drawing/2014/main" id="{A7918C11-8515-1175-0F3D-F2EC44040C83}"/>
-                    </a:ext>
-                  </a:extLst>
-                </p:cNvPr>
-                <p:cNvSpPr txBox="1"/>
-                <p:nvPr/>
-              </p:nvSpPr>
-              <p:spPr>
-                <a:xfrm>
-                  <a:off x="8106270" y="2432249"/>
-                  <a:ext cx="537411" cy="369332"/>
-                </a:xfrm>
-                <a:prstGeom prst="rect">
-                  <a:avLst/>
-                </a:prstGeom>
-                <a:noFill/>
-              </p:spPr>
-              <p:txBody>
-                <a:bodyPr wrap="square" rtlCol="0">
-                  <a:spAutoFit/>
-                </a:bodyPr>
-                <a:lstStyle/>
-                <a:p>
-                  <a:r>
-                    <a:rPr lang="en-US" altLang="zh-CN" dirty="0"/>
-                    <a:t>x</a:t>
-                  </a:r>
-                  <a:r>
-                    <a:rPr lang="en-US" altLang="zh-CN" baseline="-25000" dirty="0"/>
-                    <a:t>i</a:t>
-                  </a:r>
-                  <a:endParaRPr lang="en-US" baseline="-25000" dirty="0"/>
-                </a:p>
-              </p:txBody>
-            </p:sp>
-            <p:sp>
-              <p:nvSpPr>
-                <p:cNvPr id="34" name="Oval 33">
-                  <a:extLst>
-                    <a:ext uri="{FF2B5EF4-FFF2-40B4-BE49-F238E27FC236}">
-                      <a16:creationId xmlns:a16="http://schemas.microsoft.com/office/drawing/2014/main" id="{D9F69A7B-77EC-8269-D14A-55CA6B5DCC6D}"/>
-                    </a:ext>
-                  </a:extLst>
-                </p:cNvPr>
-                <p:cNvSpPr/>
-                <p:nvPr/>
-              </p:nvSpPr>
-              <p:spPr>
-                <a:xfrm>
-                  <a:off x="790074" y="2362200"/>
-                  <a:ext cx="136358" cy="208545"/>
-                </a:xfrm>
-                <a:prstGeom prst="ellipse">
-                  <a:avLst/>
-                </a:prstGeom>
-                <a:solidFill>
-                  <a:srgbClr val="FF0000"/>
-                </a:solidFill>
-              </p:spPr>
-              <p:style>
-                <a:lnRef idx="2">
-                  <a:schemeClr val="accent1">
-                    <a:shade val="15000"/>
-                  </a:schemeClr>
-                </a:lnRef>
-                <a:fillRef idx="1">
-                  <a:schemeClr val="accent1"/>
-                </a:fillRef>
-                <a:effectRef idx="0">
-                  <a:schemeClr val="accent1"/>
-                </a:effectRef>
-                <a:fontRef idx="minor">
-                  <a:schemeClr val="lt1"/>
-                </a:fontRef>
-              </p:style>
-              <p:txBody>
-                <a:bodyPr rtlCol="0" anchor="ctr"/>
-                <a:lstStyle/>
-                <a:p>
-                  <a:pPr algn="ctr"/>
-                  <a:endParaRPr lang="en-US"/>
-                </a:p>
-              </p:txBody>
-            </p:sp>
-          </p:grpSp>
-          <p:cxnSp>
-            <p:nvCxnSpPr>
-              <p:cNvPr id="26" name="Straight Connector 25">
-                <a:extLst>
-                  <a:ext uri="{FF2B5EF4-FFF2-40B4-BE49-F238E27FC236}">
-                    <a16:creationId xmlns:a16="http://schemas.microsoft.com/office/drawing/2014/main" id="{94F57EB9-AD12-F4EA-2183-7551BF0DC1F5}"/>
-                  </a:ext>
-                </a:extLst>
-              </p:cNvPr>
-              <p:cNvCxnSpPr>
-                <a:cxnSpLocks/>
-                <a:stCxn id="32" idx="0"/>
-              </p:cNvCxnSpPr>
-              <p:nvPr/>
-            </p:nvCxnSpPr>
-            <p:spPr>
-              <a:xfrm flipH="1" flipV="1">
-                <a:off x="5149516" y="1425742"/>
-                <a:ext cx="3779921" cy="715877"/>
-              </a:xfrm>
-              <a:prstGeom prst="line">
-                <a:avLst/>
-              </a:prstGeom>
-            </p:spPr>
-            <p:style>
-              <a:lnRef idx="2">
-                <a:schemeClr val="accent2"/>
-              </a:lnRef>
-              <a:fillRef idx="0">
-                <a:schemeClr val="accent2"/>
-              </a:fillRef>
-              <a:effectRef idx="1">
-                <a:schemeClr val="accent2"/>
-              </a:effectRef>
-              <a:fontRef idx="minor">
-                <a:schemeClr val="tx1"/>
-              </a:fontRef>
-            </p:style>
-          </p:cxnSp>
-          <p:cxnSp>
-            <p:nvCxnSpPr>
-              <p:cNvPr id="27" name="Straight Connector 26">
-                <a:extLst>
-                  <a:ext uri="{FF2B5EF4-FFF2-40B4-BE49-F238E27FC236}">
-                    <a16:creationId xmlns:a16="http://schemas.microsoft.com/office/drawing/2014/main" id="{1D2C3F6D-5FE3-04A3-E527-199610BCF24D}"/>
-                  </a:ext>
-                </a:extLst>
-              </p:cNvPr>
-              <p:cNvCxnSpPr>
-                <a:cxnSpLocks/>
-              </p:cNvCxnSpPr>
-              <p:nvPr/>
-            </p:nvCxnSpPr>
-            <p:spPr>
-              <a:xfrm flipH="1">
-                <a:off x="5149515" y="2362197"/>
-                <a:ext cx="3779921" cy="715877"/>
-              </a:xfrm>
-              <a:prstGeom prst="line">
-                <a:avLst/>
-              </a:prstGeom>
-            </p:spPr>
-            <p:style>
-              <a:lnRef idx="2">
-                <a:schemeClr val="accent2"/>
-              </a:lnRef>
-              <a:fillRef idx="0">
-                <a:schemeClr val="accent2"/>
-              </a:fillRef>
-              <a:effectRef idx="1">
-                <a:schemeClr val="accent2"/>
-              </a:effectRef>
-              <a:fontRef idx="minor">
-                <a:schemeClr val="tx1"/>
-              </a:fontRef>
-            </p:style>
-          </p:cxnSp>
-          <p:cxnSp>
-            <p:nvCxnSpPr>
-              <p:cNvPr id="28" name="Straight Connector 27">
-                <a:extLst>
-                  <a:ext uri="{FF2B5EF4-FFF2-40B4-BE49-F238E27FC236}">
-                    <a16:creationId xmlns:a16="http://schemas.microsoft.com/office/drawing/2014/main" id="{61B6A3F0-D73B-7A47-B851-EE9FE9B5EED9}"/>
-                  </a:ext>
-                </a:extLst>
-              </p:cNvPr>
-              <p:cNvCxnSpPr>
-                <a:cxnSpLocks/>
-              </p:cNvCxnSpPr>
-              <p:nvPr/>
-            </p:nvCxnSpPr>
-            <p:spPr>
-              <a:xfrm flipV="1">
-                <a:off x="2703138" y="1413709"/>
-                <a:ext cx="2198730" cy="511110"/>
-              </a:xfrm>
-              <a:prstGeom prst="line">
-                <a:avLst/>
-              </a:prstGeom>
-            </p:spPr>
-            <p:style>
-              <a:lnRef idx="2">
-                <a:schemeClr val="accent2"/>
-              </a:lnRef>
-              <a:fillRef idx="0">
-                <a:schemeClr val="accent2"/>
-              </a:fillRef>
-              <a:effectRef idx="1">
-                <a:schemeClr val="accent2"/>
-              </a:effectRef>
-              <a:fontRef idx="minor">
-                <a:schemeClr val="tx1"/>
-              </a:fontRef>
-            </p:style>
-          </p:cxnSp>
-          <p:cxnSp>
-            <p:nvCxnSpPr>
-              <p:cNvPr id="29" name="Straight Connector 28">
-                <a:extLst>
-                  <a:ext uri="{FF2B5EF4-FFF2-40B4-BE49-F238E27FC236}">
-                    <a16:creationId xmlns:a16="http://schemas.microsoft.com/office/drawing/2014/main" id="{D079A58A-9FA7-8F8F-79CA-0E1DDBACBBE9}"/>
-                  </a:ext>
-                </a:extLst>
-              </p:cNvPr>
-              <p:cNvCxnSpPr>
-                <a:cxnSpLocks/>
-              </p:cNvCxnSpPr>
-              <p:nvPr/>
-            </p:nvCxnSpPr>
-            <p:spPr>
-              <a:xfrm>
-                <a:off x="2897648" y="2598818"/>
-                <a:ext cx="2004219" cy="467223"/>
-              </a:xfrm>
-              <a:prstGeom prst="line">
-                <a:avLst/>
-              </a:prstGeom>
-            </p:spPr>
-            <p:style>
-              <a:lnRef idx="2">
-                <a:schemeClr val="accent2"/>
-              </a:lnRef>
-              <a:fillRef idx="0">
-                <a:schemeClr val="accent2"/>
-              </a:fillRef>
-              <a:effectRef idx="1">
-                <a:schemeClr val="accent2"/>
-              </a:effectRef>
-              <a:fontRef idx="minor">
-                <a:schemeClr val="tx1"/>
-              </a:fontRef>
-            </p:style>
-          </p:cxnSp>
-        </p:grpSp>
-        <p:sp>
-          <p:nvSpPr>
-            <p:cNvPr id="36" name="Arc 35">
-              <a:extLst>
-                <a:ext uri="{FF2B5EF4-FFF2-40B4-BE49-F238E27FC236}">
-                  <a16:creationId xmlns:a16="http://schemas.microsoft.com/office/drawing/2014/main" id="{C0666281-90C5-AC52-AB6C-8501558C4054}"/>
-                </a:ext>
-              </a:extLst>
-            </p:cNvPr>
-            <p:cNvSpPr/>
-            <p:nvPr/>
-          </p:nvSpPr>
-          <p:spPr>
-            <a:xfrm flipH="1">
-              <a:off x="7597940" y="541421"/>
-              <a:ext cx="1235242" cy="1925052"/>
-            </a:xfrm>
-            <a:prstGeom prst="arc">
-              <a:avLst>
-                <a:gd name="adj1" fmla="val 16200000"/>
-                <a:gd name="adj2" fmla="val 5202364"/>
-              </a:avLst>
-            </a:prstGeom>
-          </p:spPr>
-          <p:style>
-            <a:lnRef idx="2">
-              <a:schemeClr val="dk1"/>
-            </a:lnRef>
-            <a:fillRef idx="0">
-              <a:schemeClr val="dk1"/>
-            </a:fillRef>
-            <a:effectRef idx="1">
-              <a:schemeClr val="dk1"/>
-            </a:effectRef>
-            <a:fontRef idx="minor">
-              <a:schemeClr val="tx1"/>
-            </a:fontRef>
-          </p:style>
-          <p:txBody>
-            <a:bodyPr rtlCol="0" anchor="ctr"/>
-            <a:lstStyle/>
-            <a:p>
-              <a:pPr algn="ctr"/>
-              <a:endParaRPr lang="en-US"/>
-            </a:p>
-          </p:txBody>
-        </p:sp>
-        <p:sp>
-          <p:nvSpPr>
-            <p:cNvPr id="37" name="Arc 36">
-              <a:extLst>
-                <a:ext uri="{FF2B5EF4-FFF2-40B4-BE49-F238E27FC236}">
-                  <a16:creationId xmlns:a16="http://schemas.microsoft.com/office/drawing/2014/main" id="{CCB05EA1-BC6A-E719-A3F9-6177535FE035}"/>
-                </a:ext>
-              </a:extLst>
-            </p:cNvPr>
-            <p:cNvSpPr/>
-            <p:nvPr/>
-          </p:nvSpPr>
-          <p:spPr>
-            <a:xfrm flipH="1">
-              <a:off x="7558837" y="3685675"/>
-              <a:ext cx="1235242" cy="1925052"/>
-            </a:xfrm>
-            <a:prstGeom prst="arc">
-              <a:avLst>
-                <a:gd name="adj1" fmla="val 16200000"/>
-                <a:gd name="adj2" fmla="val 5202364"/>
-              </a:avLst>
-            </a:prstGeom>
-          </p:spPr>
-          <p:style>
-            <a:lnRef idx="2">
-              <a:schemeClr val="dk1"/>
-            </a:lnRef>
-            <a:fillRef idx="0">
-              <a:schemeClr val="dk1"/>
-            </a:fillRef>
-            <a:effectRef idx="1">
-              <a:schemeClr val="dk1"/>
-            </a:effectRef>
-            <a:fontRef idx="minor">
-              <a:schemeClr val="tx1"/>
-            </a:fontRef>
-          </p:style>
-          <p:txBody>
-            <a:bodyPr rtlCol="0" anchor="ctr"/>
-            <a:lstStyle/>
-            <a:p>
-              <a:pPr algn="ctr"/>
-              <a:endParaRPr lang="en-US"/>
-            </a:p>
-          </p:txBody>
-        </p:sp>
-        <p:sp>
-          <p:nvSpPr>
-            <p:cNvPr id="38" name="TextBox 37">
-              <a:extLst>
-                <a:ext uri="{FF2B5EF4-FFF2-40B4-BE49-F238E27FC236}">
-                  <a16:creationId xmlns:a16="http://schemas.microsoft.com/office/drawing/2014/main" id="{37CCAC5D-7F73-4A9B-97C5-CB51473ECFA0}"/>
+                  <a16:creationId xmlns:a16="http://schemas.microsoft.com/office/drawing/2014/main" id="{FBFEB092-DB2D-57FA-7359-B8AA77C542B5}"/>
                 </a:ext>
               </a:extLst>
             </p:cNvPr>
@@ -4381,8 +5980,8 @@
           </p:nvSpPr>
           <p:spPr>
             <a:xfrm>
-              <a:off x="6485022" y="113982"/>
-              <a:ext cx="1582149" cy="646331"/>
+              <a:off x="3540166" y="559728"/>
+              <a:ext cx="1307404" cy="369332"/>
             </a:xfrm>
             <a:prstGeom prst="rect">
               <a:avLst/>
@@ -4397,322 +5996,22 @@
             <a:p>
               <a:r>
                 <a:rPr lang="en-US" dirty="0"/>
-                <a:t>Cutoff layer</a:t>
+                <a:t>F</a:t>
               </a:r>
-            </a:p>
-            <a:p>
               <a:r>
-                <a:rPr lang="en-US" dirty="0"/>
-                <a:t> R = 550 mm</a:t>
+                <a:rPr lang="en-US" altLang="zh-CN" dirty="0"/>
+                <a:t>ocus lens</a:t>
               </a:r>
+              <a:endParaRPr lang="en-US" dirty="0"/>
             </a:p>
           </p:txBody>
         </p:sp>
         <p:sp>
           <p:nvSpPr>
-            <p:cNvPr id="43" name="Freeform: Shape 42">
+            <p:cNvPr id="30" name="TextBox 29">
               <a:extLst>
                 <a:ext uri="{FF2B5EF4-FFF2-40B4-BE49-F238E27FC236}">
-                  <a16:creationId xmlns:a16="http://schemas.microsoft.com/office/drawing/2014/main" id="{0C1438C7-C4A9-6080-60AF-CC44A93040F7}"/>
-                </a:ext>
-              </a:extLst>
-            </p:cNvPr>
-            <p:cNvSpPr/>
-            <p:nvPr/>
-          </p:nvSpPr>
-          <p:spPr>
-            <a:xfrm flipH="1">
-              <a:off x="2687096" y="3803984"/>
-              <a:ext cx="389021" cy="1832815"/>
-            </a:xfrm>
-            <a:custGeom>
-              <a:avLst/>
-              <a:gdLst>
-                <a:gd name="csX0" fmla="*/ 0 w 389021"/>
-                <a:gd name="csY0" fmla="*/ 0 h 1832815"/>
-                <a:gd name="csX1" fmla="*/ 389021 w 389021"/>
-                <a:gd name="csY1" fmla="*/ 0 h 1832815"/>
-                <a:gd name="csX2" fmla="*/ 389021 w 389021"/>
-                <a:gd name="csY2" fmla="*/ 27851 h 1832815"/>
-                <a:gd name="csX3" fmla="*/ 378403 w 389021"/>
-                <a:gd name="csY3" fmla="*/ 42414 h 1832815"/>
-                <a:gd name="csX4" fmla="*/ 194510 w 389021"/>
-                <a:gd name="csY4" fmla="*/ 916407 h 1832815"/>
-                <a:gd name="csX5" fmla="*/ 378403 w 389021"/>
-                <a:gd name="csY5" fmla="*/ 1790400 h 1832815"/>
-                <a:gd name="csX6" fmla="*/ 389021 w 389021"/>
-                <a:gd name="csY6" fmla="*/ 1804963 h 1832815"/>
-                <a:gd name="csX7" fmla="*/ 389021 w 389021"/>
-                <a:gd name="csY7" fmla="*/ 1832815 h 1832815"/>
-                <a:gd name="csX8" fmla="*/ 0 w 389021"/>
-                <a:gd name="csY8" fmla="*/ 1832815 h 1832815"/>
-              </a:gdLst>
-              <a:ahLst/>
-              <a:cxnLst>
-                <a:cxn ang="0">
-                  <a:pos x="csX0" y="csY0"/>
-                </a:cxn>
-                <a:cxn ang="0">
-                  <a:pos x="csX1" y="csY1"/>
-                </a:cxn>
-                <a:cxn ang="0">
-                  <a:pos x="csX2" y="csY2"/>
-                </a:cxn>
-                <a:cxn ang="0">
-                  <a:pos x="csX3" y="csY3"/>
-                </a:cxn>
-                <a:cxn ang="0">
-                  <a:pos x="csX4" y="csY4"/>
-                </a:cxn>
-                <a:cxn ang="0">
-                  <a:pos x="csX5" y="csY5"/>
-                </a:cxn>
-                <a:cxn ang="0">
-                  <a:pos x="csX6" y="csY6"/>
-                </a:cxn>
-                <a:cxn ang="0">
-                  <a:pos x="csX7" y="csY7"/>
-                </a:cxn>
-                <a:cxn ang="0">
-                  <a:pos x="csX8" y="csY8"/>
-                </a:cxn>
-              </a:cxnLst>
-              <a:rect l="l" t="t" r="r" b="b"/>
-              <a:pathLst>
-                <a:path w="389021" h="1832815">
-                  <a:moveTo>
-                    <a:pt x="0" y="0"/>
-                  </a:moveTo>
-                  <a:lnTo>
-                    <a:pt x="389021" y="0"/>
-                  </a:lnTo>
-                  <a:lnTo>
-                    <a:pt x="389021" y="27851"/>
-                  </a:lnTo>
-                  <a:lnTo>
-                    <a:pt x="378403" y="42414"/>
-                  </a:lnTo>
-                  <a:cubicBezTo>
-                    <a:pt x="267455" y="231826"/>
-                    <a:pt x="194510" y="552590"/>
-                    <a:pt x="194510" y="916407"/>
-                  </a:cubicBezTo>
-                  <a:cubicBezTo>
-                    <a:pt x="194510" y="1280225"/>
-                    <a:pt x="267455" y="1600989"/>
-                    <a:pt x="378403" y="1790400"/>
-                  </a:cubicBezTo>
-                  <a:lnTo>
-                    <a:pt x="389021" y="1804963"/>
-                  </a:lnTo>
-                  <a:lnTo>
-                    <a:pt x="389021" y="1832815"/>
-                  </a:lnTo>
-                  <a:lnTo>
-                    <a:pt x="0" y="1832815"/>
-                  </a:lnTo>
-                  <a:close/>
-                </a:path>
-              </a:pathLst>
-            </a:custGeom>
-          </p:spPr>
-          <p:style>
-            <a:lnRef idx="2">
-              <a:schemeClr val="accent1">
-                <a:shade val="15000"/>
-              </a:schemeClr>
-            </a:lnRef>
-            <a:fillRef idx="1">
-              <a:schemeClr val="accent1"/>
-            </a:fillRef>
-            <a:effectRef idx="0">
-              <a:schemeClr val="accent1"/>
-            </a:effectRef>
-            <a:fontRef idx="minor">
-              <a:schemeClr val="lt1"/>
-            </a:fontRef>
-          </p:style>
-          <p:txBody>
-            <a:bodyPr wrap="square" rtlCol="0" anchor="ctr">
-              <a:noAutofit/>
-            </a:bodyPr>
-            <a:lstStyle/>
-            <a:p>
-              <a:pPr algn="ctr"/>
-              <a:endParaRPr lang="en-US"/>
-            </a:p>
-          </p:txBody>
-        </p:sp>
-        <p:cxnSp>
-          <p:nvCxnSpPr>
-            <p:cNvPr id="45" name="Straight Connector 44">
-              <a:extLst>
-                <a:ext uri="{FF2B5EF4-FFF2-40B4-BE49-F238E27FC236}">
-                  <a16:creationId xmlns:a16="http://schemas.microsoft.com/office/drawing/2014/main" id="{6B67FA39-75CA-2BCA-D694-1CAAFEE83AB0}"/>
-                </a:ext>
-              </a:extLst>
-            </p:cNvPr>
-            <p:cNvCxnSpPr/>
-            <p:nvPr/>
-          </p:nvCxnSpPr>
-          <p:spPr>
-            <a:xfrm>
-              <a:off x="1379621" y="4307305"/>
-              <a:ext cx="1443832" cy="0"/>
-            </a:xfrm>
-            <a:prstGeom prst="line">
-              <a:avLst/>
-            </a:prstGeom>
-            <a:ln>
-              <a:solidFill>
-                <a:schemeClr val="accent2"/>
-              </a:solidFill>
-            </a:ln>
-          </p:spPr>
-          <p:style>
-            <a:lnRef idx="2">
-              <a:schemeClr val="accent1"/>
-            </a:lnRef>
-            <a:fillRef idx="0">
-              <a:schemeClr val="accent1"/>
-            </a:fillRef>
-            <a:effectRef idx="1">
-              <a:schemeClr val="accent1"/>
-            </a:effectRef>
-            <a:fontRef idx="minor">
-              <a:schemeClr val="tx1"/>
-            </a:fontRef>
-          </p:style>
-        </p:cxnSp>
-        <p:cxnSp>
-          <p:nvCxnSpPr>
-            <p:cNvPr id="48" name="Straight Connector 47">
-              <a:extLst>
-                <a:ext uri="{FF2B5EF4-FFF2-40B4-BE49-F238E27FC236}">
-                  <a16:creationId xmlns:a16="http://schemas.microsoft.com/office/drawing/2014/main" id="{712F25E4-FC78-45FA-748F-6A7D838C9999}"/>
-                </a:ext>
-              </a:extLst>
-            </p:cNvPr>
-            <p:cNvCxnSpPr>
-              <a:cxnSpLocks/>
-            </p:cNvCxnSpPr>
-            <p:nvPr/>
-          </p:nvCxnSpPr>
-          <p:spPr>
-            <a:xfrm flipV="1">
-              <a:off x="1811754" y="4037010"/>
-              <a:ext cx="2198730" cy="511110"/>
-            </a:xfrm>
-            <a:prstGeom prst="line">
-              <a:avLst/>
-            </a:prstGeom>
-            <a:ln>
-              <a:prstDash val="dash"/>
-            </a:ln>
-          </p:spPr>
-          <p:style>
-            <a:lnRef idx="2">
-              <a:schemeClr val="accent2"/>
-            </a:lnRef>
-            <a:fillRef idx="0">
-              <a:schemeClr val="accent2"/>
-            </a:fillRef>
-            <a:effectRef idx="1">
-              <a:schemeClr val="accent2"/>
-            </a:effectRef>
-            <a:fontRef idx="minor">
-              <a:schemeClr val="tx1"/>
-            </a:fontRef>
-          </p:style>
-        </p:cxnSp>
-        <p:cxnSp>
-          <p:nvCxnSpPr>
-            <p:cNvPr id="49" name="Straight Connector 48">
-              <a:extLst>
-                <a:ext uri="{FF2B5EF4-FFF2-40B4-BE49-F238E27FC236}">
-                  <a16:creationId xmlns:a16="http://schemas.microsoft.com/office/drawing/2014/main" id="{0DF8E3AE-2766-0AAF-EF26-99B154984678}"/>
-                </a:ext>
-              </a:extLst>
-            </p:cNvPr>
-            <p:cNvCxnSpPr>
-              <a:cxnSpLocks/>
-            </p:cNvCxnSpPr>
-            <p:nvPr/>
-          </p:nvCxnSpPr>
-          <p:spPr>
-            <a:xfrm>
-              <a:off x="1862973" y="4720391"/>
-              <a:ext cx="2004219" cy="467223"/>
-            </a:xfrm>
-            <a:prstGeom prst="line">
-              <a:avLst/>
-            </a:prstGeom>
-            <a:ln>
-              <a:prstDash val="dash"/>
-            </a:ln>
-          </p:spPr>
-          <p:style>
-            <a:lnRef idx="2">
-              <a:schemeClr val="accent2"/>
-            </a:lnRef>
-            <a:fillRef idx="0">
-              <a:schemeClr val="accent2"/>
-            </a:fillRef>
-            <a:effectRef idx="1">
-              <a:schemeClr val="accent2"/>
-            </a:effectRef>
-            <a:fontRef idx="minor">
-              <a:schemeClr val="tx1"/>
-            </a:fontRef>
-          </p:style>
-        </p:cxnSp>
-        <p:cxnSp>
-          <p:nvCxnSpPr>
-            <p:cNvPr id="50" name="Straight Connector 49">
-              <a:extLst>
-                <a:ext uri="{FF2B5EF4-FFF2-40B4-BE49-F238E27FC236}">
-                  <a16:creationId xmlns:a16="http://schemas.microsoft.com/office/drawing/2014/main" id="{4BFB0005-CE3A-53D5-9A9E-8986E0780698}"/>
-                </a:ext>
-              </a:extLst>
-            </p:cNvPr>
-            <p:cNvCxnSpPr/>
-            <p:nvPr/>
-          </p:nvCxnSpPr>
-          <p:spPr>
-            <a:xfrm>
-              <a:off x="1379621" y="4954002"/>
-              <a:ext cx="1443832" cy="0"/>
-            </a:xfrm>
-            <a:prstGeom prst="line">
-              <a:avLst/>
-            </a:prstGeom>
-            <a:ln>
-              <a:solidFill>
-                <a:schemeClr val="accent2"/>
-              </a:solidFill>
-            </a:ln>
-          </p:spPr>
-          <p:style>
-            <a:lnRef idx="2">
-              <a:schemeClr val="accent1"/>
-            </a:lnRef>
-            <a:fillRef idx="0">
-              <a:schemeClr val="accent1"/>
-            </a:fillRef>
-            <a:effectRef idx="1">
-              <a:schemeClr val="accent1"/>
-            </a:effectRef>
-            <a:fontRef idx="minor">
-              <a:schemeClr val="tx1"/>
-            </a:fontRef>
-          </p:style>
-        </p:cxnSp>
-        <p:sp>
-          <p:nvSpPr>
-            <p:cNvPr id="62" name="TextBox 61">
-              <a:extLst>
-                <a:ext uri="{FF2B5EF4-FFF2-40B4-BE49-F238E27FC236}">
-                  <a16:creationId xmlns:a16="http://schemas.microsoft.com/office/drawing/2014/main" id="{2411569E-057E-92D9-7478-392FE0093ED8}"/>
+                  <a16:creationId xmlns:a16="http://schemas.microsoft.com/office/drawing/2014/main" id="{BCB20BEF-1056-E3A6-F820-24E09FDF6DCF}"/>
                 </a:ext>
               </a:extLst>
             </p:cNvPr>
@@ -4721,8 +6020,43 @@
           </p:nvSpPr>
           <p:spPr>
             <a:xfrm>
-              <a:off x="8176458" y="2450886"/>
-              <a:ext cx="1449805" cy="369332"/>
+              <a:off x="3589415" y="2248260"/>
+              <a:ext cx="1200528" cy="523220"/>
+            </a:xfrm>
+            <a:prstGeom prst="rect">
+              <a:avLst/>
+            </a:prstGeom>
+            <a:noFill/>
+          </p:spPr>
+          <p:txBody>
+            <a:bodyPr wrap="square" rtlCol="0">
+              <a:spAutoFit/>
+            </a:bodyPr>
+            <a:lstStyle/>
+            <a:p>
+              <a:r>
+                <a:rPr lang="en-US" sz="1400" dirty="0"/>
+                <a:t>Detector array</a:t>
+              </a:r>
+            </a:p>
+          </p:txBody>
+        </p:sp>
+        <p:sp>
+          <p:nvSpPr>
+            <p:cNvPr id="31" name="TextBox 30">
+              <a:extLst>
+                <a:ext uri="{FF2B5EF4-FFF2-40B4-BE49-F238E27FC236}">
+                  <a16:creationId xmlns:a16="http://schemas.microsoft.com/office/drawing/2014/main" id="{66B5DF81-E788-BD2D-29BE-1A5370551956}"/>
+                </a:ext>
+              </a:extLst>
+            </p:cNvPr>
+            <p:cNvSpPr txBox="1"/>
+            <p:nvPr/>
+          </p:nvSpPr>
+          <p:spPr>
+            <a:xfrm>
+              <a:off x="5255452" y="559728"/>
+              <a:ext cx="1307404" cy="369332"/>
             </a:xfrm>
             <a:prstGeom prst="rect">
               <a:avLst/>
@@ -4737,25 +6071,22 @@
             <a:p>
               <a:r>
                 <a:rPr lang="en-US" dirty="0"/>
-                <a:t>x</a:t>
+                <a:t>F</a:t>
               </a:r>
               <a:r>
-                <a:rPr lang="en-US" baseline="-25000" dirty="0"/>
-                <a:t>i </a:t>
+                <a:rPr lang="en-US" altLang="zh-CN" dirty="0"/>
+                <a:t>CA lens</a:t>
               </a:r>
-              <a:r>
-                <a:rPr lang="en-US" dirty="0"/>
-                <a:t>= 1850 mm</a:t>
-              </a:r>
+              <a:endParaRPr lang="en-US" dirty="0"/>
             </a:p>
           </p:txBody>
         </p:sp>
         <p:sp>
           <p:nvSpPr>
-            <p:cNvPr id="63" name="TextBox 62">
+            <p:cNvPr id="32" name="TextBox 31">
               <a:extLst>
                 <a:ext uri="{FF2B5EF4-FFF2-40B4-BE49-F238E27FC236}">
-                  <a16:creationId xmlns:a16="http://schemas.microsoft.com/office/drawing/2014/main" id="{0982AC6E-20B3-3665-5409-EE117D14FC23}"/>
+                  <a16:creationId xmlns:a16="http://schemas.microsoft.com/office/drawing/2014/main" id="{5D27CC7C-0A20-00D0-4C0A-6E313CEC8046}"/>
                 </a:ext>
               </a:extLst>
             </p:cNvPr>
@@ -4764,8 +6095,8 @@
           </p:nvSpPr>
           <p:spPr>
             <a:xfrm>
-              <a:off x="6572758" y="3224463"/>
-              <a:ext cx="1582149" cy="646331"/>
+              <a:off x="6988139" y="553848"/>
+              <a:ext cx="1307404" cy="369332"/>
             </a:xfrm>
             <a:prstGeom prst="rect">
               <a:avLst/>
@@ -4779,25 +6110,56 @@
             <a:lstStyle/>
             <a:p>
               <a:r>
-                <a:rPr lang="en-US" dirty="0"/>
-                <a:t>Cutoff layer</a:t>
+                <a:rPr lang="en-US" altLang="zh-CN" dirty="0"/>
+                <a:t>Zoom lens</a:t>
               </a:r>
+              <a:endParaRPr lang="en-US" dirty="0"/>
             </a:p>
+          </p:txBody>
+        </p:sp>
+        <p:sp>
+          <p:nvSpPr>
+            <p:cNvPr id="33" name="TextBox 32">
+              <a:extLst>
+                <a:ext uri="{FF2B5EF4-FFF2-40B4-BE49-F238E27FC236}">
+                  <a16:creationId xmlns:a16="http://schemas.microsoft.com/office/drawing/2014/main" id="{7DF55309-2932-6C05-6586-F0A1500C97FB}"/>
+                </a:ext>
+              </a:extLst>
+            </p:cNvPr>
+            <p:cNvSpPr txBox="1"/>
+            <p:nvPr/>
+          </p:nvSpPr>
+          <p:spPr>
+            <a:xfrm>
+              <a:off x="8619641" y="603567"/>
+              <a:ext cx="1535097" cy="646331"/>
+            </a:xfrm>
+            <a:prstGeom prst="rect">
+              <a:avLst/>
+            </a:prstGeom>
+            <a:noFill/>
+          </p:spPr>
+          <p:txBody>
+            <a:bodyPr wrap="square" rtlCol="0">
+              <a:spAutoFit/>
+            </a:bodyPr>
+            <a:lstStyle/>
             <a:p>
               <a:r>
-                <a:rPr lang="en-US" dirty="0"/>
-                <a:t> R = 550 mm</a:t>
+                <a:rPr lang="en-US" altLang="zh-CN" dirty="0"/>
+                <a:t>Vacuum window</a:t>
               </a:r>
+              <a:endParaRPr lang="en-US" dirty="0"/>
             </a:p>
           </p:txBody>
         </p:sp>
       </p:grpSp>
       <p:sp>
         <p:nvSpPr>
-          <p:cNvPr id="65" name="TextBox 64">
+          <p:cNvPr id="36" name="TextBox 35">
             <a:extLst>
               <a:ext uri="{FF2B5EF4-FFF2-40B4-BE49-F238E27FC236}">
-                <a16:creationId xmlns:a16="http://schemas.microsoft.com/office/drawing/2014/main" id="{96ABBBB7-60EC-7875-2C91-E8932C8D5DFF}"/>
+                <a16:creationId xmlns:a16="http://schemas.microsoft.com/office/drawing/2014/main" id="{9AD193D9-6F9A-DA96-DFAD-218D38BDA276}"/>
               </a:ext>
             </a:extLst>
           </p:cNvPr>
@@ -4806,8 +6168,8 @@
         </p:nvSpPr>
         <p:spPr>
           <a:xfrm>
-            <a:off x="7345779" y="1442192"/>
-            <a:ext cx="256674" cy="369332"/>
+            <a:off x="7105652" y="1411365"/>
+            <a:ext cx="1535097" cy="369332"/>
           </a:xfrm>
           <a:prstGeom prst="rect">
             <a:avLst/>
@@ -4821,147 +6183,17 @@
           <a:lstStyle/>
           <a:p>
             <a:r>
-              <a:rPr lang="en-US" dirty="0"/>
-              <a:t>x</a:t>
-            </a:r>
-          </a:p>
-        </p:txBody>
-      </p:sp>
-      <p:sp>
-        <p:nvSpPr>
-          <p:cNvPr id="66" name="TextBox 65">
-            <a:extLst>
-              <a:ext uri="{FF2B5EF4-FFF2-40B4-BE49-F238E27FC236}">
-                <a16:creationId xmlns:a16="http://schemas.microsoft.com/office/drawing/2014/main" id="{2F201A79-7732-876E-8915-CF7BE9EF3C54}"/>
-              </a:ext>
-            </a:extLst>
-          </p:cNvPr>
-          <p:cNvSpPr txBox="1"/>
-          <p:nvPr/>
-        </p:nvSpPr>
-        <p:spPr>
-          <a:xfrm>
-            <a:off x="4789574" y="176562"/>
-            <a:ext cx="1124950" cy="369332"/>
-          </a:xfrm>
-          <a:prstGeom prst="rect">
-            <a:avLst/>
-          </a:prstGeom>
-          <a:noFill/>
-        </p:spPr>
-        <p:txBody>
-          <a:bodyPr wrap="square" rtlCol="0">
-            <a:spAutoFit/>
-          </a:bodyPr>
-          <a:lstStyle/>
-          <a:p>
-            <a:r>
-              <a:rPr lang="en-US" dirty="0"/>
-              <a:t>1</a:t>
-            </a:r>
-            <a:r>
-              <a:rPr lang="en-US" baseline="30000" dirty="0"/>
-              <a:t>st</a:t>
-            </a:r>
-            <a:r>
-              <a:rPr lang="en-US" dirty="0"/>
-              <a:t> </a:t>
-            </a:r>
-            <a:r>
               <a:rPr lang="en-US" altLang="zh-CN" dirty="0"/>
-              <a:t>lens</a:t>
+              <a:t>plasma</a:t>
             </a:r>
             <a:endParaRPr lang="en-US" dirty="0"/>
-          </a:p>
-        </p:txBody>
-      </p:sp>
-      <p:sp>
-        <p:nvSpPr>
-          <p:cNvPr id="67" name="TextBox 66">
-            <a:extLst>
-              <a:ext uri="{FF2B5EF4-FFF2-40B4-BE49-F238E27FC236}">
-                <a16:creationId xmlns:a16="http://schemas.microsoft.com/office/drawing/2014/main" id="{FE4F26F4-D01E-A13A-04D5-5E42677C9F0D}"/>
-              </a:ext>
-            </a:extLst>
-          </p:cNvPr>
-          <p:cNvSpPr txBox="1"/>
-          <p:nvPr/>
-        </p:nvSpPr>
-        <p:spPr>
-          <a:xfrm>
-            <a:off x="4764007" y="3316338"/>
-            <a:ext cx="1124950" cy="369332"/>
-          </a:xfrm>
-          <a:prstGeom prst="rect">
-            <a:avLst/>
-          </a:prstGeom>
-          <a:noFill/>
-        </p:spPr>
-        <p:txBody>
-          <a:bodyPr wrap="square" rtlCol="0">
-            <a:spAutoFit/>
-          </a:bodyPr>
-          <a:lstStyle/>
-          <a:p>
-            <a:r>
-              <a:rPr lang="en-US" dirty="0"/>
-              <a:t>1</a:t>
-            </a:r>
-            <a:r>
-              <a:rPr lang="en-US" baseline="30000" dirty="0"/>
-              <a:t>st</a:t>
-            </a:r>
-            <a:r>
-              <a:rPr lang="en-US" dirty="0"/>
-              <a:t> </a:t>
-            </a:r>
-            <a:r>
-              <a:rPr lang="en-US" altLang="zh-CN" dirty="0"/>
-              <a:t>lens</a:t>
-            </a:r>
-            <a:endParaRPr lang="en-US" dirty="0"/>
-          </a:p>
-        </p:txBody>
-      </p:sp>
-      <p:sp>
-        <p:nvSpPr>
-          <p:cNvPr id="68" name="TextBox 67">
-            <a:extLst>
-              <a:ext uri="{FF2B5EF4-FFF2-40B4-BE49-F238E27FC236}">
-                <a16:creationId xmlns:a16="http://schemas.microsoft.com/office/drawing/2014/main" id="{8D2970EE-8A26-693C-C2AF-B6414214886E}"/>
-              </a:ext>
-            </a:extLst>
-          </p:cNvPr>
-          <p:cNvSpPr txBox="1"/>
-          <p:nvPr/>
-        </p:nvSpPr>
-        <p:spPr>
-          <a:xfrm>
-            <a:off x="7279101" y="4600839"/>
-            <a:ext cx="256674" cy="369332"/>
-          </a:xfrm>
-          <a:prstGeom prst="rect">
-            <a:avLst/>
-          </a:prstGeom>
-          <a:noFill/>
-        </p:spPr>
-        <p:txBody>
-          <a:bodyPr wrap="square" rtlCol="0">
-            <a:spAutoFit/>
-          </a:bodyPr>
-          <a:lstStyle/>
-          <a:p>
-            <a:r>
-              <a:rPr lang="en-US" dirty="0"/>
-              <a:t>x</a:t>
-            </a:r>
           </a:p>
         </p:txBody>
       </p:sp>
     </p:spTree>
     <p:extLst>
       <p:ext uri="{BB962C8B-B14F-4D97-AF65-F5344CB8AC3E}">
-        <p14:creationId xmlns:p14="http://schemas.microsoft.com/office/powerpoint/2010/main" val="2571808201"/>
+        <p14:creationId xmlns:p14="http://schemas.microsoft.com/office/powerpoint/2010/main" val="1091939077"/>
       </p:ext>
     </p:extLst>
   </p:cSld>
@@ -4971,7 +6203,7 @@
 </p:sld>
 </file>
 
-<file path=ppt/slides/slide2.xml><?xml version="1.0" encoding="utf-8"?>
+<file path=ppt/slides/slide5.xml><?xml version="1.0" encoding="utf-8"?>
 <p:sld xmlns:a="http://schemas.openxmlformats.org/drawingml/2006/main" xmlns:r="http://schemas.openxmlformats.org/officeDocument/2006/relationships" xmlns:p="http://schemas.openxmlformats.org/presentationml/2006/main">
   <p:cSld>
     <p:spTree>
@@ -4990,10 +6222,10 @@
       </p:grpSpPr>
       <p:pic>
         <p:nvPicPr>
-          <p:cNvPr id="14" name="Picture 13">
+          <p:cNvPr id="12" name="Picture 11">
             <a:extLst>
               <a:ext uri="{FF2B5EF4-FFF2-40B4-BE49-F238E27FC236}">
-                <a16:creationId xmlns:a16="http://schemas.microsoft.com/office/drawing/2014/main" id="{9201924D-D21E-C73A-F67F-131CA5ABBD66}"/>
+                <a16:creationId xmlns:a16="http://schemas.microsoft.com/office/drawing/2014/main" id="{208D12BA-130F-4C4C-8289-800D3A92CD2F}"/>
               </a:ext>
             </a:extLst>
           </p:cNvPr>
@@ -5002,26 +6234,295 @@
           </p:cNvPicPr>
           <p:nvPr/>
         </p:nvPicPr>
-        <p:blipFill>
+        <p:blipFill rotWithShape="1">
           <a:blip r:embed="rId2"/>
-          <a:stretch>
-            <a:fillRect/>
-          </a:stretch>
+          <a:srcRect l="26143" r="30714"/>
+          <a:stretch/>
         </p:blipFill>
         <p:spPr>
           <a:xfrm>
-            <a:off x="1498133" y="645935"/>
-            <a:ext cx="8297375" cy="5566130"/>
+            <a:off x="3127375" y="3378461"/>
+            <a:ext cx="1933574" cy="2979533"/>
           </a:xfrm>
           <a:prstGeom prst="rect">
             <a:avLst/>
           </a:prstGeom>
         </p:spPr>
       </p:pic>
+      <p:grpSp>
+        <p:nvGrpSpPr>
+          <p:cNvPr id="10" name="Group 9">
+            <a:extLst>
+              <a:ext uri="{FF2B5EF4-FFF2-40B4-BE49-F238E27FC236}">
+                <a16:creationId xmlns:a16="http://schemas.microsoft.com/office/drawing/2014/main" id="{895B0F17-6C93-432C-937D-B93EF0469C21}"/>
+              </a:ext>
+            </a:extLst>
+          </p:cNvPr>
+          <p:cNvGrpSpPr/>
+          <p:nvPr/>
+        </p:nvGrpSpPr>
+        <p:grpSpPr>
+          <a:xfrm>
+            <a:off x="866812" y="449467"/>
+            <a:ext cx="4712421" cy="5959065"/>
+            <a:chOff x="2209837" y="656889"/>
+            <a:chExt cx="4712421" cy="5959065"/>
+          </a:xfrm>
+        </p:grpSpPr>
+        <p:pic>
+          <p:nvPicPr>
+            <p:cNvPr id="2" name="Picture 1">
+              <a:extLst>
+                <a:ext uri="{FF2B5EF4-FFF2-40B4-BE49-F238E27FC236}">
+                  <a16:creationId xmlns:a16="http://schemas.microsoft.com/office/drawing/2014/main" id="{CDCB9A80-0741-4A5B-A8E3-08FB99268D0D}"/>
+                </a:ext>
+              </a:extLst>
+            </p:cNvPr>
+            <p:cNvPicPr/>
+            <p:nvPr/>
+          </p:nvPicPr>
+          <p:blipFill rotWithShape="1">
+            <a:blip r:embed="rId3"/>
+            <a:srcRect l="19658" r="26667"/>
+            <a:stretch/>
+          </p:blipFill>
+          <p:spPr bwMode="auto">
+            <a:xfrm>
+              <a:off x="2209837" y="656889"/>
+              <a:ext cx="2191834" cy="2928994"/>
+            </a:xfrm>
+            <a:prstGeom prst="rect">
+              <a:avLst/>
+            </a:prstGeom>
+            <a:ln>
+              <a:noFill/>
+            </a:ln>
+            <a:extLst>
+              <a:ext uri="{53640926-AAD7-44D8-BBD7-CCE9431645EC}">
+                <a14:shadowObscured xmlns:a14="http://schemas.microsoft.com/office/drawing/2010/main"/>
+              </a:ext>
+            </a:extLst>
+          </p:spPr>
+        </p:pic>
+        <p:pic>
+          <p:nvPicPr>
+            <p:cNvPr id="3" name="Picture 2">
+              <a:extLst>
+                <a:ext uri="{FF2B5EF4-FFF2-40B4-BE49-F238E27FC236}">
+                  <a16:creationId xmlns:a16="http://schemas.microsoft.com/office/drawing/2014/main" id="{3D699B98-DB04-40D4-B048-51ECB5209D67}"/>
+                </a:ext>
+              </a:extLst>
+            </p:cNvPr>
+            <p:cNvPicPr/>
+            <p:nvPr/>
+          </p:nvPicPr>
+          <p:blipFill rotWithShape="1">
+            <a:blip r:embed="rId4"/>
+            <a:srcRect l="19743" r="23077"/>
+            <a:stretch/>
+          </p:blipFill>
+          <p:spPr bwMode="auto">
+            <a:xfrm>
+              <a:off x="2209837" y="3686960"/>
+              <a:ext cx="2343113" cy="2928994"/>
+            </a:xfrm>
+            <a:prstGeom prst="rect">
+              <a:avLst/>
+            </a:prstGeom>
+            <a:ln>
+              <a:noFill/>
+            </a:ln>
+            <a:extLst>
+              <a:ext uri="{53640926-AAD7-44D8-BBD7-CCE9431645EC}">
+                <a14:shadowObscured xmlns:a14="http://schemas.microsoft.com/office/drawing/2010/main"/>
+              </a:ext>
+            </a:extLst>
+          </p:spPr>
+        </p:pic>
+        <p:pic>
+          <p:nvPicPr>
+            <p:cNvPr id="4" name="Picture 3">
+              <a:extLst>
+                <a:ext uri="{FF2B5EF4-FFF2-40B4-BE49-F238E27FC236}">
+                  <a16:creationId xmlns:a16="http://schemas.microsoft.com/office/drawing/2014/main" id="{4F50C784-FF09-48B5-8DA3-AA27AE4FF7F0}"/>
+                </a:ext>
+              </a:extLst>
+            </p:cNvPr>
+            <p:cNvPicPr/>
+            <p:nvPr/>
+          </p:nvPicPr>
+          <p:blipFill rotWithShape="1">
+            <a:blip r:embed="rId5"/>
+            <a:srcRect l="19573" r="21197"/>
+            <a:stretch/>
+          </p:blipFill>
+          <p:spPr bwMode="auto">
+            <a:xfrm>
+              <a:off x="4552950" y="656889"/>
+              <a:ext cx="2369308" cy="2928994"/>
+            </a:xfrm>
+            <a:prstGeom prst="rect">
+              <a:avLst/>
+            </a:prstGeom>
+            <a:ln>
+              <a:noFill/>
+            </a:ln>
+            <a:extLst>
+              <a:ext uri="{53640926-AAD7-44D8-BBD7-CCE9431645EC}">
+                <a14:shadowObscured xmlns:a14="http://schemas.microsoft.com/office/drawing/2010/main"/>
+              </a:ext>
+            </a:extLst>
+          </p:spPr>
+        </p:pic>
+        <p:sp>
+          <p:nvSpPr>
+            <p:cNvPr id="6" name="TextBox 5">
+              <a:extLst>
+                <a:ext uri="{FF2B5EF4-FFF2-40B4-BE49-F238E27FC236}">
+                  <a16:creationId xmlns:a16="http://schemas.microsoft.com/office/drawing/2014/main" id="{6573D9F5-2B11-484A-890F-3D73D31E36DD}"/>
+                </a:ext>
+              </a:extLst>
+            </p:cNvPr>
+            <p:cNvSpPr txBox="1"/>
+            <p:nvPr/>
+          </p:nvSpPr>
+          <p:spPr>
+            <a:xfrm>
+              <a:off x="2209837" y="656889"/>
+              <a:ext cx="762000" cy="369332"/>
+            </a:xfrm>
+            <a:prstGeom prst="rect">
+              <a:avLst/>
+            </a:prstGeom>
+            <a:noFill/>
+          </p:spPr>
+          <p:txBody>
+            <a:bodyPr wrap="square" rtlCol="0">
+              <a:spAutoFit/>
+            </a:bodyPr>
+            <a:lstStyle/>
+            <a:p>
+              <a:r>
+                <a:rPr lang="en-US" altLang="zh-CN" dirty="0"/>
+                <a:t>(a)</a:t>
+              </a:r>
+              <a:endParaRPr lang="en-US" dirty="0"/>
+            </a:p>
+          </p:txBody>
+        </p:sp>
+        <p:sp>
+          <p:nvSpPr>
+            <p:cNvPr id="7" name="TextBox 6">
+              <a:extLst>
+                <a:ext uri="{FF2B5EF4-FFF2-40B4-BE49-F238E27FC236}">
+                  <a16:creationId xmlns:a16="http://schemas.microsoft.com/office/drawing/2014/main" id="{F679E6E1-B956-4BD8-96D0-61C5DFFC2DA4}"/>
+                </a:ext>
+              </a:extLst>
+            </p:cNvPr>
+            <p:cNvSpPr txBox="1"/>
+            <p:nvPr/>
+          </p:nvSpPr>
+          <p:spPr>
+            <a:xfrm>
+              <a:off x="4619662" y="656889"/>
+              <a:ext cx="762000" cy="369332"/>
+            </a:xfrm>
+            <a:prstGeom prst="rect">
+              <a:avLst/>
+            </a:prstGeom>
+            <a:noFill/>
+          </p:spPr>
+          <p:txBody>
+            <a:bodyPr wrap="square" rtlCol="0">
+              <a:spAutoFit/>
+            </a:bodyPr>
+            <a:lstStyle/>
+            <a:p>
+              <a:r>
+                <a:rPr lang="en-US" altLang="zh-CN" dirty="0"/>
+                <a:t>(b)</a:t>
+              </a:r>
+              <a:endParaRPr lang="en-US" dirty="0"/>
+            </a:p>
+          </p:txBody>
+        </p:sp>
+        <p:sp>
+          <p:nvSpPr>
+            <p:cNvPr id="8" name="TextBox 7">
+              <a:extLst>
+                <a:ext uri="{FF2B5EF4-FFF2-40B4-BE49-F238E27FC236}">
+                  <a16:creationId xmlns:a16="http://schemas.microsoft.com/office/drawing/2014/main" id="{B0CDB9B3-B27E-4ECD-96A9-3B43FC8A5F40}"/>
+                </a:ext>
+              </a:extLst>
+            </p:cNvPr>
+            <p:cNvSpPr txBox="1"/>
+            <p:nvPr/>
+          </p:nvSpPr>
+          <p:spPr>
+            <a:xfrm>
+              <a:off x="2209837" y="3401217"/>
+              <a:ext cx="762000" cy="369332"/>
+            </a:xfrm>
+            <a:prstGeom prst="rect">
+              <a:avLst/>
+            </a:prstGeom>
+            <a:noFill/>
+          </p:spPr>
+          <p:txBody>
+            <a:bodyPr wrap="square" rtlCol="0">
+              <a:spAutoFit/>
+            </a:bodyPr>
+            <a:lstStyle/>
+            <a:p>
+              <a:r>
+                <a:rPr lang="en-US" altLang="zh-CN" dirty="0"/>
+                <a:t>(c)</a:t>
+              </a:r>
+              <a:endParaRPr lang="en-US" dirty="0"/>
+            </a:p>
+          </p:txBody>
+        </p:sp>
+        <p:sp>
+          <p:nvSpPr>
+            <p:cNvPr id="9" name="TextBox 8">
+              <a:extLst>
+                <a:ext uri="{FF2B5EF4-FFF2-40B4-BE49-F238E27FC236}">
+                  <a16:creationId xmlns:a16="http://schemas.microsoft.com/office/drawing/2014/main" id="{E3F3E9D9-F332-4307-840E-9EA260287C03}"/>
+                </a:ext>
+              </a:extLst>
+            </p:cNvPr>
+            <p:cNvSpPr txBox="1"/>
+            <p:nvPr/>
+          </p:nvSpPr>
+          <p:spPr>
+            <a:xfrm>
+              <a:off x="4635500" y="3401217"/>
+              <a:ext cx="762000" cy="369332"/>
+            </a:xfrm>
+            <a:prstGeom prst="rect">
+              <a:avLst/>
+            </a:prstGeom>
+            <a:noFill/>
+          </p:spPr>
+          <p:txBody>
+            <a:bodyPr wrap="square" rtlCol="0">
+              <a:spAutoFit/>
+            </a:bodyPr>
+            <a:lstStyle/>
+            <a:p>
+              <a:r>
+                <a:rPr lang="en-US" altLang="zh-CN" dirty="0"/>
+                <a:t>(d)</a:t>
+              </a:r>
+              <a:endParaRPr lang="en-US" dirty="0"/>
+            </a:p>
+          </p:txBody>
+        </p:sp>
+      </p:grpSp>
     </p:spTree>
     <p:extLst>
       <p:ext uri="{BB962C8B-B14F-4D97-AF65-F5344CB8AC3E}">
-        <p14:creationId xmlns:p14="http://schemas.microsoft.com/office/powerpoint/2010/main" val="1504016949"/>
+        <p14:creationId xmlns:p14="http://schemas.microsoft.com/office/powerpoint/2010/main" val="2294940093"/>
       </p:ext>
     </p:extLst>
   </p:cSld>
@@ -5031,7 +6532,7 @@
 </p:sld>
 </file>
 
-<file path=ppt/slides/slide3.xml><?xml version="1.0" encoding="utf-8"?>
+<file path=ppt/slides/slide6.xml><?xml version="1.0" encoding="utf-8"?>
 <p:sld xmlns:a="http://schemas.openxmlformats.org/drawingml/2006/main" xmlns:r="http://schemas.openxmlformats.org/officeDocument/2006/relationships" xmlns:p="http://schemas.openxmlformats.org/presentationml/2006/main">
   <p:cSld>
     <p:spTree>
@@ -5050,10 +6551,10 @@
       </p:grpSpPr>
       <p:grpSp>
         <p:nvGrpSpPr>
-          <p:cNvPr id="25" name="组合 24">
+          <p:cNvPr id="10" name="Group 9">
             <a:extLst>
               <a:ext uri="{FF2B5EF4-FFF2-40B4-BE49-F238E27FC236}">
-                <a16:creationId xmlns:a16="http://schemas.microsoft.com/office/drawing/2014/main" id="{CECDF358-048A-90DE-A23B-A15B3D36D924}"/>
+                <a16:creationId xmlns:a16="http://schemas.microsoft.com/office/drawing/2014/main" id="{5C1C4148-A045-4E35-9FED-052B640B1503}"/>
               </a:ext>
             </a:extLst>
           </p:cNvPr>
@@ -5062,18 +6563,18 @@
         </p:nvGrpSpPr>
         <p:grpSpPr>
           <a:xfrm>
-            <a:off x="853699" y="806533"/>
-            <a:ext cx="8173923" cy="5151707"/>
-            <a:chOff x="853699" y="806533"/>
-            <a:chExt cx="8173923" cy="5151707"/>
+            <a:off x="-2933701" y="277810"/>
+            <a:ext cx="14566901" cy="5000626"/>
+            <a:chOff x="-2933701" y="277810"/>
+            <a:chExt cx="14566901" cy="5000626"/>
           </a:xfrm>
         </p:grpSpPr>
         <p:pic>
           <p:nvPicPr>
-            <p:cNvPr id="3" name="图片 2">
+            <p:cNvPr id="2" name="Picture 1">
               <a:extLst>
                 <a:ext uri="{FF2B5EF4-FFF2-40B4-BE49-F238E27FC236}">
-                  <a16:creationId xmlns:a16="http://schemas.microsoft.com/office/drawing/2014/main" id="{E24D5716-B314-93E7-283E-863151F3CF49}"/>
+                  <a16:creationId xmlns:a16="http://schemas.microsoft.com/office/drawing/2014/main" id="{B60CEE32-96B8-49DB-B0DC-93379D9DC511}"/>
                 </a:ext>
               </a:extLst>
             </p:cNvPr>
@@ -5082,515 +6583,545 @@
             </p:cNvPicPr>
             <p:nvPr/>
           </p:nvPicPr>
-          <p:blipFill>
+          <p:blipFill rotWithShape="1">
             <a:blip r:embed="rId2"/>
-            <a:srcRect r="17734"/>
-            <a:stretch>
-              <a:fillRect/>
-            </a:stretch>
+            <a:srcRect l="19571" r="21571"/>
+            <a:stretch/>
           </p:blipFill>
           <p:spPr>
             <a:xfrm>
-              <a:off x="853699" y="899759"/>
-              <a:ext cx="8173923" cy="5058481"/>
+              <a:off x="-2933701" y="277811"/>
+              <a:ext cx="3924301" cy="5000625"/>
             </a:xfrm>
             <a:prstGeom prst="rect">
               <a:avLst/>
             </a:prstGeom>
           </p:spPr>
         </p:pic>
-        <p:grpSp>
-          <p:nvGrpSpPr>
-            <p:cNvPr id="24" name="组合 23">
+        <p:pic>
+          <p:nvPicPr>
+            <p:cNvPr id="3" name="Picture 2">
               <a:extLst>
                 <a:ext uri="{FF2B5EF4-FFF2-40B4-BE49-F238E27FC236}">
-                  <a16:creationId xmlns:a16="http://schemas.microsoft.com/office/drawing/2014/main" id="{FCF94D84-69C9-ADDD-7387-481C927D48AC}"/>
+                  <a16:creationId xmlns:a16="http://schemas.microsoft.com/office/drawing/2014/main" id="{CBD00CF4-986E-43B8-872A-27479AF6FF53}"/>
                 </a:ext>
               </a:extLst>
             </p:cNvPr>
-            <p:cNvGrpSpPr/>
+            <p:cNvPicPr>
+              <a:picLocks noChangeAspect="1"/>
+            </p:cNvPicPr>
             <p:nvPr/>
-          </p:nvGrpSpPr>
-          <p:grpSpPr>
+          </p:nvPicPr>
+          <p:blipFill rotWithShape="1">
+            <a:blip r:embed="rId3"/>
+            <a:srcRect l="19572" r="26000"/>
+            <a:stretch/>
+          </p:blipFill>
+          <p:spPr>
             <a:xfrm>
-              <a:off x="908988" y="806533"/>
-              <a:ext cx="7894190" cy="3444843"/>
-              <a:chOff x="908988" y="806533"/>
-              <a:chExt cx="7894190" cy="3444843"/>
+              <a:off x="990600" y="277811"/>
+              <a:ext cx="3629026" cy="5000625"/>
             </a:xfrm>
-          </p:grpSpPr>
-          <p:sp>
-            <p:nvSpPr>
-              <p:cNvPr id="4" name="文本框 3">
-                <a:extLst>
-                  <a:ext uri="{FF2B5EF4-FFF2-40B4-BE49-F238E27FC236}">
-                    <a16:creationId xmlns:a16="http://schemas.microsoft.com/office/drawing/2014/main" id="{8311176E-878A-E8D8-552C-A9589B3BADEA}"/>
-                  </a:ext>
-                </a:extLst>
-              </p:cNvPr>
-              <p:cNvSpPr txBox="1"/>
-              <p:nvPr/>
-            </p:nvSpPr>
-            <p:spPr>
-              <a:xfrm>
-                <a:off x="1737361" y="806533"/>
-                <a:ext cx="1122218" cy="369332"/>
-              </a:xfrm>
-              <a:prstGeom prst="rect">
-                <a:avLst/>
-              </a:prstGeom>
-              <a:noFill/>
-            </p:spPr>
-            <p:txBody>
-              <a:bodyPr wrap="square" rtlCol="0">
-                <a:spAutoFit/>
-              </a:bodyPr>
-              <a:lstStyle/>
-              <a:p>
-                <a:r>
-                  <a:rPr lang="en-US" altLang="zh-CN" dirty="0"/>
-                  <a:t>zoom1</a:t>
-                </a:r>
-                <a:endParaRPr lang="zh-CN" altLang="en-US" dirty="0"/>
-              </a:p>
-            </p:txBody>
-          </p:sp>
-          <p:sp>
-            <p:nvSpPr>
-              <p:cNvPr id="5" name="文本框 4">
-                <a:extLst>
-                  <a:ext uri="{FF2B5EF4-FFF2-40B4-BE49-F238E27FC236}">
-                    <a16:creationId xmlns:a16="http://schemas.microsoft.com/office/drawing/2014/main" id="{28CAB396-205D-A350-DA0D-B0118F03DA77}"/>
-                  </a:ext>
-                </a:extLst>
-              </p:cNvPr>
-              <p:cNvSpPr txBox="1"/>
-              <p:nvPr/>
-            </p:nvSpPr>
-            <p:spPr>
-              <a:xfrm>
-                <a:off x="3743241" y="806533"/>
-                <a:ext cx="1122218" cy="369332"/>
-              </a:xfrm>
-              <a:prstGeom prst="rect">
-                <a:avLst/>
-              </a:prstGeom>
-              <a:noFill/>
-            </p:spPr>
-            <p:txBody>
-              <a:bodyPr wrap="square" rtlCol="0">
-                <a:spAutoFit/>
-              </a:bodyPr>
-              <a:lstStyle/>
-              <a:p>
-                <a:r>
-                  <a:rPr lang="en-US" altLang="zh-CN" dirty="0"/>
-                  <a:t>zoom2</a:t>
-                </a:r>
-                <a:endParaRPr lang="zh-CN" altLang="en-US" dirty="0"/>
-              </a:p>
-            </p:txBody>
-          </p:sp>
-          <p:sp>
-            <p:nvSpPr>
-              <p:cNvPr id="6" name="文本框 5">
-                <a:extLst>
-                  <a:ext uri="{FF2B5EF4-FFF2-40B4-BE49-F238E27FC236}">
-                    <a16:creationId xmlns:a16="http://schemas.microsoft.com/office/drawing/2014/main" id="{6F34461C-B1D1-D818-ACEC-A2044A1E73BB}"/>
-                  </a:ext>
-                </a:extLst>
-              </p:cNvPr>
-              <p:cNvSpPr txBox="1"/>
-              <p:nvPr/>
-            </p:nvSpPr>
-            <p:spPr>
-              <a:xfrm>
-                <a:off x="6029242" y="806533"/>
-                <a:ext cx="1122218" cy="369332"/>
-              </a:xfrm>
-              <a:prstGeom prst="rect">
-                <a:avLst/>
-              </a:prstGeom>
-              <a:noFill/>
-            </p:spPr>
-            <p:txBody>
-              <a:bodyPr wrap="square" rtlCol="0">
-                <a:spAutoFit/>
-              </a:bodyPr>
-              <a:lstStyle/>
-              <a:p>
-                <a:r>
-                  <a:rPr lang="en-US" altLang="zh-CN" dirty="0"/>
-                  <a:t>focus</a:t>
-                </a:r>
-                <a:endParaRPr lang="zh-CN" altLang="en-US" dirty="0"/>
-              </a:p>
-            </p:txBody>
-          </p:sp>
-          <p:cxnSp>
-            <p:nvCxnSpPr>
-              <p:cNvPr id="8" name="直接箭头连接符 7">
-                <a:extLst>
-                  <a:ext uri="{FF2B5EF4-FFF2-40B4-BE49-F238E27FC236}">
-                    <a16:creationId xmlns:a16="http://schemas.microsoft.com/office/drawing/2014/main" id="{CBCF6EC9-9322-E643-BDA9-1C6EF6C1376E}"/>
-                  </a:ext>
-                </a:extLst>
-              </p:cNvPr>
-              <p:cNvCxnSpPr>
-                <a:cxnSpLocks/>
-              </p:cNvCxnSpPr>
-              <p:nvPr/>
-            </p:nvCxnSpPr>
-            <p:spPr>
-              <a:xfrm>
-                <a:off x="2493818" y="3291840"/>
-                <a:ext cx="1695796" cy="0"/>
-              </a:xfrm>
-              <a:prstGeom prst="straightConnector1">
-                <a:avLst/>
-              </a:prstGeom>
-              <a:ln>
-                <a:solidFill>
-                  <a:schemeClr val="tx1"/>
-                </a:solidFill>
-                <a:headEnd type="triangle"/>
-                <a:tailEnd type="triangle"/>
-              </a:ln>
-            </p:spPr>
-            <p:style>
-              <a:lnRef idx="2">
-                <a:schemeClr val="accent1"/>
-              </a:lnRef>
-              <a:fillRef idx="0">
-                <a:schemeClr val="accent1"/>
-              </a:fillRef>
-              <a:effectRef idx="1">
-                <a:schemeClr val="accent1"/>
-              </a:effectRef>
-              <a:fontRef idx="minor">
-                <a:schemeClr val="tx1"/>
-              </a:fontRef>
-            </p:style>
-          </p:cxnSp>
-          <p:cxnSp>
-            <p:nvCxnSpPr>
-              <p:cNvPr id="13" name="直接箭头连接符 12">
-                <a:extLst>
-                  <a:ext uri="{FF2B5EF4-FFF2-40B4-BE49-F238E27FC236}">
-                    <a16:creationId xmlns:a16="http://schemas.microsoft.com/office/drawing/2014/main" id="{F056C449-DCA6-8956-B1C5-B2F68C0AC8CF}"/>
-                  </a:ext>
-                </a:extLst>
-              </p:cNvPr>
-              <p:cNvCxnSpPr>
-                <a:cxnSpLocks/>
-              </p:cNvCxnSpPr>
-              <p:nvPr/>
-            </p:nvCxnSpPr>
-            <p:spPr>
-              <a:xfrm>
-                <a:off x="4713316" y="3283528"/>
-                <a:ext cx="1047404" cy="0"/>
-              </a:xfrm>
-              <a:prstGeom prst="straightConnector1">
-                <a:avLst/>
-              </a:prstGeom>
-              <a:ln>
-                <a:solidFill>
-                  <a:schemeClr val="tx1"/>
-                </a:solidFill>
-                <a:headEnd type="triangle"/>
-                <a:tailEnd type="triangle"/>
-              </a:ln>
-            </p:spPr>
-            <p:style>
-              <a:lnRef idx="2">
-                <a:schemeClr val="accent1"/>
-              </a:lnRef>
-              <a:fillRef idx="0">
-                <a:schemeClr val="accent1"/>
-              </a:fillRef>
-              <a:effectRef idx="1">
-                <a:schemeClr val="accent1"/>
-              </a:effectRef>
-              <a:fontRef idx="minor">
-                <a:schemeClr val="tx1"/>
-              </a:fontRef>
-            </p:style>
-          </p:cxnSp>
-          <p:sp>
-            <p:nvSpPr>
-              <p:cNvPr id="15" name="文本框 14">
-                <a:extLst>
-                  <a:ext uri="{FF2B5EF4-FFF2-40B4-BE49-F238E27FC236}">
-                    <a16:creationId xmlns:a16="http://schemas.microsoft.com/office/drawing/2014/main" id="{154A3129-484C-CF36-8BC5-247C68AD6B65}"/>
-                  </a:ext>
-                </a:extLst>
-              </p:cNvPr>
-              <p:cNvSpPr txBox="1"/>
-              <p:nvPr/>
-            </p:nvSpPr>
-            <p:spPr>
-              <a:xfrm>
-                <a:off x="2859579" y="2804345"/>
-                <a:ext cx="1512917" cy="369332"/>
-              </a:xfrm>
-              <a:prstGeom prst="rect">
-                <a:avLst/>
-              </a:prstGeom>
-              <a:noFill/>
-            </p:spPr>
-            <p:txBody>
-              <a:bodyPr wrap="square" rtlCol="0">
-                <a:spAutoFit/>
-              </a:bodyPr>
-              <a:lstStyle/>
-              <a:p>
-                <a:r>
-                  <a:rPr lang="en-US" altLang="zh-CN" dirty="0"/>
-                  <a:t>space</a:t>
-                </a:r>
-                <a:endParaRPr lang="zh-CN" altLang="en-US" dirty="0"/>
-              </a:p>
-            </p:txBody>
-          </p:sp>
-          <p:sp>
-            <p:nvSpPr>
-              <p:cNvPr id="16" name="文本框 15">
-                <a:extLst>
-                  <a:ext uri="{FF2B5EF4-FFF2-40B4-BE49-F238E27FC236}">
-                    <a16:creationId xmlns:a16="http://schemas.microsoft.com/office/drawing/2014/main" id="{1A91A54B-790A-C55E-48BA-A50E7142A5C9}"/>
-                  </a:ext>
-                </a:extLst>
-              </p:cNvPr>
-              <p:cNvSpPr txBox="1"/>
-              <p:nvPr/>
-            </p:nvSpPr>
-            <p:spPr>
-              <a:xfrm>
-                <a:off x="4713316" y="2832239"/>
-                <a:ext cx="1512917" cy="369332"/>
-              </a:xfrm>
-              <a:prstGeom prst="rect">
-                <a:avLst/>
-              </a:prstGeom>
-              <a:noFill/>
-            </p:spPr>
-            <p:txBody>
-              <a:bodyPr wrap="square" rtlCol="0">
-                <a:spAutoFit/>
-              </a:bodyPr>
-              <a:lstStyle/>
-              <a:p>
-                <a:r>
-                  <a:rPr lang="en-US" altLang="zh-CN" dirty="0"/>
-                  <a:t>distance</a:t>
-                </a:r>
-                <a:endParaRPr lang="zh-CN" altLang="en-US" dirty="0"/>
-              </a:p>
-            </p:txBody>
-          </p:sp>
-          <p:cxnSp>
-            <p:nvCxnSpPr>
-              <p:cNvPr id="18" name="直接箭头连接符 17">
-                <a:extLst>
-                  <a:ext uri="{FF2B5EF4-FFF2-40B4-BE49-F238E27FC236}">
-                    <a16:creationId xmlns:a16="http://schemas.microsoft.com/office/drawing/2014/main" id="{A2CC0343-ACE3-05EF-CF36-BE2CF3164EEB}"/>
-                  </a:ext>
-                </a:extLst>
-              </p:cNvPr>
-              <p:cNvCxnSpPr/>
-              <p:nvPr/>
-            </p:nvCxnSpPr>
-            <p:spPr>
-              <a:xfrm>
-                <a:off x="1454727" y="3075709"/>
-                <a:ext cx="0" cy="490451"/>
-              </a:xfrm>
-              <a:prstGeom prst="straightConnector1">
-                <a:avLst/>
-              </a:prstGeom>
-              <a:ln>
-                <a:solidFill>
-                  <a:schemeClr val="tx1"/>
-                </a:solidFill>
-                <a:headEnd type="triangle"/>
-                <a:tailEnd type="triangle"/>
-              </a:ln>
-            </p:spPr>
-            <p:style>
-              <a:lnRef idx="2">
-                <a:schemeClr val="accent1"/>
-              </a:lnRef>
-              <a:fillRef idx="0">
-                <a:schemeClr val="accent1"/>
-              </a:fillRef>
-              <a:effectRef idx="1">
-                <a:schemeClr val="accent1"/>
-              </a:effectRef>
-              <a:fontRef idx="minor">
-                <a:schemeClr val="tx1"/>
-              </a:fontRef>
-            </p:style>
-          </p:cxnSp>
-          <p:sp>
-            <p:nvSpPr>
-              <p:cNvPr id="19" name="文本框 18">
-                <a:extLst>
-                  <a:ext uri="{FF2B5EF4-FFF2-40B4-BE49-F238E27FC236}">
-                    <a16:creationId xmlns:a16="http://schemas.microsoft.com/office/drawing/2014/main" id="{8779E524-47E1-4C57-05B8-C48460F409E8}"/>
-                  </a:ext>
-                </a:extLst>
-              </p:cNvPr>
-              <p:cNvSpPr txBox="1"/>
-              <p:nvPr/>
-            </p:nvSpPr>
-            <p:spPr>
-              <a:xfrm>
-                <a:off x="908988" y="3117274"/>
-                <a:ext cx="490451" cy="369332"/>
-              </a:xfrm>
-              <a:prstGeom prst="rect">
-                <a:avLst/>
-              </a:prstGeom>
-              <a:noFill/>
-            </p:spPr>
-            <p:txBody>
-              <a:bodyPr wrap="square" rtlCol="0">
-                <a:spAutoFit/>
-              </a:bodyPr>
-              <a:lstStyle/>
-              <a:p>
-                <a:r>
-                  <a:rPr lang="en-US" altLang="zh-CN" dirty="0"/>
-                  <a:t>h1</a:t>
-                </a:r>
-                <a:endParaRPr lang="zh-CN" altLang="en-US" dirty="0"/>
-              </a:p>
-            </p:txBody>
-          </p:sp>
-          <p:sp>
-            <p:nvSpPr>
-              <p:cNvPr id="20" name="文本框 19">
-                <a:extLst>
-                  <a:ext uri="{FF2B5EF4-FFF2-40B4-BE49-F238E27FC236}">
-                    <a16:creationId xmlns:a16="http://schemas.microsoft.com/office/drawing/2014/main" id="{45BACAE7-F4F6-58C7-2201-93EFF15C44A9}"/>
-                  </a:ext>
-                </a:extLst>
-              </p:cNvPr>
-              <p:cNvSpPr txBox="1"/>
-              <p:nvPr/>
-            </p:nvSpPr>
-            <p:spPr>
-              <a:xfrm>
-                <a:off x="7268094" y="3075709"/>
-                <a:ext cx="623455" cy="369332"/>
-              </a:xfrm>
-              <a:prstGeom prst="rect">
-                <a:avLst/>
-              </a:prstGeom>
-              <a:noFill/>
-            </p:spPr>
-            <p:txBody>
-              <a:bodyPr wrap="square" rtlCol="0">
-                <a:spAutoFit/>
-              </a:bodyPr>
-              <a:lstStyle/>
-              <a:p>
-                <a:r>
-                  <a:rPr lang="en-US" altLang="zh-CN" dirty="0"/>
-                  <a:t>h2</a:t>
-                </a:r>
-                <a:endParaRPr lang="zh-CN" altLang="en-US" dirty="0"/>
-              </a:p>
-            </p:txBody>
-          </p:sp>
-          <p:cxnSp>
-            <p:nvCxnSpPr>
-              <p:cNvPr id="21" name="直接箭头连接符 20">
-                <a:extLst>
-                  <a:ext uri="{FF2B5EF4-FFF2-40B4-BE49-F238E27FC236}">
-                    <a16:creationId xmlns:a16="http://schemas.microsoft.com/office/drawing/2014/main" id="{8017C710-013A-FB28-B4FB-4DF4F4764D4E}"/>
-                  </a:ext>
-                </a:extLst>
-              </p:cNvPr>
-              <p:cNvCxnSpPr>
-                <a:cxnSpLocks/>
-              </p:cNvCxnSpPr>
-              <p:nvPr/>
-            </p:nvCxnSpPr>
-            <p:spPr>
-              <a:xfrm>
-                <a:off x="7268094" y="2960317"/>
-                <a:ext cx="0" cy="730534"/>
-              </a:xfrm>
-              <a:prstGeom prst="straightConnector1">
-                <a:avLst/>
-              </a:prstGeom>
-              <a:ln>
-                <a:solidFill>
-                  <a:schemeClr val="tx1"/>
-                </a:solidFill>
-                <a:headEnd type="triangle"/>
-                <a:tailEnd type="triangle"/>
-              </a:ln>
-            </p:spPr>
-            <p:style>
-              <a:lnRef idx="2">
-                <a:schemeClr val="accent1"/>
-              </a:lnRef>
-              <a:fillRef idx="0">
-                <a:schemeClr val="accent1"/>
-              </a:fillRef>
-              <a:effectRef idx="1">
-                <a:schemeClr val="accent1"/>
-              </a:effectRef>
-              <a:fontRef idx="minor">
-                <a:schemeClr val="tx1"/>
-              </a:fontRef>
-            </p:style>
-          </p:cxnSp>
-          <p:sp>
-            <p:nvSpPr>
-              <p:cNvPr id="23" name="文本框 22">
-                <a:extLst>
-                  <a:ext uri="{FF2B5EF4-FFF2-40B4-BE49-F238E27FC236}">
-                    <a16:creationId xmlns:a16="http://schemas.microsoft.com/office/drawing/2014/main" id="{93D42117-8363-BCAA-A800-8F6810C7BDA2}"/>
-                  </a:ext>
-                </a:extLst>
-              </p:cNvPr>
-              <p:cNvSpPr txBox="1"/>
-              <p:nvPr/>
-            </p:nvSpPr>
-            <p:spPr>
-              <a:xfrm>
-                <a:off x="7176398" y="3882044"/>
-                <a:ext cx="1626780" cy="369332"/>
-              </a:xfrm>
-              <a:prstGeom prst="rect">
-                <a:avLst/>
-              </a:prstGeom>
-              <a:noFill/>
-            </p:spPr>
-            <p:txBody>
-              <a:bodyPr wrap="square" rtlCol="0">
-                <a:spAutoFit/>
-              </a:bodyPr>
-              <a:lstStyle/>
-              <a:p>
-                <a:r>
-                  <a:rPr lang="en-US" altLang="zh-CN" dirty="0"/>
-                  <a:t>Amp=h2/h1</a:t>
-                </a:r>
-                <a:endParaRPr lang="zh-CN" altLang="en-US" dirty="0"/>
-              </a:p>
-            </p:txBody>
-          </p:sp>
-        </p:grpSp>
+            <a:prstGeom prst="rect">
+              <a:avLst/>
+            </a:prstGeom>
+          </p:spPr>
+        </p:pic>
+        <p:pic>
+          <p:nvPicPr>
+            <p:cNvPr id="4" name="Picture 3">
+              <a:extLst>
+                <a:ext uri="{FF2B5EF4-FFF2-40B4-BE49-F238E27FC236}">
+                  <a16:creationId xmlns:a16="http://schemas.microsoft.com/office/drawing/2014/main" id="{87D59AE4-D667-49EA-9781-25B0BE52A5D0}"/>
+                </a:ext>
+              </a:extLst>
+            </p:cNvPr>
+            <p:cNvPicPr>
+              <a:picLocks noChangeAspect="1"/>
+            </p:cNvPicPr>
+            <p:nvPr/>
+          </p:nvPicPr>
+          <p:blipFill rotWithShape="1">
+            <a:blip r:embed="rId4"/>
+            <a:srcRect l="19143" r="20714"/>
+            <a:stretch/>
+          </p:blipFill>
+          <p:spPr>
+            <a:xfrm>
+              <a:off x="4619626" y="277810"/>
+              <a:ext cx="4010025" cy="5000625"/>
+            </a:xfrm>
+            <a:prstGeom prst="rect">
+              <a:avLst/>
+            </a:prstGeom>
+          </p:spPr>
+        </p:pic>
+        <p:pic>
+          <p:nvPicPr>
+            <p:cNvPr id="5" name="Picture 4">
+              <a:extLst>
+                <a:ext uri="{FF2B5EF4-FFF2-40B4-BE49-F238E27FC236}">
+                  <a16:creationId xmlns:a16="http://schemas.microsoft.com/office/drawing/2014/main" id="{219D4F58-EFA8-4B86-9C27-6C8D6A826A23}"/>
+                </a:ext>
+              </a:extLst>
+            </p:cNvPr>
+            <p:cNvPicPr>
+              <a:picLocks noChangeAspect="1"/>
+            </p:cNvPicPr>
+            <p:nvPr/>
+          </p:nvPicPr>
+          <p:blipFill rotWithShape="1">
+            <a:blip r:embed="rId5"/>
+            <a:srcRect l="25809" r="31143"/>
+            <a:stretch/>
+          </p:blipFill>
+          <p:spPr>
+            <a:xfrm>
+              <a:off x="8763000" y="277810"/>
+              <a:ext cx="2870200" cy="5000625"/>
+            </a:xfrm>
+            <a:prstGeom prst="rect">
+              <a:avLst/>
+            </a:prstGeom>
+          </p:spPr>
+        </p:pic>
+        <mc:AlternateContent xmlns:mc="http://schemas.openxmlformats.org/markup-compatibility/2006" xmlns:a14="http://schemas.microsoft.com/office/drawing/2010/main">
+          <mc:Choice Requires="a14">
+            <p:sp>
+              <p:nvSpPr>
+                <p:cNvPr id="6" name="TextBox 5">
+                  <a:extLst>
+                    <a:ext uri="{FF2B5EF4-FFF2-40B4-BE49-F238E27FC236}">
+                      <a16:creationId xmlns:a16="http://schemas.microsoft.com/office/drawing/2014/main" id="{FD1EE88A-4368-4B91-B288-3242013561C0}"/>
+                    </a:ext>
+                  </a:extLst>
+                </p:cNvPr>
+                <p:cNvSpPr txBox="1"/>
+                <p:nvPr/>
+              </p:nvSpPr>
+              <p:spPr>
+                <a:xfrm>
+                  <a:off x="-2933701" y="431800"/>
+                  <a:ext cx="619126" cy="369332"/>
+                </a:xfrm>
+                <a:prstGeom prst="rect">
+                  <a:avLst/>
+                </a:prstGeom>
+                <a:noFill/>
+              </p:spPr>
+              <p:txBody>
+                <a:bodyPr wrap="square" rtlCol="0">
+                  <a:spAutoFit/>
+                </a:bodyPr>
+                <a:lstStyle/>
+                <a:p>
+                  <a:pPr/>
+                  <a14:m>
+                    <m:oMathPara xmlns:m="http://schemas.openxmlformats.org/officeDocument/2006/math">
+                      <m:oMathParaPr>
+                        <m:jc m:val="centerGroup"/>
+                      </m:oMathParaPr>
+                      <m:oMath xmlns:m="http://schemas.openxmlformats.org/officeDocument/2006/math">
+                        <m:r>
+                          <a:rPr lang="en-US" b="0" i="1" smtClean="0">
+                            <a:latin typeface="Cambria Math" panose="02040503050406030204" pitchFamily="18" charset="0"/>
+                          </a:rPr>
+                          <m:t>(</m:t>
+                        </m:r>
+                        <m:r>
+                          <a:rPr lang="en-US" b="0" i="1" smtClean="0">
+                            <a:latin typeface="Cambria Math" panose="02040503050406030204" pitchFamily="18" charset="0"/>
+                          </a:rPr>
+                          <m:t>𝑎</m:t>
+                        </m:r>
+                        <m:r>
+                          <a:rPr lang="en-US" b="0" i="1" smtClean="0">
+                            <a:latin typeface="Cambria Math" panose="02040503050406030204" pitchFamily="18" charset="0"/>
+                          </a:rPr>
+                          <m:t>)</m:t>
+                        </m:r>
+                      </m:oMath>
+                    </m:oMathPara>
+                  </a14:m>
+                  <a:endParaRPr lang="en-US" dirty="0"/>
+                </a:p>
+              </p:txBody>
+            </p:sp>
+          </mc:Choice>
+          <mc:Fallback xmlns="">
+            <p:sp>
+              <p:nvSpPr>
+                <p:cNvPr id="6" name="TextBox 5">
+                  <a:extLst>
+                    <a:ext uri="{FF2B5EF4-FFF2-40B4-BE49-F238E27FC236}">
+                      <a16:creationId xmlns:a16="http://schemas.microsoft.com/office/drawing/2014/main" id="{FD1EE88A-4368-4B91-B288-3242013561C0}"/>
+                    </a:ext>
+                  </a:extLst>
+                </p:cNvPr>
+                <p:cNvSpPr txBox="1">
+                  <a:spLocks noRot="1" noChangeAspect="1" noMove="1" noResize="1" noEditPoints="1" noAdjustHandles="1" noChangeArrowheads="1" noChangeShapeType="1" noTextEdit="1"/>
+                </p:cNvSpPr>
+                <p:nvPr/>
+              </p:nvSpPr>
+              <p:spPr>
+                <a:xfrm>
+                  <a:off x="-2933701" y="431800"/>
+                  <a:ext cx="619126" cy="369332"/>
+                </a:xfrm>
+                <a:prstGeom prst="rect">
+                  <a:avLst/>
+                </a:prstGeom>
+                <a:blipFill>
+                  <a:blip r:embed="rId6"/>
+                  <a:stretch>
+                    <a:fillRect b="-13333"/>
+                  </a:stretch>
+                </a:blipFill>
+              </p:spPr>
+              <p:txBody>
+                <a:bodyPr/>
+                <a:lstStyle/>
+                <a:p>
+                  <a:r>
+                    <a:rPr lang="en-US">
+                      <a:noFill/>
+                    </a:rPr>
+                    <a:t> </a:t>
+                  </a:r>
+                </a:p>
+              </p:txBody>
+            </p:sp>
+          </mc:Fallback>
+        </mc:AlternateContent>
+        <mc:AlternateContent xmlns:mc="http://schemas.openxmlformats.org/markup-compatibility/2006" xmlns:a14="http://schemas.microsoft.com/office/drawing/2010/main">
+          <mc:Choice Requires="a14">
+            <p:sp>
+              <p:nvSpPr>
+                <p:cNvPr id="7" name="TextBox 6">
+                  <a:extLst>
+                    <a:ext uri="{FF2B5EF4-FFF2-40B4-BE49-F238E27FC236}">
+                      <a16:creationId xmlns:a16="http://schemas.microsoft.com/office/drawing/2014/main" id="{A544705E-B89F-4A9C-A5BD-D9FADA8FE9A3}"/>
+                    </a:ext>
+                  </a:extLst>
+                </p:cNvPr>
+                <p:cNvSpPr txBox="1"/>
+                <p:nvPr/>
+              </p:nvSpPr>
+              <p:spPr>
+                <a:xfrm>
+                  <a:off x="1123949" y="431800"/>
+                  <a:ext cx="619126" cy="369332"/>
+                </a:xfrm>
+                <a:prstGeom prst="rect">
+                  <a:avLst/>
+                </a:prstGeom>
+                <a:noFill/>
+              </p:spPr>
+              <p:txBody>
+                <a:bodyPr wrap="square" rtlCol="0">
+                  <a:spAutoFit/>
+                </a:bodyPr>
+                <a:lstStyle/>
+                <a:p>
+                  <a:pPr/>
+                  <a14:m>
+                    <m:oMathPara xmlns:m="http://schemas.openxmlformats.org/officeDocument/2006/math">
+                      <m:oMathParaPr>
+                        <m:jc m:val="centerGroup"/>
+                      </m:oMathParaPr>
+                      <m:oMath xmlns:m="http://schemas.openxmlformats.org/officeDocument/2006/math">
+                        <m:r>
+                          <a:rPr lang="en-US" b="0" i="1" smtClean="0">
+                            <a:latin typeface="Cambria Math" panose="02040503050406030204" pitchFamily="18" charset="0"/>
+                          </a:rPr>
+                          <m:t>(</m:t>
+                        </m:r>
+                        <m:r>
+                          <a:rPr lang="en-US" b="0" i="1" smtClean="0">
+                            <a:latin typeface="Cambria Math" panose="02040503050406030204" pitchFamily="18" charset="0"/>
+                          </a:rPr>
+                          <m:t>𝑏</m:t>
+                        </m:r>
+                        <m:r>
+                          <a:rPr lang="en-US" b="0" i="1" smtClean="0">
+                            <a:latin typeface="Cambria Math" panose="02040503050406030204" pitchFamily="18" charset="0"/>
+                          </a:rPr>
+                          <m:t>)</m:t>
+                        </m:r>
+                      </m:oMath>
+                    </m:oMathPara>
+                  </a14:m>
+                  <a:endParaRPr lang="en-US" dirty="0"/>
+                </a:p>
+              </p:txBody>
+            </p:sp>
+          </mc:Choice>
+          <mc:Fallback xmlns="">
+            <p:sp>
+              <p:nvSpPr>
+                <p:cNvPr id="7" name="TextBox 6">
+                  <a:extLst>
+                    <a:ext uri="{FF2B5EF4-FFF2-40B4-BE49-F238E27FC236}">
+                      <a16:creationId xmlns:a16="http://schemas.microsoft.com/office/drawing/2014/main" id="{A544705E-B89F-4A9C-A5BD-D9FADA8FE9A3}"/>
+                    </a:ext>
+                  </a:extLst>
+                </p:cNvPr>
+                <p:cNvSpPr txBox="1">
+                  <a:spLocks noRot="1" noChangeAspect="1" noMove="1" noResize="1" noEditPoints="1" noAdjustHandles="1" noChangeArrowheads="1" noChangeShapeType="1" noTextEdit="1"/>
+                </p:cNvSpPr>
+                <p:nvPr/>
+              </p:nvSpPr>
+              <p:spPr>
+                <a:xfrm>
+                  <a:off x="1123949" y="431800"/>
+                  <a:ext cx="619126" cy="369332"/>
+                </a:xfrm>
+                <a:prstGeom prst="rect">
+                  <a:avLst/>
+                </a:prstGeom>
+                <a:blipFill>
+                  <a:blip r:embed="rId7"/>
+                  <a:stretch>
+                    <a:fillRect b="-13333"/>
+                  </a:stretch>
+                </a:blipFill>
+              </p:spPr>
+              <p:txBody>
+                <a:bodyPr/>
+                <a:lstStyle/>
+                <a:p>
+                  <a:r>
+                    <a:rPr lang="en-US">
+                      <a:noFill/>
+                    </a:rPr>
+                    <a:t> </a:t>
+                  </a:r>
+                </a:p>
+              </p:txBody>
+            </p:sp>
+          </mc:Fallback>
+        </mc:AlternateContent>
+        <mc:AlternateContent xmlns:mc="http://schemas.openxmlformats.org/markup-compatibility/2006" xmlns:a14="http://schemas.microsoft.com/office/drawing/2010/main">
+          <mc:Choice Requires="a14">
+            <p:sp>
+              <p:nvSpPr>
+                <p:cNvPr id="8" name="TextBox 7">
+                  <a:extLst>
+                    <a:ext uri="{FF2B5EF4-FFF2-40B4-BE49-F238E27FC236}">
+                      <a16:creationId xmlns:a16="http://schemas.microsoft.com/office/drawing/2014/main" id="{71A5BF0F-41EB-49D1-8564-83D66631DC45}"/>
+                    </a:ext>
+                  </a:extLst>
+                </p:cNvPr>
+                <p:cNvSpPr txBox="1"/>
+                <p:nvPr/>
+              </p:nvSpPr>
+              <p:spPr>
+                <a:xfrm>
+                  <a:off x="4784726" y="431800"/>
+                  <a:ext cx="619126" cy="369332"/>
+                </a:xfrm>
+                <a:prstGeom prst="rect">
+                  <a:avLst/>
+                </a:prstGeom>
+                <a:noFill/>
+              </p:spPr>
+              <p:txBody>
+                <a:bodyPr wrap="square" rtlCol="0">
+                  <a:spAutoFit/>
+                </a:bodyPr>
+                <a:lstStyle/>
+                <a:p>
+                  <a:pPr/>
+                  <a14:m>
+                    <m:oMathPara xmlns:m="http://schemas.openxmlformats.org/officeDocument/2006/math">
+                      <m:oMathParaPr>
+                        <m:jc m:val="centerGroup"/>
+                      </m:oMathParaPr>
+                      <m:oMath xmlns:m="http://schemas.openxmlformats.org/officeDocument/2006/math">
+                        <m:r>
+                          <a:rPr lang="en-US" b="0" i="1" smtClean="0">
+                            <a:latin typeface="Cambria Math" panose="02040503050406030204" pitchFamily="18" charset="0"/>
+                          </a:rPr>
+                          <m:t>(</m:t>
+                        </m:r>
+                        <m:r>
+                          <a:rPr lang="en-US" b="0" i="1" smtClean="0">
+                            <a:latin typeface="Cambria Math" panose="02040503050406030204" pitchFamily="18" charset="0"/>
+                          </a:rPr>
+                          <m:t>𝑐</m:t>
+                        </m:r>
+                        <m:r>
+                          <a:rPr lang="en-US" b="0" i="1" smtClean="0">
+                            <a:latin typeface="Cambria Math" panose="02040503050406030204" pitchFamily="18" charset="0"/>
+                          </a:rPr>
+                          <m:t>)</m:t>
+                        </m:r>
+                      </m:oMath>
+                    </m:oMathPara>
+                  </a14:m>
+                  <a:endParaRPr lang="en-US" dirty="0"/>
+                </a:p>
+              </p:txBody>
+            </p:sp>
+          </mc:Choice>
+          <mc:Fallback xmlns="">
+            <p:sp>
+              <p:nvSpPr>
+                <p:cNvPr id="8" name="TextBox 7">
+                  <a:extLst>
+                    <a:ext uri="{FF2B5EF4-FFF2-40B4-BE49-F238E27FC236}">
+                      <a16:creationId xmlns:a16="http://schemas.microsoft.com/office/drawing/2014/main" id="{71A5BF0F-41EB-49D1-8564-83D66631DC45}"/>
+                    </a:ext>
+                  </a:extLst>
+                </p:cNvPr>
+                <p:cNvSpPr txBox="1">
+                  <a:spLocks noRot="1" noChangeAspect="1" noMove="1" noResize="1" noEditPoints="1" noAdjustHandles="1" noChangeArrowheads="1" noChangeShapeType="1" noTextEdit="1"/>
+                </p:cNvSpPr>
+                <p:nvPr/>
+              </p:nvSpPr>
+              <p:spPr>
+                <a:xfrm>
+                  <a:off x="4784726" y="431800"/>
+                  <a:ext cx="619126" cy="369332"/>
+                </a:xfrm>
+                <a:prstGeom prst="rect">
+                  <a:avLst/>
+                </a:prstGeom>
+                <a:blipFill>
+                  <a:blip r:embed="rId8"/>
+                  <a:stretch>
+                    <a:fillRect b="-13333"/>
+                  </a:stretch>
+                </a:blipFill>
+              </p:spPr>
+              <p:txBody>
+                <a:bodyPr/>
+                <a:lstStyle/>
+                <a:p>
+                  <a:r>
+                    <a:rPr lang="en-US">
+                      <a:noFill/>
+                    </a:rPr>
+                    <a:t> </a:t>
+                  </a:r>
+                </a:p>
+              </p:txBody>
+            </p:sp>
+          </mc:Fallback>
+        </mc:AlternateContent>
+        <mc:AlternateContent xmlns:mc="http://schemas.openxmlformats.org/markup-compatibility/2006" xmlns:a14="http://schemas.microsoft.com/office/drawing/2010/main">
+          <mc:Choice Requires="a14">
+            <p:sp>
+              <p:nvSpPr>
+                <p:cNvPr id="9" name="TextBox 8">
+                  <a:extLst>
+                    <a:ext uri="{FF2B5EF4-FFF2-40B4-BE49-F238E27FC236}">
+                      <a16:creationId xmlns:a16="http://schemas.microsoft.com/office/drawing/2014/main" id="{7A7C52DC-4069-438A-B8CA-BADCA154D397}"/>
+                    </a:ext>
+                  </a:extLst>
+                </p:cNvPr>
+                <p:cNvSpPr txBox="1"/>
+                <p:nvPr/>
+              </p:nvSpPr>
+              <p:spPr>
+                <a:xfrm>
+                  <a:off x="8763000" y="431800"/>
+                  <a:ext cx="619126" cy="369332"/>
+                </a:xfrm>
+                <a:prstGeom prst="rect">
+                  <a:avLst/>
+                </a:prstGeom>
+                <a:noFill/>
+              </p:spPr>
+              <p:txBody>
+                <a:bodyPr wrap="square" rtlCol="0">
+                  <a:spAutoFit/>
+                </a:bodyPr>
+                <a:lstStyle/>
+                <a:p>
+                  <a:pPr/>
+                  <a14:m>
+                    <m:oMathPara xmlns:m="http://schemas.openxmlformats.org/officeDocument/2006/math">
+                      <m:oMathParaPr>
+                        <m:jc m:val="centerGroup"/>
+                      </m:oMathParaPr>
+                      <m:oMath xmlns:m="http://schemas.openxmlformats.org/officeDocument/2006/math">
+                        <m:r>
+                          <a:rPr lang="en-US" b="0" i="1" smtClean="0">
+                            <a:latin typeface="Cambria Math" panose="02040503050406030204" pitchFamily="18" charset="0"/>
+                          </a:rPr>
+                          <m:t>(</m:t>
+                        </m:r>
+                        <m:r>
+                          <a:rPr lang="en-US" b="0" i="1" smtClean="0">
+                            <a:latin typeface="Cambria Math" panose="02040503050406030204" pitchFamily="18" charset="0"/>
+                          </a:rPr>
+                          <m:t>𝑑</m:t>
+                        </m:r>
+                        <m:r>
+                          <a:rPr lang="en-US" b="0" i="1" smtClean="0">
+                            <a:latin typeface="Cambria Math" panose="02040503050406030204" pitchFamily="18" charset="0"/>
+                          </a:rPr>
+                          <m:t>)</m:t>
+                        </m:r>
+                      </m:oMath>
+                    </m:oMathPara>
+                  </a14:m>
+                  <a:endParaRPr lang="en-US" dirty="0"/>
+                </a:p>
+              </p:txBody>
+            </p:sp>
+          </mc:Choice>
+          <mc:Fallback xmlns="">
+            <p:sp>
+              <p:nvSpPr>
+                <p:cNvPr id="9" name="TextBox 8">
+                  <a:extLst>
+                    <a:ext uri="{FF2B5EF4-FFF2-40B4-BE49-F238E27FC236}">
+                      <a16:creationId xmlns:a16="http://schemas.microsoft.com/office/drawing/2014/main" id="{7A7C52DC-4069-438A-B8CA-BADCA154D397}"/>
+                    </a:ext>
+                  </a:extLst>
+                </p:cNvPr>
+                <p:cNvSpPr txBox="1">
+                  <a:spLocks noRot="1" noChangeAspect="1" noMove="1" noResize="1" noEditPoints="1" noAdjustHandles="1" noChangeArrowheads="1" noChangeShapeType="1" noTextEdit="1"/>
+                </p:cNvSpPr>
+                <p:nvPr/>
+              </p:nvSpPr>
+              <p:spPr>
+                <a:xfrm>
+                  <a:off x="8763000" y="431800"/>
+                  <a:ext cx="619126" cy="369332"/>
+                </a:xfrm>
+                <a:prstGeom prst="rect">
+                  <a:avLst/>
+                </a:prstGeom>
+                <a:blipFill>
+                  <a:blip r:embed="rId9"/>
+                  <a:stretch>
+                    <a:fillRect b="-13333"/>
+                  </a:stretch>
+                </a:blipFill>
+              </p:spPr>
+              <p:txBody>
+                <a:bodyPr/>
+                <a:lstStyle/>
+                <a:p>
+                  <a:r>
+                    <a:rPr lang="en-US">
+                      <a:noFill/>
+                    </a:rPr>
+                    <a:t> </a:t>
+                  </a:r>
+                </a:p>
+              </p:txBody>
+            </p:sp>
+          </mc:Fallback>
+        </mc:AlternateContent>
       </p:grpSp>
     </p:spTree>
     <p:extLst>
       <p:ext uri="{BB962C8B-B14F-4D97-AF65-F5344CB8AC3E}">
-        <p14:creationId xmlns:p14="http://schemas.microsoft.com/office/powerpoint/2010/main" val="1235878569"/>
+        <p14:creationId xmlns:p14="http://schemas.microsoft.com/office/powerpoint/2010/main" val="2933795305"/>
       </p:ext>
     </p:extLst>
   </p:cSld>
@@ -5600,7 +7131,7 @@
 </p:sld>
 </file>
 
-<file path=ppt/slides/slide4.xml><?xml version="1.0" encoding="utf-8"?>
+<file path=ppt/slides/slide7.xml><?xml version="1.0" encoding="utf-8"?>
 <p:sld xmlns:a="http://schemas.openxmlformats.org/drawingml/2006/main" xmlns:r="http://schemas.openxmlformats.org/officeDocument/2006/relationships" xmlns:p="http://schemas.openxmlformats.org/presentationml/2006/main">
   <p:cSld>
     <p:spTree>
@@ -5617,10 +7148,162 @@
           <a:chExt cx="0" cy="0"/>
         </a:xfrm>
       </p:grpSpPr>
+      <p:grpSp>
+        <p:nvGrpSpPr>
+          <p:cNvPr id="6" name="Group 5">
+            <a:extLst>
+              <a:ext uri="{FF2B5EF4-FFF2-40B4-BE49-F238E27FC236}">
+                <a16:creationId xmlns:a16="http://schemas.microsoft.com/office/drawing/2014/main" id="{F21AF503-6FA5-4A7A-BE7F-A7D239DEDD5A}"/>
+              </a:ext>
+            </a:extLst>
+          </p:cNvPr>
+          <p:cNvGrpSpPr/>
+          <p:nvPr/>
+        </p:nvGrpSpPr>
+        <p:grpSpPr>
+          <a:xfrm>
+            <a:off x="681318" y="489416"/>
+            <a:ext cx="10128997" cy="5000625"/>
+            <a:chOff x="681318" y="489416"/>
+            <a:chExt cx="10128997" cy="5000625"/>
+          </a:xfrm>
+        </p:grpSpPr>
+        <p:pic>
+          <p:nvPicPr>
+            <p:cNvPr id="2" name="Picture 1">
+              <a:extLst>
+                <a:ext uri="{FF2B5EF4-FFF2-40B4-BE49-F238E27FC236}">
+                  <a16:creationId xmlns:a16="http://schemas.microsoft.com/office/drawing/2014/main" id="{7007A657-FA08-4BD0-B920-50B2E0F0FFE5}"/>
+                </a:ext>
+              </a:extLst>
+            </p:cNvPr>
+            <p:cNvPicPr>
+              <a:picLocks noChangeAspect="1"/>
+            </p:cNvPicPr>
+            <p:nvPr/>
+          </p:nvPicPr>
+          <p:blipFill rotWithShape="1">
+            <a:blip r:embed="rId2"/>
+            <a:srcRect l="25664" t="6706" r="31176"/>
+            <a:stretch/>
+          </p:blipFill>
+          <p:spPr>
+            <a:xfrm>
+              <a:off x="681318" y="753035"/>
+              <a:ext cx="2877670" cy="4665289"/>
+            </a:xfrm>
+            <a:prstGeom prst="rect">
+              <a:avLst/>
+            </a:prstGeom>
+          </p:spPr>
+        </p:pic>
+        <p:pic>
+          <p:nvPicPr>
+            <p:cNvPr id="3" name="Picture 2">
+              <a:extLst>
+                <a:ext uri="{FF2B5EF4-FFF2-40B4-BE49-F238E27FC236}">
+                  <a16:creationId xmlns:a16="http://schemas.microsoft.com/office/drawing/2014/main" id="{C6789A88-584D-4C55-8C40-5A5A3B2D3129}"/>
+                </a:ext>
+              </a:extLst>
+            </p:cNvPr>
+            <p:cNvPicPr>
+              <a:picLocks noChangeAspect="1"/>
+            </p:cNvPicPr>
+            <p:nvPr/>
+          </p:nvPicPr>
+          <p:blipFill>
+            <a:blip r:embed="rId3"/>
+            <a:stretch>
+              <a:fillRect/>
+            </a:stretch>
+          </p:blipFill>
+          <p:spPr>
+            <a:xfrm>
+              <a:off x="4142815" y="489416"/>
+              <a:ext cx="6667500" cy="5000625"/>
+            </a:xfrm>
+            <a:prstGeom prst="rect">
+              <a:avLst/>
+            </a:prstGeom>
+          </p:spPr>
+        </p:pic>
+        <p:sp>
+          <p:nvSpPr>
+            <p:cNvPr id="4" name="TextBox 3">
+              <a:extLst>
+                <a:ext uri="{FF2B5EF4-FFF2-40B4-BE49-F238E27FC236}">
+                  <a16:creationId xmlns:a16="http://schemas.microsoft.com/office/drawing/2014/main" id="{C28BABBD-A57F-4DE7-92C5-29D9D10D3617}"/>
+                </a:ext>
+              </a:extLst>
+            </p:cNvPr>
+            <p:cNvSpPr txBox="1"/>
+            <p:nvPr/>
+          </p:nvSpPr>
+          <p:spPr>
+            <a:xfrm>
+              <a:off x="833718" y="568369"/>
+              <a:ext cx="762000" cy="369332"/>
+            </a:xfrm>
+            <a:prstGeom prst="rect">
+              <a:avLst/>
+            </a:prstGeom>
+            <a:noFill/>
+          </p:spPr>
+          <p:txBody>
+            <a:bodyPr wrap="square" rtlCol="0">
+              <a:spAutoFit/>
+            </a:bodyPr>
+            <a:lstStyle/>
+            <a:p>
+              <a:r>
+                <a:rPr lang="en-US" altLang="zh-CN" dirty="0"/>
+                <a:t>(a)</a:t>
+              </a:r>
+              <a:endParaRPr lang="en-US" dirty="0"/>
+            </a:p>
+          </p:txBody>
+        </p:sp>
+        <p:sp>
+          <p:nvSpPr>
+            <p:cNvPr id="5" name="TextBox 4">
+              <a:extLst>
+                <a:ext uri="{FF2B5EF4-FFF2-40B4-BE49-F238E27FC236}">
+                  <a16:creationId xmlns:a16="http://schemas.microsoft.com/office/drawing/2014/main" id="{9B09A73C-39CC-4EF3-BD72-3081792A42AB}"/>
+                </a:ext>
+              </a:extLst>
+            </p:cNvPr>
+            <p:cNvSpPr txBox="1"/>
+            <p:nvPr/>
+          </p:nvSpPr>
+          <p:spPr>
+            <a:xfrm>
+              <a:off x="4451536" y="568369"/>
+              <a:ext cx="762000" cy="369332"/>
+            </a:xfrm>
+            <a:prstGeom prst="rect">
+              <a:avLst/>
+            </a:prstGeom>
+            <a:noFill/>
+          </p:spPr>
+          <p:txBody>
+            <a:bodyPr wrap="square" rtlCol="0">
+              <a:spAutoFit/>
+            </a:bodyPr>
+            <a:lstStyle/>
+            <a:p>
+              <a:r>
+                <a:rPr lang="en-US" altLang="zh-CN" dirty="0"/>
+                <a:t>(b)</a:t>
+              </a:r>
+              <a:endParaRPr lang="en-US" dirty="0"/>
+            </a:p>
+          </p:txBody>
+        </p:sp>
+      </p:grpSp>
     </p:spTree>
     <p:extLst>
       <p:ext uri="{BB962C8B-B14F-4D97-AF65-F5344CB8AC3E}">
-        <p14:creationId xmlns:p14="http://schemas.microsoft.com/office/powerpoint/2010/main" val="3530712266"/>
+        <p14:creationId xmlns:p14="http://schemas.microsoft.com/office/powerpoint/2010/main" val="2715215711"/>
       </p:ext>
     </p:extLst>
   </p:cSld>

--- a/China/CT/Presentation1.pptx
+++ b/China/CT/Presentation1.pptx
@@ -12,6 +12,7 @@
     <p:sldId id="260" r:id="rId6"/>
     <p:sldId id="261" r:id="rId7"/>
     <p:sldId id="262" r:id="rId8"/>
+    <p:sldId id="263" r:id="rId9"/>
   </p:sldIdLst>
   <p:sldSz cx="12192000" cy="6858000"/>
   <p:notesSz cx="6858000" cy="9144000"/>
@@ -265,7 +266,7 @@
           <a:p>
             <a:fld id="{ADE93143-7665-4E72-B2F5-67BA59FB1B47}" type="datetimeFigureOut">
               <a:rPr lang="en-US" smtClean="0"/>
-              <a:t>1/29/2026</a:t>
+              <a:t>8/18/2026</a:t>
             </a:fld>
             <a:endParaRPr lang="en-US"/>
           </a:p>
@@ -463,7 +464,7 @@
           <a:p>
             <a:fld id="{ADE93143-7665-4E72-B2F5-67BA59FB1B47}" type="datetimeFigureOut">
               <a:rPr lang="en-US" smtClean="0"/>
-              <a:t>1/29/2026</a:t>
+              <a:t>8/18/2026</a:t>
             </a:fld>
             <a:endParaRPr lang="en-US"/>
           </a:p>
@@ -671,7 +672,7 @@
           <a:p>
             <a:fld id="{ADE93143-7665-4E72-B2F5-67BA59FB1B47}" type="datetimeFigureOut">
               <a:rPr lang="en-US" smtClean="0"/>
-              <a:t>1/29/2026</a:t>
+              <a:t>8/18/2026</a:t>
             </a:fld>
             <a:endParaRPr lang="en-US"/>
           </a:p>
@@ -869,7 +870,7 @@
           <a:p>
             <a:fld id="{ADE93143-7665-4E72-B2F5-67BA59FB1B47}" type="datetimeFigureOut">
               <a:rPr lang="en-US" smtClean="0"/>
-              <a:t>1/29/2026</a:t>
+              <a:t>8/18/2026</a:t>
             </a:fld>
             <a:endParaRPr lang="en-US"/>
           </a:p>
@@ -1144,7 +1145,7 @@
           <a:p>
             <a:fld id="{ADE93143-7665-4E72-B2F5-67BA59FB1B47}" type="datetimeFigureOut">
               <a:rPr lang="en-US" smtClean="0"/>
-              <a:t>1/29/2026</a:t>
+              <a:t>8/18/2026</a:t>
             </a:fld>
             <a:endParaRPr lang="en-US"/>
           </a:p>
@@ -1409,7 +1410,7 @@
           <a:p>
             <a:fld id="{ADE93143-7665-4E72-B2F5-67BA59FB1B47}" type="datetimeFigureOut">
               <a:rPr lang="en-US" smtClean="0"/>
-              <a:t>1/29/2026</a:t>
+              <a:t>8/18/2026</a:t>
             </a:fld>
             <a:endParaRPr lang="en-US"/>
           </a:p>
@@ -1821,7 +1822,7 @@
           <a:p>
             <a:fld id="{ADE93143-7665-4E72-B2F5-67BA59FB1B47}" type="datetimeFigureOut">
               <a:rPr lang="en-US" smtClean="0"/>
-              <a:t>1/29/2026</a:t>
+              <a:t>8/18/2026</a:t>
             </a:fld>
             <a:endParaRPr lang="en-US"/>
           </a:p>
@@ -1962,7 +1963,7 @@
           <a:p>
             <a:fld id="{ADE93143-7665-4E72-B2F5-67BA59FB1B47}" type="datetimeFigureOut">
               <a:rPr lang="en-US" smtClean="0"/>
-              <a:t>1/29/2026</a:t>
+              <a:t>8/18/2026</a:t>
             </a:fld>
             <a:endParaRPr lang="en-US"/>
           </a:p>
@@ -2075,7 +2076,7 @@
           <a:p>
             <a:fld id="{ADE93143-7665-4E72-B2F5-67BA59FB1B47}" type="datetimeFigureOut">
               <a:rPr lang="en-US" smtClean="0"/>
-              <a:t>1/29/2026</a:t>
+              <a:t>8/18/2026</a:t>
             </a:fld>
             <a:endParaRPr lang="en-US"/>
           </a:p>
@@ -2386,7 +2387,7 @@
           <a:p>
             <a:fld id="{ADE93143-7665-4E72-B2F5-67BA59FB1B47}" type="datetimeFigureOut">
               <a:rPr lang="en-US" smtClean="0"/>
-              <a:t>1/29/2026</a:t>
+              <a:t>8/18/2026</a:t>
             </a:fld>
             <a:endParaRPr lang="en-US"/>
           </a:p>
@@ -2674,7 +2675,7 @@
           <a:p>
             <a:fld id="{ADE93143-7665-4E72-B2F5-67BA59FB1B47}" type="datetimeFigureOut">
               <a:rPr lang="en-US" smtClean="0"/>
-              <a:t>1/29/2026</a:t>
+              <a:t>8/18/2026</a:t>
             </a:fld>
             <a:endParaRPr lang="en-US"/>
           </a:p>
@@ -2915,7 +2916,7 @@
           <a:p>
             <a:fld id="{ADE93143-7665-4E72-B2F5-67BA59FB1B47}" type="datetimeFigureOut">
               <a:rPr lang="en-US" smtClean="0"/>
-              <a:t>1/29/2026</a:t>
+              <a:t>8/18/2026</a:t>
             </a:fld>
             <a:endParaRPr lang="en-US"/>
           </a:p>
@@ -6718,10 +6719,7 @@
                   <a:pPr/>
                   <a14:m>
                     <m:oMathPara xmlns:m="http://schemas.openxmlformats.org/officeDocument/2006/math">
-                      <m:oMathParaPr>
-                        <m:jc m:val="centerGroup"/>
-                      </m:oMathParaPr>
-                      <m:oMath xmlns:m="http://schemas.openxmlformats.org/officeDocument/2006/math">
+                      <m:oMath>
                         <m:r>
                           <a:rPr lang="en-US" b="0" i="1" smtClean="0">
                             <a:latin typeface="Cambria Math" panose="02040503050406030204" pitchFamily="18" charset="0"/>
@@ -6826,10 +6824,7 @@
                   <a:pPr/>
                   <a14:m>
                     <m:oMathPara xmlns:m="http://schemas.openxmlformats.org/officeDocument/2006/math">
-                      <m:oMathParaPr>
-                        <m:jc m:val="centerGroup"/>
-                      </m:oMathParaPr>
-                      <m:oMath xmlns:m="http://schemas.openxmlformats.org/officeDocument/2006/math">
+                      <m:oMath>
                         <m:r>
                           <a:rPr lang="en-US" b="0" i="1" smtClean="0">
                             <a:latin typeface="Cambria Math" panose="02040503050406030204" pitchFamily="18" charset="0"/>
@@ -6934,10 +6929,7 @@
                   <a:pPr/>
                   <a14:m>
                     <m:oMathPara xmlns:m="http://schemas.openxmlformats.org/officeDocument/2006/math">
-                      <m:oMathParaPr>
-                        <m:jc m:val="centerGroup"/>
-                      </m:oMathParaPr>
-                      <m:oMath xmlns:m="http://schemas.openxmlformats.org/officeDocument/2006/math">
+                      <m:oMath>
                         <m:r>
                           <a:rPr lang="en-US" b="0" i="1" smtClean="0">
                             <a:latin typeface="Cambria Math" panose="02040503050406030204" pitchFamily="18" charset="0"/>
@@ -7042,10 +7034,7 @@
                   <a:pPr/>
                   <a14:m>
                     <m:oMathPara xmlns:m="http://schemas.openxmlformats.org/officeDocument/2006/math">
-                      <m:oMathParaPr>
-                        <m:jc m:val="centerGroup"/>
-                      </m:oMathParaPr>
-                      <m:oMath xmlns:m="http://schemas.openxmlformats.org/officeDocument/2006/math">
+                      <m:oMath>
                         <m:r>
                           <a:rPr lang="en-US" b="0" i="1" smtClean="0">
                             <a:latin typeface="Cambria Math" panose="02040503050406030204" pitchFamily="18" charset="0"/>
@@ -7304,6 +7293,77 @@
     <p:extLst>
       <p:ext uri="{BB962C8B-B14F-4D97-AF65-F5344CB8AC3E}">
         <p14:creationId xmlns:p14="http://schemas.microsoft.com/office/powerpoint/2010/main" val="2715215711"/>
+      </p:ext>
+    </p:extLst>
+  </p:cSld>
+  <p:clrMapOvr>
+    <a:masterClrMapping/>
+  </p:clrMapOvr>
+</p:sld>
+</file>
+
+<file path=ppt/slides/slide8.xml><?xml version="1.0" encoding="utf-8"?>
+<p:sld xmlns:a="http://schemas.openxmlformats.org/drawingml/2006/main" xmlns:r="http://schemas.openxmlformats.org/officeDocument/2006/relationships" xmlns:p="http://schemas.openxmlformats.org/presentationml/2006/main">
+  <p:cSld>
+    <p:spTree>
+      <p:nvGrpSpPr>
+        <p:cNvPr id="1" name=""/>
+        <p:cNvGrpSpPr/>
+        <p:nvPr/>
+      </p:nvGrpSpPr>
+      <p:grpSpPr>
+        <a:xfrm>
+          <a:off x="0" y="0"/>
+          <a:ext cx="0" cy="0"/>
+          <a:chOff x="0" y="0"/>
+          <a:chExt cx="0" cy="0"/>
+        </a:xfrm>
+      </p:grpSpPr>
+      <p:pic>
+        <p:nvPicPr>
+          <p:cNvPr id="3" name="图片 2">
+            <a:extLst>
+              <a:ext uri="{FF2B5EF4-FFF2-40B4-BE49-F238E27FC236}">
+                <a16:creationId xmlns:a16="http://schemas.microsoft.com/office/drawing/2014/main" id="{952D8098-DDF6-AB0A-D67B-B95DE81847B5}"/>
+              </a:ext>
+            </a:extLst>
+          </p:cNvPr>
+          <p:cNvPicPr>
+            <a:picLocks noChangeAspect="1"/>
+          </p:cNvPicPr>
+          <p:nvPr/>
+        </p:nvPicPr>
+        <p:blipFill>
+          <a:blip r:embed="rId2">
+            <a:clrChange>
+              <a:clrFrom>
+                <a:srgbClr val="73737F"/>
+              </a:clrFrom>
+              <a:clrTo>
+                <a:srgbClr val="73737F">
+                  <a:alpha val="0"/>
+                </a:srgbClr>
+              </a:clrTo>
+            </a:clrChange>
+          </a:blip>
+          <a:stretch>
+            <a:fillRect/>
+          </a:stretch>
+        </p:blipFill>
+        <p:spPr>
+          <a:xfrm>
+            <a:off x="446887" y="1214128"/>
+            <a:ext cx="9659222" cy="3787131"/>
+          </a:xfrm>
+          <a:prstGeom prst="rect">
+            <a:avLst/>
+          </a:prstGeom>
+        </p:spPr>
+      </p:pic>
+    </p:spTree>
+    <p:extLst>
+      <p:ext uri="{BB962C8B-B14F-4D97-AF65-F5344CB8AC3E}">
+        <p14:creationId xmlns:p14="http://schemas.microsoft.com/office/powerpoint/2010/main" val="3760629294"/>
       </p:ext>
     </p:extLst>
   </p:cSld>
